--- a/CLASE-06/01-CLASE-06-CKA.pptx
+++ b/CLASE-06/01-CLASE-06-CKA.pptx
@@ -3207,80 +3207,30 @@
           </a:p>
         </p:txBody>
       </p:sp>
-      <p:sp>
-        <p:nvSpPr>
-          <p:cNvPr id="4" name="Freeform 3"/>
-          <p:cNvSpPr/>
-          <p:nvPr/>
-        </p:nvSpPr>
-        <p:spPr>
-          <a:xfrm>
-            <a:off x="9720832" y="400000"/>
-            <a:ext cx="2242335" cy="2186114"/>
-          </a:xfrm>
-          <a:custGeom>
-            <a:avLst/>
-            <a:gdLst/>
-            <a:ahLst/>
-            <a:cxnLst/>
-            <a:rect l="l" t="t" r="r" b="b"/>
-            <a:pathLst>
-              <a:path w="2242335" h="2186114">
-                <a:moveTo>
-                  <a:pt x="1121168" y="0"/>
-                </a:moveTo>
-                <a:lnTo>
-                  <a:pt x="2020274" y="432986"/>
-                </a:lnTo>
-                <a:lnTo>
-                  <a:pt x="2242335" y="1405899"/>
-                </a:lnTo>
-                <a:lnTo>
-                  <a:pt x="1620134" y="2186114"/>
-                </a:lnTo>
-                <a:lnTo>
-                  <a:pt x="622201" y="2186114"/>
-                </a:lnTo>
-                <a:lnTo>
-                  <a:pt x="0" y="1405899"/>
-                </a:lnTo>
-                <a:lnTo>
-                  <a:pt x="222061" y="432986"/>
-                </a:lnTo>
-                <a:close/>
-              </a:path>
-            </a:pathLst>
-          </a:custGeom>
-          <a:noFill/>
-          <a:ln w="28575">
-            <a:solidFill>
-              <a:srgbClr val="26354E"/>
-            </a:solidFill>
-          </a:ln>
-          <a:effectLst/>
-        </p:spPr>
-        <p:style>
-          <a:lnRef idx="1">
-            <a:schemeClr val="accent1"/>
-          </a:lnRef>
-          <a:fillRef idx="3">
-            <a:schemeClr val="accent1"/>
-          </a:fillRef>
-          <a:effectRef idx="2">
-            <a:schemeClr val="accent1"/>
-          </a:effectRef>
-          <a:fontRef idx="minor">
-            <a:schemeClr val="lt1"/>
-          </a:fontRef>
-        </p:style>
-        <p:txBody>
-          <a:bodyPr rtlCol="0" anchor="ctr"/>
-          <a:lstStyle/>
-          <a:p>
-            <a:pPr algn="ctr"/>
-          </a:p>
-        </p:txBody>
-      </p:sp>
+      <p:pic>
+        <p:nvPicPr>
+          <p:cNvPr id="4" name="Picture 3" descr="kubernetes.png"/>
+          <p:cNvPicPr>
+            <a:picLocks noChangeAspect="1"/>
+          </p:cNvPicPr>
+          <p:nvPr/>
+        </p:nvPicPr>
+        <p:blipFill>
+          <a:blip r:embed="rId2"/>
+          <a:stretch>
+            <a:fillRect/>
+          </a:stretch>
+        </p:blipFill>
+        <p:spPr>
+          <a:xfrm>
+            <a:off x="9642000" y="1000000"/>
+            <a:ext cx="1650000" cy="1650000"/>
+          </a:xfrm>
+          <a:prstGeom prst="rect">
+            <a:avLst/>
+          </a:prstGeom>
+        </p:spPr>
+      </p:pic>
       <p:sp>
         <p:nvSpPr>
           <p:cNvPr id="5" name="TextBox 4"/>
@@ -4252,7 +4202,7 @@
         <p:spPr>
           <a:xfrm>
             <a:off x="620000" y="560000"/>
-            <a:ext cx="10952000" cy="620000"/>
+            <a:ext cx="10052000" cy="620000"/>
           </a:xfrm>
           <a:prstGeom prst="rect">
             <a:avLst/>
@@ -4473,9 +4423,33 @@
           </a:p>
         </p:txBody>
       </p:sp>
-      <p:sp>
-        <p:nvSpPr>
-          <p:cNvPr id="8" name="Rounded Rectangle 7"/>
+      <p:pic>
+        <p:nvPicPr>
+          <p:cNvPr id="8" name="Picture 7" descr="cp-sched.png"/>
+          <p:cNvPicPr>
+            <a:picLocks noChangeAspect="1"/>
+          </p:cNvPicPr>
+          <p:nvPr/>
+        </p:nvPicPr>
+        <p:blipFill>
+          <a:blip r:embed="rId2"/>
+          <a:stretch>
+            <a:fillRect/>
+          </a:stretch>
+        </p:blipFill>
+        <p:spPr>
+          <a:xfrm>
+            <a:off x="10932000" y="275000"/>
+            <a:ext cx="640000" cy="640000"/>
+          </a:xfrm>
+          <a:prstGeom prst="rect">
+            <a:avLst/>
+          </a:prstGeom>
+        </p:spPr>
+      </p:pic>
+      <p:sp>
+        <p:nvSpPr>
+          <p:cNvPr id="9" name="Rounded Rectangle 8"/>
           <p:cNvSpPr/>
           <p:nvPr/>
         </p:nvSpPr>
@@ -4525,7 +4499,7 @@
       </p:sp>
       <p:sp>
         <p:nvSpPr>
-          <p:cNvPr id="9" name="Rectangle 8"/>
+          <p:cNvPr id="10" name="Rectangle 9"/>
           <p:cNvSpPr/>
           <p:nvPr/>
         </p:nvSpPr>
@@ -4571,7 +4545,7 @@
       </p:sp>
       <p:sp>
         <p:nvSpPr>
-          <p:cNvPr id="10" name="TextBox 9"/>
+          <p:cNvPr id="11" name="TextBox 10"/>
           <p:cNvSpPr txBox="1"/>
           <p:nvPr/>
         </p:nvSpPr>
@@ -4640,7 +4614,7 @@
       </p:sp>
       <p:sp>
         <p:nvSpPr>
-          <p:cNvPr id="11" name="TextBox 10"/>
+          <p:cNvPr id="12" name="TextBox 11"/>
           <p:cNvSpPr txBox="1"/>
           <p:nvPr/>
         </p:nvSpPr>
@@ -4760,7 +4734,7 @@
       </p:sp>
       <p:sp>
         <p:nvSpPr>
-          <p:cNvPr id="12" name="Rounded Rectangle 11"/>
+          <p:cNvPr id="13" name="Rounded Rectangle 12"/>
           <p:cNvSpPr/>
           <p:nvPr/>
         </p:nvSpPr>
@@ -4810,7 +4784,7 @@
       </p:sp>
       <p:sp>
         <p:nvSpPr>
-          <p:cNvPr id="13" name="Rectangle 12"/>
+          <p:cNvPr id="14" name="Rectangle 13"/>
           <p:cNvSpPr/>
           <p:nvPr/>
         </p:nvSpPr>
@@ -4856,7 +4830,7 @@
       </p:sp>
       <p:sp>
         <p:nvSpPr>
-          <p:cNvPr id="14" name="TextBox 13"/>
+          <p:cNvPr id="15" name="TextBox 14"/>
           <p:cNvSpPr txBox="1"/>
           <p:nvPr/>
         </p:nvSpPr>
@@ -4925,7 +4899,7 @@
       </p:sp>
       <p:sp>
         <p:nvSpPr>
-          <p:cNvPr id="15" name="TextBox 14"/>
+          <p:cNvPr id="16" name="TextBox 15"/>
           <p:cNvSpPr txBox="1"/>
           <p:nvPr/>
         </p:nvSpPr>
@@ -5045,7 +5019,7 @@
       </p:sp>
       <p:sp>
         <p:nvSpPr>
-          <p:cNvPr id="16" name="Rounded Rectangle 15"/>
+          <p:cNvPr id="17" name="Rounded Rectangle 16"/>
           <p:cNvSpPr/>
           <p:nvPr/>
         </p:nvSpPr>
@@ -5095,7 +5069,7 @@
       </p:sp>
       <p:sp>
         <p:nvSpPr>
-          <p:cNvPr id="17" name="Rectangle 16"/>
+          <p:cNvPr id="18" name="Rectangle 17"/>
           <p:cNvSpPr/>
           <p:nvPr/>
         </p:nvSpPr>
@@ -5141,7 +5115,7 @@
       </p:sp>
       <p:sp>
         <p:nvSpPr>
-          <p:cNvPr id="18" name="TextBox 17"/>
+          <p:cNvPr id="19" name="TextBox 18"/>
           <p:cNvSpPr txBox="1"/>
           <p:nvPr/>
         </p:nvSpPr>
@@ -5266,7 +5240,7 @@
         <p:spPr>
           <a:xfrm>
             <a:off x="620000" y="560000"/>
-            <a:ext cx="10952000" cy="620000"/>
+            <a:ext cx="10052000" cy="620000"/>
           </a:xfrm>
           <a:prstGeom prst="rect">
             <a:avLst/>
@@ -5487,20 +5461,44 @@
           </a:p>
         </p:txBody>
       </p:sp>
-      <p:sp>
-        <p:nvSpPr>
-          <p:cNvPr id="8" name="Rounded Rectangle 7"/>
+      <p:pic>
+        <p:nvPicPr>
+          <p:cNvPr id="8" name="Picture 7" descr="control-plane.png"/>
+          <p:cNvPicPr>
+            <a:picLocks noChangeAspect="1"/>
+          </p:cNvPicPr>
+          <p:nvPr/>
+        </p:nvPicPr>
+        <p:blipFill>
+          <a:blip r:embed="rId2"/>
+          <a:stretch>
+            <a:fillRect/>
+          </a:stretch>
+        </p:blipFill>
+        <p:spPr>
+          <a:xfrm>
+            <a:off x="10932000" y="275000"/>
+            <a:ext cx="640000" cy="640000"/>
+          </a:xfrm>
+          <a:prstGeom prst="rect">
+            <a:avLst/>
+          </a:prstGeom>
+        </p:spPr>
+      </p:pic>
+      <p:sp>
+        <p:nvSpPr>
+          <p:cNvPr id="9" name="Rounded Rectangle 8"/>
           <p:cNvSpPr/>
           <p:nvPr/>
         </p:nvSpPr>
         <p:spPr>
           <a:xfrm>
-            <a:off x="620000" y="1790000"/>
-            <a:ext cx="2070400" cy="720000"/>
+            <a:off x="620000" y="1830000"/>
+            <a:ext cx="2022400" cy="760000"/>
           </a:xfrm>
           <a:prstGeom prst="roundRect">
             <a:avLst>
-              <a:gd name="adj" fmla="val 12000"/>
+              <a:gd name="adj" fmla="val 11000"/>
             </a:avLst>
           </a:prstGeom>
           <a:solidFill>
@@ -5539,60 +5537,14 @@
       </p:sp>
       <p:sp>
         <p:nvSpPr>
-          <p:cNvPr id="9" name="TextBox 8"/>
-          <p:cNvSpPr txBox="1"/>
-          <p:nvPr/>
-        </p:nvSpPr>
-        <p:spPr>
-          <a:xfrm>
-            <a:off x="690000" y="1790000"/>
-            <a:ext cx="1930400" cy="720000"/>
-          </a:xfrm>
-          <a:prstGeom prst="rect">
-            <a:avLst/>
-          </a:prstGeom>
-          <a:noFill/>
-        </p:spPr>
-        <p:txBody>
-          <a:bodyPr wrap="square" anchor="ctr" lIns="0" rIns="0" tIns="0" bIns="0">
-            <a:noAutofit/>
-          </a:bodyPr>
-          <a:lstStyle/>
-          <a:p>
-            <a:pPr algn="ctr" marL="0" indent="0">
-              <a:lnSpc>
-                <a:spcPct val="112000"/>
-              </a:lnSpc>
-              <a:spcBef>
-                <a:spcPts val="0"/>
-              </a:spcBef>
-              <a:spcAft>
-                <a:spcPts val="0"/>
-              </a:spcAft>
-              <a:buNone/>
-            </a:pPr>
-            <a:r>
-              <a:rPr sz="1100" b="1" i="0">
-                <a:solidFill>
-                  <a:srgbClr val="F3F6FC"/>
-                </a:solidFill>
-                <a:latin typeface="Segoe UI Semibold"/>
-              </a:rPr>
-              <a:t>kubectl no responde</a:t>
-            </a:r>
-          </a:p>
-        </p:txBody>
-      </p:sp>
-      <p:sp>
-        <p:nvSpPr>
           <p:cNvPr id="10" name="TextBox 9"/>
           <p:cNvSpPr txBox="1"/>
           <p:nvPr/>
         </p:nvSpPr>
         <p:spPr>
           <a:xfrm>
-            <a:off x="2650400" y="1790000"/>
-            <a:ext cx="230000" cy="720000"/>
+            <a:off x="690000" y="1830000"/>
+            <a:ext cx="1882400" cy="760000"/>
           </a:xfrm>
           <a:prstGeom prst="rect">
             <a:avLst/>
@@ -5607,42 +5559,79 @@
           <a:p>
             <a:pPr algn="ctr" marL="0" indent="0">
               <a:lnSpc>
-                <a:spcPct val="100000"/>
-              </a:lnSpc>
-              <a:spcBef>
-                <a:spcPts val="0"/>
-              </a:spcBef>
-              <a:spcAft>
-                <a:spcPts val="0"/>
-              </a:spcAft>
-              <a:buNone/>
-            </a:pPr>
-            <a:r>
-              <a:rPr sz="1500" b="0" i="0">
-                <a:solidFill>
-                  <a:srgbClr val="74A6FF"/>
-                </a:solidFill>
-                <a:latin typeface="Segoe UI"/>
-              </a:rPr>
-              <a:t>→</a:t>
-            </a:r>
-          </a:p>
-        </p:txBody>
-      </p:sp>
-      <p:sp>
-        <p:nvSpPr>
-          <p:cNvPr id="11" name="Rounded Rectangle 10"/>
+                <a:spcPct val="112000"/>
+              </a:lnSpc>
+              <a:spcBef>
+                <a:spcPts val="0"/>
+              </a:spcBef>
+              <a:spcAft>
+                <a:spcPts val="0"/>
+              </a:spcAft>
+              <a:buNone/>
+            </a:pPr>
+            <a:r>
+              <a:rPr sz="1100" b="1" i="0">
+                <a:solidFill>
+                  <a:srgbClr val="F3F6FC"/>
+                </a:solidFill>
+                <a:latin typeface="Segoe UI Semibold"/>
+              </a:rPr>
+              <a:t>kubectl no responde</a:t>
+            </a:r>
+          </a:p>
+        </p:txBody>
+      </p:sp>
+      <p:cxnSp>
+        <p:nvCxnSpPr>
+          <p:cNvPr id="11" name="Connector 10"/>
+          <p:cNvCxnSpPr/>
+          <p:nvPr/>
+        </p:nvCxnSpPr>
+        <p:spPr>
+          <a:xfrm>
+            <a:off x="2666400" y="2210000"/>
+            <a:ext cx="162000" cy="0"/>
+          </a:xfrm>
+          <a:prstGeom prst="line">
+            <a:avLst/>
+          </a:prstGeom>
+          <a:ln w="22225">
+            <a:solidFill>
+              <a:srgbClr val="74A6FF"/>
+            </a:solidFill>
+            <a:tailEnd type="triangle" w="med" len="med"/>
+          </a:ln>
+          <a:effectLst/>
+        </p:spPr>
+        <p:style>
+          <a:lnRef idx="2">
+            <a:schemeClr val="accent1"/>
+          </a:lnRef>
+          <a:fillRef idx="0">
+            <a:schemeClr val="accent1"/>
+          </a:fillRef>
+          <a:effectRef idx="1">
+            <a:schemeClr val="accent1"/>
+          </a:effectRef>
+          <a:fontRef idx="minor">
+            <a:schemeClr val="tx1"/>
+          </a:fontRef>
+        </p:style>
+      </p:cxnSp>
+      <p:sp>
+        <p:nvSpPr>
+          <p:cNvPr id="12" name="Rounded Rectangle 11"/>
           <p:cNvSpPr/>
           <p:nvPr/>
         </p:nvSpPr>
         <p:spPr>
           <a:xfrm>
-            <a:off x="2840400" y="1790000"/>
-            <a:ext cx="2070400" cy="720000"/>
+            <a:off x="2852400" y="1830000"/>
+            <a:ext cx="2022400" cy="760000"/>
           </a:xfrm>
           <a:prstGeom prst="roundRect">
             <a:avLst>
-              <a:gd name="adj" fmla="val 12000"/>
+              <a:gd name="adj" fmla="val 11000"/>
             </a:avLst>
           </a:prstGeom>
           <a:solidFill>
@@ -5681,60 +5670,14 @@
       </p:sp>
       <p:sp>
         <p:nvSpPr>
-          <p:cNvPr id="12" name="TextBox 11"/>
-          <p:cNvSpPr txBox="1"/>
-          <p:nvPr/>
-        </p:nvSpPr>
-        <p:spPr>
-          <a:xfrm>
-            <a:off x="2910400" y="1790000"/>
-            <a:ext cx="1930400" cy="720000"/>
-          </a:xfrm>
-          <a:prstGeom prst="rect">
-            <a:avLst/>
-          </a:prstGeom>
-          <a:noFill/>
-        </p:spPr>
-        <p:txBody>
-          <a:bodyPr wrap="square" anchor="ctr" lIns="0" rIns="0" tIns="0" bIns="0">
-            <a:noAutofit/>
-          </a:bodyPr>
-          <a:lstStyle/>
-          <a:p>
-            <a:pPr algn="ctr" marL="0" indent="0">
-              <a:lnSpc>
-                <a:spcPct val="112000"/>
-              </a:lnSpc>
-              <a:spcBef>
-                <a:spcPts val="0"/>
-              </a:spcBef>
-              <a:spcAft>
-                <a:spcPts val="0"/>
-              </a:spcAft>
-              <a:buNone/>
-            </a:pPr>
-            <a:r>
-              <a:rPr sz="1100" b="1" i="0">
-                <a:solidFill>
-                  <a:srgbClr val="F3F6FC"/>
-                </a:solidFill>
-                <a:latin typeface="Segoe UI Semibold"/>
-              </a:rPr>
-              <a:t>systemctl status kubelet</a:t>
-            </a:r>
-          </a:p>
-        </p:txBody>
-      </p:sp>
-      <p:sp>
-        <p:nvSpPr>
           <p:cNvPr id="13" name="TextBox 12"/>
           <p:cNvSpPr txBox="1"/>
           <p:nvPr/>
         </p:nvSpPr>
         <p:spPr>
           <a:xfrm>
-            <a:off x="4870800" y="1790000"/>
-            <a:ext cx="230000" cy="720000"/>
+            <a:off x="2922400" y="1830000"/>
+            <a:ext cx="1882400" cy="760000"/>
           </a:xfrm>
           <a:prstGeom prst="rect">
             <a:avLst/>
@@ -5749,42 +5692,79 @@
           <a:p>
             <a:pPr algn="ctr" marL="0" indent="0">
               <a:lnSpc>
-                <a:spcPct val="100000"/>
-              </a:lnSpc>
-              <a:spcBef>
-                <a:spcPts val="0"/>
-              </a:spcBef>
-              <a:spcAft>
-                <a:spcPts val="0"/>
-              </a:spcAft>
-              <a:buNone/>
-            </a:pPr>
-            <a:r>
-              <a:rPr sz="1500" b="0" i="0">
-                <a:solidFill>
-                  <a:srgbClr val="74A6FF"/>
-                </a:solidFill>
-                <a:latin typeface="Segoe UI"/>
-              </a:rPr>
-              <a:t>→</a:t>
-            </a:r>
-          </a:p>
-        </p:txBody>
-      </p:sp>
-      <p:sp>
-        <p:nvSpPr>
-          <p:cNvPr id="14" name="Rounded Rectangle 13"/>
+                <a:spcPct val="112000"/>
+              </a:lnSpc>
+              <a:spcBef>
+                <a:spcPts val="0"/>
+              </a:spcBef>
+              <a:spcAft>
+                <a:spcPts val="0"/>
+              </a:spcAft>
+              <a:buNone/>
+            </a:pPr>
+            <a:r>
+              <a:rPr sz="1100" b="1" i="0">
+                <a:solidFill>
+                  <a:srgbClr val="F3F6FC"/>
+                </a:solidFill>
+                <a:latin typeface="Segoe UI Semibold"/>
+              </a:rPr>
+              <a:t>systemctl status kubelet</a:t>
+            </a:r>
+          </a:p>
+        </p:txBody>
+      </p:sp>
+      <p:cxnSp>
+        <p:nvCxnSpPr>
+          <p:cNvPr id="14" name="Connector 13"/>
+          <p:cNvCxnSpPr/>
+          <p:nvPr/>
+        </p:nvCxnSpPr>
+        <p:spPr>
+          <a:xfrm>
+            <a:off x="4898800" y="2210000"/>
+            <a:ext cx="162000" cy="0"/>
+          </a:xfrm>
+          <a:prstGeom prst="line">
+            <a:avLst/>
+          </a:prstGeom>
+          <a:ln w="22225">
+            <a:solidFill>
+              <a:srgbClr val="74A6FF"/>
+            </a:solidFill>
+            <a:tailEnd type="triangle" w="med" len="med"/>
+          </a:ln>
+          <a:effectLst/>
+        </p:spPr>
+        <p:style>
+          <a:lnRef idx="2">
+            <a:schemeClr val="accent1"/>
+          </a:lnRef>
+          <a:fillRef idx="0">
+            <a:schemeClr val="accent1"/>
+          </a:fillRef>
+          <a:effectRef idx="1">
+            <a:schemeClr val="accent1"/>
+          </a:effectRef>
+          <a:fontRef idx="minor">
+            <a:schemeClr val="tx1"/>
+          </a:fontRef>
+        </p:style>
+      </p:cxnSp>
+      <p:sp>
+        <p:nvSpPr>
+          <p:cNvPr id="15" name="Rounded Rectangle 14"/>
           <p:cNvSpPr/>
           <p:nvPr/>
         </p:nvSpPr>
         <p:spPr>
           <a:xfrm>
-            <a:off x="5060800" y="1790000"/>
-            <a:ext cx="2070400" cy="720000"/>
+            <a:off x="5084800" y="1830000"/>
+            <a:ext cx="2022400" cy="760000"/>
           </a:xfrm>
           <a:prstGeom prst="roundRect">
             <a:avLst>
-              <a:gd name="adj" fmla="val 12000"/>
+              <a:gd name="adj" fmla="val 11000"/>
             </a:avLst>
           </a:prstGeom>
           <a:solidFill>
@@ -5823,60 +5803,14 @@
       </p:sp>
       <p:sp>
         <p:nvSpPr>
-          <p:cNvPr id="15" name="TextBox 14"/>
-          <p:cNvSpPr txBox="1"/>
-          <p:nvPr/>
-        </p:nvSpPr>
-        <p:spPr>
-          <a:xfrm>
-            <a:off x="5130800" y="1790000"/>
-            <a:ext cx="1930400" cy="720000"/>
-          </a:xfrm>
-          <a:prstGeom prst="rect">
-            <a:avLst/>
-          </a:prstGeom>
-          <a:noFill/>
-        </p:spPr>
-        <p:txBody>
-          <a:bodyPr wrap="square" anchor="ctr" lIns="0" rIns="0" tIns="0" bIns="0">
-            <a:noAutofit/>
-          </a:bodyPr>
-          <a:lstStyle/>
-          <a:p>
-            <a:pPr algn="ctr" marL="0" indent="0">
-              <a:lnSpc>
-                <a:spcPct val="112000"/>
-              </a:lnSpc>
-              <a:spcBef>
-                <a:spcPts val="0"/>
-              </a:spcBef>
-              <a:spcAft>
-                <a:spcPts val="0"/>
-              </a:spcAft>
-              <a:buNone/>
-            </a:pPr>
-            <a:r>
-              <a:rPr sz="1100" b="1" i="0">
-                <a:solidFill>
-                  <a:srgbClr val="F3F6FC"/>
-                </a:solidFill>
-                <a:latin typeface="Segoe UI Semibold"/>
-              </a:rPr>
-              <a:t>crictl ps -a</a:t>
-            </a:r>
-          </a:p>
-        </p:txBody>
-      </p:sp>
-      <p:sp>
-        <p:nvSpPr>
           <p:cNvPr id="16" name="TextBox 15"/>
           <p:cNvSpPr txBox="1"/>
           <p:nvPr/>
         </p:nvSpPr>
         <p:spPr>
           <a:xfrm>
-            <a:off x="7091200" y="1790000"/>
-            <a:ext cx="230000" cy="720000"/>
+            <a:off x="5154800" y="1830000"/>
+            <a:ext cx="1882400" cy="760000"/>
           </a:xfrm>
           <a:prstGeom prst="rect">
             <a:avLst/>
@@ -5891,42 +5825,79 @@
           <a:p>
             <a:pPr algn="ctr" marL="0" indent="0">
               <a:lnSpc>
-                <a:spcPct val="100000"/>
-              </a:lnSpc>
-              <a:spcBef>
-                <a:spcPts val="0"/>
-              </a:spcBef>
-              <a:spcAft>
-                <a:spcPts val="0"/>
-              </a:spcAft>
-              <a:buNone/>
-            </a:pPr>
-            <a:r>
-              <a:rPr sz="1500" b="0" i="0">
-                <a:solidFill>
-                  <a:srgbClr val="74A6FF"/>
-                </a:solidFill>
-                <a:latin typeface="Segoe UI"/>
-              </a:rPr>
-              <a:t>→</a:t>
-            </a:r>
-          </a:p>
-        </p:txBody>
-      </p:sp>
-      <p:sp>
-        <p:nvSpPr>
-          <p:cNvPr id="17" name="Rounded Rectangle 16"/>
+                <a:spcPct val="112000"/>
+              </a:lnSpc>
+              <a:spcBef>
+                <a:spcPts val="0"/>
+              </a:spcBef>
+              <a:spcAft>
+                <a:spcPts val="0"/>
+              </a:spcAft>
+              <a:buNone/>
+            </a:pPr>
+            <a:r>
+              <a:rPr sz="1100" b="1" i="0">
+                <a:solidFill>
+                  <a:srgbClr val="F3F6FC"/>
+                </a:solidFill>
+                <a:latin typeface="Segoe UI Semibold"/>
+              </a:rPr>
+              <a:t>crictl ps -a</a:t>
+            </a:r>
+          </a:p>
+        </p:txBody>
+      </p:sp>
+      <p:cxnSp>
+        <p:nvCxnSpPr>
+          <p:cNvPr id="17" name="Connector 16"/>
+          <p:cNvCxnSpPr/>
+          <p:nvPr/>
+        </p:nvCxnSpPr>
+        <p:spPr>
+          <a:xfrm>
+            <a:off x="7131200" y="2210000"/>
+            <a:ext cx="162000" cy="0"/>
+          </a:xfrm>
+          <a:prstGeom prst="line">
+            <a:avLst/>
+          </a:prstGeom>
+          <a:ln w="22225">
+            <a:solidFill>
+              <a:srgbClr val="74A6FF"/>
+            </a:solidFill>
+            <a:tailEnd type="triangle" w="med" len="med"/>
+          </a:ln>
+          <a:effectLst/>
+        </p:spPr>
+        <p:style>
+          <a:lnRef idx="2">
+            <a:schemeClr val="accent1"/>
+          </a:lnRef>
+          <a:fillRef idx="0">
+            <a:schemeClr val="accent1"/>
+          </a:fillRef>
+          <a:effectRef idx="1">
+            <a:schemeClr val="accent1"/>
+          </a:effectRef>
+          <a:fontRef idx="minor">
+            <a:schemeClr val="tx1"/>
+          </a:fontRef>
+        </p:style>
+      </p:cxnSp>
+      <p:sp>
+        <p:nvSpPr>
+          <p:cNvPr id="18" name="Rounded Rectangle 17"/>
           <p:cNvSpPr/>
           <p:nvPr/>
         </p:nvSpPr>
         <p:spPr>
           <a:xfrm>
-            <a:off x="7281200" y="1790000"/>
-            <a:ext cx="2070400" cy="720000"/>
+            <a:off x="7317200" y="1830000"/>
+            <a:ext cx="2022400" cy="760000"/>
           </a:xfrm>
           <a:prstGeom prst="roundRect">
             <a:avLst>
-              <a:gd name="adj" fmla="val 12000"/>
+              <a:gd name="adj" fmla="val 11000"/>
             </a:avLst>
           </a:prstGeom>
           <a:solidFill>
@@ -5965,60 +5936,14 @@
       </p:sp>
       <p:sp>
         <p:nvSpPr>
-          <p:cNvPr id="18" name="TextBox 17"/>
-          <p:cNvSpPr txBox="1"/>
-          <p:nvPr/>
-        </p:nvSpPr>
-        <p:spPr>
-          <a:xfrm>
-            <a:off x="7351200" y="1790000"/>
-            <a:ext cx="1930400" cy="720000"/>
-          </a:xfrm>
-          <a:prstGeom prst="rect">
-            <a:avLst/>
-          </a:prstGeom>
-          <a:noFill/>
-        </p:spPr>
-        <p:txBody>
-          <a:bodyPr wrap="square" anchor="ctr" lIns="0" rIns="0" tIns="0" bIns="0">
-            <a:noAutofit/>
-          </a:bodyPr>
-          <a:lstStyle/>
-          <a:p>
-            <a:pPr algn="ctr" marL="0" indent="0">
-              <a:lnSpc>
-                <a:spcPct val="112000"/>
-              </a:lnSpc>
-              <a:spcBef>
-                <a:spcPts val="0"/>
-              </a:spcBef>
-              <a:spcAft>
-                <a:spcPts val="0"/>
-              </a:spcAft>
-              <a:buNone/>
-            </a:pPr>
-            <a:r>
-              <a:rPr sz="1100" b="1" i="0">
-                <a:solidFill>
-                  <a:srgbClr val="F3F6FC"/>
-                </a:solidFill>
-                <a:latin typeface="Segoe UI Semibold"/>
-              </a:rPr>
-              <a:t>crictl logs / journalctl</a:t>
-            </a:r>
-          </a:p>
-        </p:txBody>
-      </p:sp>
-      <p:sp>
-        <p:nvSpPr>
           <p:cNvPr id="19" name="TextBox 18"/>
           <p:cNvSpPr txBox="1"/>
           <p:nvPr/>
         </p:nvSpPr>
         <p:spPr>
           <a:xfrm>
-            <a:off x="9311600" y="1790000"/>
-            <a:ext cx="230000" cy="720000"/>
+            <a:off x="7387200" y="1830000"/>
+            <a:ext cx="1882400" cy="760000"/>
           </a:xfrm>
           <a:prstGeom prst="rect">
             <a:avLst/>
@@ -6033,42 +5958,79 @@
           <a:p>
             <a:pPr algn="ctr" marL="0" indent="0">
               <a:lnSpc>
-                <a:spcPct val="100000"/>
-              </a:lnSpc>
-              <a:spcBef>
-                <a:spcPts val="0"/>
-              </a:spcBef>
-              <a:spcAft>
-                <a:spcPts val="0"/>
-              </a:spcAft>
-              <a:buNone/>
-            </a:pPr>
-            <a:r>
-              <a:rPr sz="1500" b="0" i="0">
-                <a:solidFill>
-                  <a:srgbClr val="74A6FF"/>
-                </a:solidFill>
-                <a:latin typeface="Segoe UI"/>
-              </a:rPr>
-              <a:t>→</a:t>
-            </a:r>
-          </a:p>
-        </p:txBody>
-      </p:sp>
-      <p:sp>
-        <p:nvSpPr>
-          <p:cNvPr id="20" name="Rounded Rectangle 19"/>
+                <a:spcPct val="112000"/>
+              </a:lnSpc>
+              <a:spcBef>
+                <a:spcPts val="0"/>
+              </a:spcBef>
+              <a:spcAft>
+                <a:spcPts val="0"/>
+              </a:spcAft>
+              <a:buNone/>
+            </a:pPr>
+            <a:r>
+              <a:rPr sz="1100" b="1" i="0">
+                <a:solidFill>
+                  <a:srgbClr val="F3F6FC"/>
+                </a:solidFill>
+                <a:latin typeface="Segoe UI Semibold"/>
+              </a:rPr>
+              <a:t>crictl logs / journalctl</a:t>
+            </a:r>
+          </a:p>
+        </p:txBody>
+      </p:sp>
+      <p:cxnSp>
+        <p:nvCxnSpPr>
+          <p:cNvPr id="20" name="Connector 19"/>
+          <p:cNvCxnSpPr/>
+          <p:nvPr/>
+        </p:nvCxnSpPr>
+        <p:spPr>
+          <a:xfrm>
+            <a:off x="9363600" y="2210000"/>
+            <a:ext cx="162000" cy="0"/>
+          </a:xfrm>
+          <a:prstGeom prst="line">
+            <a:avLst/>
+          </a:prstGeom>
+          <a:ln w="22225">
+            <a:solidFill>
+              <a:srgbClr val="74A6FF"/>
+            </a:solidFill>
+            <a:tailEnd type="triangle" w="med" len="med"/>
+          </a:ln>
+          <a:effectLst/>
+        </p:spPr>
+        <p:style>
+          <a:lnRef idx="2">
+            <a:schemeClr val="accent1"/>
+          </a:lnRef>
+          <a:fillRef idx="0">
+            <a:schemeClr val="accent1"/>
+          </a:fillRef>
+          <a:effectRef idx="1">
+            <a:schemeClr val="accent1"/>
+          </a:effectRef>
+          <a:fontRef idx="minor">
+            <a:schemeClr val="tx1"/>
+          </a:fontRef>
+        </p:style>
+      </p:cxnSp>
+      <p:sp>
+        <p:nvSpPr>
+          <p:cNvPr id="21" name="Rounded Rectangle 20"/>
           <p:cNvSpPr/>
           <p:nvPr/>
         </p:nvSpPr>
         <p:spPr>
           <a:xfrm>
-            <a:off x="9501600" y="1790000"/>
-            <a:ext cx="2070400" cy="720000"/>
+            <a:off x="9549600" y="1830000"/>
+            <a:ext cx="2022400" cy="760000"/>
           </a:xfrm>
           <a:prstGeom prst="roundRect">
             <a:avLst>
-              <a:gd name="adj" fmla="val 12000"/>
+              <a:gd name="adj" fmla="val 11000"/>
             </a:avLst>
           </a:prstGeom>
           <a:solidFill>
@@ -6107,14 +6069,14 @@
       </p:sp>
       <p:sp>
         <p:nvSpPr>
-          <p:cNvPr id="21" name="TextBox 20"/>
+          <p:cNvPr id="22" name="TextBox 21"/>
           <p:cNvSpPr txBox="1"/>
           <p:nvPr/>
         </p:nvSpPr>
         <p:spPr>
           <a:xfrm>
-            <a:off x="9571600" y="1790000"/>
-            <a:ext cx="1930400" cy="720000"/>
+            <a:off x="9619600" y="1830000"/>
+            <a:ext cx="1882400" cy="760000"/>
           </a:xfrm>
           <a:prstGeom prst="rect">
             <a:avLst/>
@@ -6153,13 +6115,13 @@
       </p:sp>
       <p:sp>
         <p:nvSpPr>
-          <p:cNvPr id="22" name="Rounded Rectangle 21"/>
+          <p:cNvPr id="23" name="Rounded Rectangle 22"/>
           <p:cNvSpPr/>
           <p:nvPr/>
         </p:nvSpPr>
         <p:spPr>
           <a:xfrm>
-            <a:off x="620000" y="2830000"/>
+            <a:off x="620000" y="2950000"/>
             <a:ext cx="10952000" cy="2320000"/>
           </a:xfrm>
           <a:prstGeom prst="roundRect">
@@ -6203,13 +6165,13 @@
       </p:sp>
       <p:sp>
         <p:nvSpPr>
-          <p:cNvPr id="23" name="Rectangle 22"/>
+          <p:cNvPr id="24" name="Rectangle 23"/>
           <p:cNvSpPr/>
           <p:nvPr/>
         </p:nvSpPr>
         <p:spPr>
           <a:xfrm>
-            <a:off x="650000" y="2854000"/>
+            <a:off x="650000" y="2974000"/>
             <a:ext cx="40000" cy="2272000"/>
           </a:xfrm>
           <a:prstGeom prst="rect">
@@ -6249,13 +6211,13 @@
       </p:sp>
       <p:sp>
         <p:nvSpPr>
-          <p:cNvPr id="24" name="TextBox 23"/>
+          <p:cNvPr id="25" name="TextBox 24"/>
           <p:cNvSpPr txBox="1"/>
           <p:nvPr/>
         </p:nvSpPr>
         <p:spPr>
           <a:xfrm>
-            <a:off x="880000" y="3070000"/>
+            <a:off x="880000" y="3190000"/>
             <a:ext cx="10432000" cy="1920000"/>
           </a:xfrm>
           <a:prstGeom prst="rect">
@@ -7229,7 +7191,149 @@
       </p:sp>
       <p:sp>
         <p:nvSpPr>
-          <p:cNvPr id="16" name="Rounded Rectangle 15"/>
+          <p:cNvPr id="16" name="Freeform 15"/>
+          <p:cNvSpPr/>
+          <p:nvPr/>
+        </p:nvSpPr>
+        <p:spPr>
+          <a:xfrm>
+            <a:off x="9590000" y="1418800"/>
+            <a:ext cx="784000" cy="842800"/>
+          </a:xfrm>
+          <a:custGeom>
+            <a:avLst/>
+            <a:gdLst/>
+            <a:ahLst/>
+            <a:cxnLst/>
+            <a:rect l="l" t="t" r="r" b="b"/>
+            <a:pathLst>
+              <a:path w="784000" h="842800">
+                <a:moveTo>
+                  <a:pt x="235200" y="0"/>
+                </a:moveTo>
+                <a:lnTo>
+                  <a:pt x="235200" y="333200"/>
+                </a:lnTo>
+                <a:lnTo>
+                  <a:pt x="0" y="842800"/>
+                </a:lnTo>
+                <a:lnTo>
+                  <a:pt x="784000" y="842800"/>
+                </a:lnTo>
+                <a:lnTo>
+                  <a:pt x="548800" y="333200"/>
+                </a:lnTo>
+                <a:lnTo>
+                  <a:pt x="548800" y="0"/>
+                </a:lnTo>
+              </a:path>
+            </a:pathLst>
+          </a:custGeom>
+          <a:noFill/>
+          <a:ln w="33020">
+            <a:solidFill>
+              <a:srgbClr val="74A6FF"/>
+            </a:solidFill>
+          </a:ln>
+          <a:effectLst/>
+        </p:spPr>
+        <p:style>
+          <a:lnRef idx="1">
+            <a:schemeClr val="accent1"/>
+          </a:lnRef>
+          <a:fillRef idx="3">
+            <a:schemeClr val="accent1"/>
+          </a:fillRef>
+          <a:effectRef idx="2">
+            <a:schemeClr val="accent1"/>
+          </a:effectRef>
+          <a:fontRef idx="minor">
+            <a:schemeClr val="lt1"/>
+          </a:fontRef>
+        </p:style>
+        <p:txBody>
+          <a:bodyPr rtlCol="0" anchor="ctr"/>
+          <a:lstStyle/>
+          <a:p>
+            <a:pPr algn="ctr"/>
+          </a:p>
+        </p:txBody>
+      </p:sp>
+      <p:cxnSp>
+        <p:nvCxnSpPr>
+          <p:cNvPr id="17" name="Connector 16"/>
+          <p:cNvCxnSpPr/>
+          <p:nvPr/>
+        </p:nvCxnSpPr>
+        <p:spPr>
+          <a:xfrm>
+            <a:off x="9766400" y="1418800"/>
+            <a:ext cx="431200" cy="0"/>
+          </a:xfrm>
+          <a:prstGeom prst="line">
+            <a:avLst/>
+          </a:prstGeom>
+          <a:ln w="33020">
+            <a:solidFill>
+              <a:srgbClr val="74A6FF"/>
+            </a:solidFill>
+          </a:ln>
+          <a:effectLst/>
+        </p:spPr>
+        <p:style>
+          <a:lnRef idx="2">
+            <a:schemeClr val="accent1"/>
+          </a:lnRef>
+          <a:fillRef idx="0">
+            <a:schemeClr val="accent1"/>
+          </a:fillRef>
+          <a:effectRef idx="1">
+            <a:schemeClr val="accent1"/>
+          </a:effectRef>
+          <a:fontRef idx="minor">
+            <a:schemeClr val="tx1"/>
+          </a:fontRef>
+        </p:style>
+      </p:cxnSp>
+      <p:cxnSp>
+        <p:nvCxnSpPr>
+          <p:cNvPr id="18" name="Connector 17"/>
+          <p:cNvCxnSpPr/>
+          <p:nvPr/>
+        </p:nvCxnSpPr>
+        <p:spPr>
+          <a:xfrm>
+            <a:off x="9727200" y="2006800"/>
+            <a:ext cx="509600" cy="0"/>
+          </a:xfrm>
+          <a:prstGeom prst="line">
+            <a:avLst/>
+          </a:prstGeom>
+          <a:ln w="33020">
+            <a:solidFill>
+              <a:srgbClr val="74A6FF"/>
+            </a:solidFill>
+          </a:ln>
+          <a:effectLst/>
+        </p:spPr>
+        <p:style>
+          <a:lnRef idx="2">
+            <a:schemeClr val="accent1"/>
+          </a:lnRef>
+          <a:fillRef idx="0">
+            <a:schemeClr val="accent1"/>
+          </a:fillRef>
+          <a:effectRef idx="1">
+            <a:schemeClr val="accent1"/>
+          </a:effectRef>
+          <a:fontRef idx="minor">
+            <a:schemeClr val="tx1"/>
+          </a:fontRef>
+        </p:style>
+      </p:cxnSp>
+      <p:sp>
+        <p:nvSpPr>
+          <p:cNvPr id="19" name="Rounded Rectangle 18"/>
           <p:cNvSpPr/>
           <p:nvPr/>
         </p:nvSpPr>
@@ -7279,7 +7383,7 @@
       </p:sp>
       <p:sp>
         <p:nvSpPr>
-          <p:cNvPr id="17" name="Rectangle 16"/>
+          <p:cNvPr id="20" name="Rectangle 19"/>
           <p:cNvSpPr/>
           <p:nvPr/>
         </p:nvSpPr>
@@ -7325,7 +7429,7 @@
       </p:sp>
       <p:sp>
         <p:nvSpPr>
-          <p:cNvPr id="18" name="TextBox 17"/>
+          <p:cNvPr id="21" name="TextBox 20"/>
           <p:cNvSpPr txBox="1"/>
           <p:nvPr/>
         </p:nvSpPr>
@@ -7394,7 +7498,7 @@
       </p:sp>
       <p:sp>
         <p:nvSpPr>
-          <p:cNvPr id="19" name="Rectangle 18"/>
+          <p:cNvPr id="22" name="Rectangle 21"/>
           <p:cNvSpPr/>
           <p:nvPr/>
         </p:nvSpPr>
@@ -7440,7 +7544,7 @@
       </p:sp>
       <p:sp>
         <p:nvSpPr>
-          <p:cNvPr id="20" name="TextBox 19"/>
+          <p:cNvPr id="23" name="TextBox 22"/>
           <p:cNvSpPr txBox="1"/>
           <p:nvPr/>
         </p:nvSpPr>
@@ -7509,7 +7613,7 @@
       </p:sp>
       <p:sp>
         <p:nvSpPr>
-          <p:cNvPr id="21" name="Rectangle 20"/>
+          <p:cNvPr id="24" name="Rectangle 23"/>
           <p:cNvSpPr/>
           <p:nvPr/>
         </p:nvSpPr>
@@ -7555,7 +7659,7 @@
       </p:sp>
       <p:sp>
         <p:nvSpPr>
-          <p:cNvPr id="22" name="TextBox 21"/>
+          <p:cNvPr id="25" name="TextBox 24"/>
           <p:cNvSpPr txBox="1"/>
           <p:nvPr/>
         </p:nvSpPr>
@@ -7624,7 +7728,7 @@
       </p:sp>
       <p:sp>
         <p:nvSpPr>
-          <p:cNvPr id="23" name="Rectangle 22"/>
+          <p:cNvPr id="26" name="Rectangle 25"/>
           <p:cNvSpPr/>
           <p:nvPr/>
         </p:nvSpPr>
@@ -7670,7 +7774,7 @@
       </p:sp>
       <p:sp>
         <p:nvSpPr>
-          <p:cNvPr id="24" name="TextBox 23"/>
+          <p:cNvPr id="27" name="TextBox 26"/>
           <p:cNvSpPr txBox="1"/>
           <p:nvPr/>
         </p:nvSpPr>
@@ -7716,7 +7820,7 @@
       </p:sp>
       <p:sp>
         <p:nvSpPr>
-          <p:cNvPr id="25" name="TextBox 24"/>
+          <p:cNvPr id="28" name="TextBox 27"/>
           <p:cNvSpPr txBox="1"/>
           <p:nvPr/>
         </p:nvSpPr>
@@ -7830,80 +7934,30 @@
           </a:p>
         </p:txBody>
       </p:sp>
-      <p:sp>
-        <p:nvSpPr>
-          <p:cNvPr id="3" name="Freeform 2"/>
-          <p:cNvSpPr/>
-          <p:nvPr/>
-        </p:nvSpPr>
-        <p:spPr>
-          <a:xfrm>
-            <a:off x="9479608" y="4208000"/>
-            <a:ext cx="2924783" cy="2851453"/>
-          </a:xfrm>
-          <a:custGeom>
-            <a:avLst/>
-            <a:gdLst/>
-            <a:ahLst/>
-            <a:cxnLst/>
-            <a:rect l="l" t="t" r="r" b="b"/>
-            <a:pathLst>
-              <a:path w="2924783" h="2851453">
-                <a:moveTo>
-                  <a:pt x="1462392" y="0"/>
-                </a:moveTo>
-                <a:lnTo>
-                  <a:pt x="2635139" y="564765"/>
-                </a:lnTo>
-                <a:lnTo>
-                  <a:pt x="2924783" y="1833781"/>
-                </a:lnTo>
-                <a:lnTo>
-                  <a:pt x="2113217" y="2851453"/>
-                </a:lnTo>
-                <a:lnTo>
-                  <a:pt x="811566" y="2851453"/>
-                </a:lnTo>
-                <a:lnTo>
-                  <a:pt x="0" y="1833781"/>
-                </a:lnTo>
-                <a:lnTo>
-                  <a:pt x="289644" y="564765"/>
-                </a:lnTo>
-                <a:close/>
-              </a:path>
-            </a:pathLst>
-          </a:custGeom>
-          <a:noFill/>
-          <a:ln w="31750">
-            <a:solidFill>
-              <a:srgbClr val="26354E"/>
-            </a:solidFill>
-          </a:ln>
-          <a:effectLst/>
-        </p:spPr>
-        <p:style>
-          <a:lnRef idx="1">
-            <a:schemeClr val="accent1"/>
-          </a:lnRef>
-          <a:fillRef idx="3">
-            <a:schemeClr val="accent1"/>
-          </a:fillRef>
-          <a:effectRef idx="2">
-            <a:schemeClr val="accent1"/>
-          </a:effectRef>
-          <a:fontRef idx="minor">
-            <a:schemeClr val="lt1"/>
-          </a:fontRef>
-        </p:style>
-        <p:txBody>
-          <a:bodyPr rtlCol="0" anchor="ctr"/>
-          <a:lstStyle/>
-          <a:p>
-            <a:pPr algn="ctr"/>
-          </a:p>
-        </p:txBody>
-      </p:sp>
+      <p:pic>
+        <p:nvPicPr>
+          <p:cNvPr id="3" name="Picture 2" descr="deploy.png"/>
+          <p:cNvPicPr>
+            <a:picLocks noChangeAspect="1"/>
+          </p:cNvPicPr>
+          <p:nvPr/>
+        </p:nvPicPr>
+        <p:blipFill>
+          <a:blip r:embed="rId2"/>
+          <a:stretch>
+            <a:fillRect/>
+          </a:stretch>
+        </p:blipFill>
+        <p:spPr>
+          <a:xfrm>
+            <a:off x="8842000" y="2150000"/>
+            <a:ext cx="1800000" cy="1800000"/>
+          </a:xfrm>
+          <a:prstGeom prst="rect">
+            <a:avLst/>
+          </a:prstGeom>
+        </p:spPr>
+      </p:pic>
       <p:sp>
         <p:nvSpPr>
           <p:cNvPr id="4" name="TextBox 3"/>
@@ -8353,7 +8407,7 @@
         <p:spPr>
           <a:xfrm>
             <a:off x="620000" y="560000"/>
-            <a:ext cx="10952000" cy="620000"/>
+            <a:ext cx="10052000" cy="620000"/>
           </a:xfrm>
           <a:prstGeom prst="rect">
             <a:avLst/>
@@ -8736,52 +8790,30 @@
           </a:p>
         </p:txBody>
       </p:sp>
-      <p:sp>
-        <p:nvSpPr>
-          <p:cNvPr id="11" name="TextBox 10"/>
-          <p:cNvSpPr txBox="1"/>
-          <p:nvPr/>
-        </p:nvSpPr>
-        <p:spPr>
-          <a:xfrm>
-            <a:off x="1260000" y="2132000"/>
-            <a:ext cx="2747333" cy="340000"/>
-          </a:xfrm>
-          <a:prstGeom prst="rect">
-            <a:avLst/>
-          </a:prstGeom>
-          <a:noFill/>
-        </p:spPr>
-        <p:txBody>
-          <a:bodyPr wrap="square" anchor="ctr" lIns="0" rIns="0" tIns="0" bIns="0">
-            <a:noAutofit/>
-          </a:bodyPr>
-          <a:lstStyle/>
-          <a:p>
-            <a:pPr algn="l" marL="0" indent="0">
-              <a:lnSpc>
-                <a:spcPct val="105000"/>
-              </a:lnSpc>
-              <a:spcBef>
-                <a:spcPts val="0"/>
-              </a:spcBef>
-              <a:spcAft>
-                <a:spcPts val="0"/>
-              </a:spcAft>
-              <a:buNone/>
-            </a:pPr>
-            <a:r>
-              <a:rPr sz="1500" b="1" i="0">
-                <a:solidFill>
-                  <a:srgbClr val="F3F6FC"/>
-                </a:solidFill>
-                <a:latin typeface="Segoe UI Semibold"/>
-              </a:rPr>
-              <a:t>POD</a:t>
-            </a:r>
-          </a:p>
-        </p:txBody>
-      </p:sp>
+      <p:pic>
+        <p:nvPicPr>
+          <p:cNvPr id="11" name="Picture 10" descr="pod.png"/>
+          <p:cNvPicPr>
+            <a:picLocks noChangeAspect="1"/>
+          </p:cNvPicPr>
+          <p:nvPr/>
+        </p:nvPicPr>
+        <p:blipFill>
+          <a:blip r:embed="rId2"/>
+          <a:stretch>
+            <a:fillRect/>
+          </a:stretch>
+        </p:blipFill>
+        <p:spPr>
+          <a:xfrm>
+            <a:off x="3497333" y="2138000"/>
+            <a:ext cx="330000" cy="330000"/>
+          </a:xfrm>
+          <a:prstGeom prst="rect">
+            <a:avLst/>
+          </a:prstGeom>
+        </p:spPr>
+      </p:pic>
       <p:sp>
         <p:nvSpPr>
           <p:cNvPr id="12" name="TextBox 11"/>
@@ -8790,6 +8822,52 @@
         </p:nvSpPr>
         <p:spPr>
           <a:xfrm>
+            <a:off x="1260000" y="2132000"/>
+            <a:ext cx="2377333" cy="340000"/>
+          </a:xfrm>
+          <a:prstGeom prst="rect">
+            <a:avLst/>
+          </a:prstGeom>
+          <a:noFill/>
+        </p:spPr>
+        <p:txBody>
+          <a:bodyPr wrap="square" anchor="ctr" lIns="0" rIns="0" tIns="0" bIns="0">
+            <a:noAutofit/>
+          </a:bodyPr>
+          <a:lstStyle/>
+          <a:p>
+            <a:pPr algn="l" marL="0" indent="0">
+              <a:lnSpc>
+                <a:spcPct val="105000"/>
+              </a:lnSpc>
+              <a:spcBef>
+                <a:spcPts val="0"/>
+              </a:spcBef>
+              <a:spcAft>
+                <a:spcPts val="0"/>
+              </a:spcAft>
+              <a:buNone/>
+            </a:pPr>
+            <a:r>
+              <a:rPr sz="1500" b="1" i="0">
+                <a:solidFill>
+                  <a:srgbClr val="F3F6FC"/>
+                </a:solidFill>
+                <a:latin typeface="Segoe UI Semibold"/>
+              </a:rPr>
+              <a:t>POD</a:t>
+            </a:r>
+          </a:p>
+        </p:txBody>
+      </p:sp>
+      <p:sp>
+        <p:nvSpPr>
+          <p:cNvPr id="13" name="TextBox 12"/>
+          <p:cNvSpPr txBox="1"/>
+          <p:nvPr/>
+        </p:nvSpPr>
+        <p:spPr>
+          <a:xfrm>
             <a:off x="850000" y="2552000"/>
             <a:ext cx="2977333" cy="838000"/>
           </a:xfrm>
@@ -8830,7 +8908,7 @@
       </p:sp>
       <p:sp>
         <p:nvSpPr>
-          <p:cNvPr id="13" name="Rounded Rectangle 12"/>
+          <p:cNvPr id="14" name="Rounded Rectangle 13"/>
           <p:cNvSpPr/>
           <p:nvPr/>
         </p:nvSpPr>
@@ -8880,7 +8958,7 @@
       </p:sp>
       <p:sp>
         <p:nvSpPr>
-          <p:cNvPr id="14" name="Rectangle 13"/>
+          <p:cNvPr id="15" name="Rectangle 14"/>
           <p:cNvSpPr/>
           <p:nvPr/>
         </p:nvSpPr>
@@ -8926,7 +9004,7 @@
       </p:sp>
       <p:sp>
         <p:nvSpPr>
-          <p:cNvPr id="15" name="Oval 14"/>
+          <p:cNvPr id="16" name="Oval 15"/>
           <p:cNvSpPr/>
           <p:nvPr/>
         </p:nvSpPr>
@@ -8990,16 +9068,40 @@
           </a:p>
         </p:txBody>
       </p:sp>
-      <p:sp>
-        <p:nvSpPr>
-          <p:cNvPr id="16" name="TextBox 15"/>
+      <p:pic>
+        <p:nvPicPr>
+          <p:cNvPr id="17" name="Picture 16" descr="cp-sched.png"/>
+          <p:cNvPicPr>
+            <a:picLocks noChangeAspect="1"/>
+          </p:cNvPicPr>
+          <p:nvPr/>
+        </p:nvPicPr>
+        <p:blipFill>
+          <a:blip r:embed="rId3"/>
+          <a:stretch>
+            <a:fillRect/>
+          </a:stretch>
+        </p:blipFill>
+        <p:spPr>
+          <a:xfrm>
+            <a:off x="7254666" y="2138000"/>
+            <a:ext cx="330000" cy="330000"/>
+          </a:xfrm>
+          <a:prstGeom prst="rect">
+            <a:avLst/>
+          </a:prstGeom>
+        </p:spPr>
+      </p:pic>
+      <p:sp>
+        <p:nvSpPr>
+          <p:cNvPr id="18" name="TextBox 17"/>
           <p:cNvSpPr txBox="1"/>
           <p:nvPr/>
         </p:nvSpPr>
         <p:spPr>
           <a:xfrm>
             <a:off x="5017333" y="2132000"/>
-            <a:ext cx="2747333" cy="340000"/>
+            <a:ext cx="2377333" cy="340000"/>
           </a:xfrm>
           <a:prstGeom prst="rect">
             <a:avLst/>
@@ -9038,7 +9140,7 @@
       </p:sp>
       <p:sp>
         <p:nvSpPr>
-          <p:cNvPr id="17" name="TextBox 16"/>
+          <p:cNvPr id="19" name="TextBox 18"/>
           <p:cNvSpPr txBox="1"/>
           <p:nvPr/>
         </p:nvSpPr>
@@ -9084,7 +9186,7 @@
       </p:sp>
       <p:sp>
         <p:nvSpPr>
-          <p:cNvPr id="18" name="Rounded Rectangle 17"/>
+          <p:cNvPr id="20" name="Rounded Rectangle 19"/>
           <p:cNvSpPr/>
           <p:nvPr/>
         </p:nvSpPr>
@@ -9134,7 +9236,7 @@
       </p:sp>
       <p:sp>
         <p:nvSpPr>
-          <p:cNvPr id="19" name="Rectangle 18"/>
+          <p:cNvPr id="21" name="Rectangle 20"/>
           <p:cNvSpPr/>
           <p:nvPr/>
         </p:nvSpPr>
@@ -9180,7 +9282,7 @@
       </p:sp>
       <p:sp>
         <p:nvSpPr>
-          <p:cNvPr id="20" name="Oval 19"/>
+          <p:cNvPr id="22" name="Oval 21"/>
           <p:cNvSpPr/>
           <p:nvPr/>
         </p:nvSpPr>
@@ -9244,16 +9346,40 @@
           </a:p>
         </p:txBody>
       </p:sp>
-      <p:sp>
-        <p:nvSpPr>
-          <p:cNvPr id="21" name="TextBox 20"/>
+      <p:pic>
+        <p:nvPicPr>
+          <p:cNvPr id="23" name="Picture 22" descr="svc.png"/>
+          <p:cNvPicPr>
+            <a:picLocks noChangeAspect="1"/>
+          </p:cNvPicPr>
+          <p:nvPr/>
+        </p:nvPicPr>
+        <p:blipFill>
+          <a:blip r:embed="rId4"/>
+          <a:stretch>
+            <a:fillRect/>
+          </a:stretch>
+        </p:blipFill>
+        <p:spPr>
+          <a:xfrm>
+            <a:off x="11012000" y="2138000"/>
+            <a:ext cx="330000" cy="330000"/>
+          </a:xfrm>
+          <a:prstGeom prst="rect">
+            <a:avLst/>
+          </a:prstGeom>
+        </p:spPr>
+      </p:pic>
+      <p:sp>
+        <p:nvSpPr>
+          <p:cNvPr id="24" name="TextBox 23"/>
           <p:cNvSpPr txBox="1"/>
           <p:nvPr/>
         </p:nvSpPr>
         <p:spPr>
           <a:xfrm>
             <a:off x="8774666" y="2132000"/>
-            <a:ext cx="2747333" cy="340000"/>
+            <a:ext cx="2377333" cy="340000"/>
           </a:xfrm>
           <a:prstGeom prst="rect">
             <a:avLst/>
@@ -9292,7 +9418,7 @@
       </p:sp>
       <p:sp>
         <p:nvSpPr>
-          <p:cNvPr id="22" name="TextBox 21"/>
+          <p:cNvPr id="25" name="TextBox 24"/>
           <p:cNvSpPr txBox="1"/>
           <p:nvPr/>
         </p:nvSpPr>
@@ -9338,7 +9464,7 @@
       </p:sp>
       <p:sp>
         <p:nvSpPr>
-          <p:cNvPr id="23" name="Rounded Rectangle 22"/>
+          <p:cNvPr id="26" name="Rounded Rectangle 25"/>
           <p:cNvSpPr/>
           <p:nvPr/>
         </p:nvSpPr>
@@ -9388,7 +9514,7 @@
       </p:sp>
       <p:sp>
         <p:nvSpPr>
-          <p:cNvPr id="24" name="Rectangle 23"/>
+          <p:cNvPr id="27" name="Rectangle 26"/>
           <p:cNvSpPr/>
           <p:nvPr/>
         </p:nvSpPr>
@@ -9434,7 +9560,7 @@
       </p:sp>
       <p:sp>
         <p:nvSpPr>
-          <p:cNvPr id="25" name="Oval 24"/>
+          <p:cNvPr id="28" name="Oval 27"/>
           <p:cNvSpPr/>
           <p:nvPr/>
         </p:nvSpPr>
@@ -9498,16 +9624,40 @@
           </a:p>
         </p:txBody>
       </p:sp>
-      <p:sp>
-        <p:nvSpPr>
-          <p:cNvPr id="26" name="TextBox 25"/>
+      <p:pic>
+        <p:nvPicPr>
+          <p:cNvPr id="29" name="Picture 28" descr="pv.png"/>
+          <p:cNvPicPr>
+            <a:picLocks noChangeAspect="1"/>
+          </p:cNvPicPr>
+          <p:nvPr/>
+        </p:nvPicPr>
+        <p:blipFill>
+          <a:blip r:embed="rId5"/>
+          <a:stretch>
+            <a:fillRect/>
+          </a:stretch>
+        </p:blipFill>
+        <p:spPr>
+          <a:xfrm>
+            <a:off x="3497333" y="3946000"/>
+            <a:ext cx="330000" cy="330000"/>
+          </a:xfrm>
+          <a:prstGeom prst="rect">
+            <a:avLst/>
+          </a:prstGeom>
+        </p:spPr>
+      </p:pic>
+      <p:sp>
+        <p:nvSpPr>
+          <p:cNvPr id="30" name="TextBox 29"/>
           <p:cNvSpPr txBox="1"/>
           <p:nvPr/>
         </p:nvSpPr>
         <p:spPr>
           <a:xfrm>
             <a:off x="1260000" y="3940000"/>
-            <a:ext cx="2747333" cy="340000"/>
+            <a:ext cx="2377333" cy="340000"/>
           </a:xfrm>
           <a:prstGeom prst="rect">
             <a:avLst/>
@@ -9546,7 +9696,7 @@
       </p:sp>
       <p:sp>
         <p:nvSpPr>
-          <p:cNvPr id="27" name="TextBox 26"/>
+          <p:cNvPr id="31" name="TextBox 30"/>
           <p:cNvSpPr txBox="1"/>
           <p:nvPr/>
         </p:nvSpPr>
@@ -9592,7 +9742,7 @@
       </p:sp>
       <p:sp>
         <p:nvSpPr>
-          <p:cNvPr id="28" name="Rounded Rectangle 27"/>
+          <p:cNvPr id="32" name="Rounded Rectangle 31"/>
           <p:cNvSpPr/>
           <p:nvPr/>
         </p:nvSpPr>
@@ -9642,7 +9792,7 @@
       </p:sp>
       <p:sp>
         <p:nvSpPr>
-          <p:cNvPr id="29" name="Rectangle 28"/>
+          <p:cNvPr id="33" name="Rectangle 32"/>
           <p:cNvSpPr/>
           <p:nvPr/>
         </p:nvSpPr>
@@ -9688,7 +9838,7 @@
       </p:sp>
       <p:sp>
         <p:nvSpPr>
-          <p:cNvPr id="30" name="Oval 29"/>
+          <p:cNvPr id="34" name="Oval 33"/>
           <p:cNvSpPr/>
           <p:nvPr/>
         </p:nvSpPr>
@@ -9752,16 +9902,40 @@
           </a:p>
         </p:txBody>
       </p:sp>
-      <p:sp>
-        <p:nvSpPr>
-          <p:cNvPr id="31" name="TextBox 30"/>
+      <p:pic>
+        <p:nvPicPr>
+          <p:cNvPr id="35" name="Picture 34" descr="role.png"/>
+          <p:cNvPicPr>
+            <a:picLocks noChangeAspect="1"/>
+          </p:cNvPicPr>
+          <p:nvPr/>
+        </p:nvPicPr>
+        <p:blipFill>
+          <a:blip r:embed="rId6"/>
+          <a:stretch>
+            <a:fillRect/>
+          </a:stretch>
+        </p:blipFill>
+        <p:spPr>
+          <a:xfrm>
+            <a:off x="7254666" y="3946000"/>
+            <a:ext cx="330000" cy="330000"/>
+          </a:xfrm>
+          <a:prstGeom prst="rect">
+            <a:avLst/>
+          </a:prstGeom>
+        </p:spPr>
+      </p:pic>
+      <p:sp>
+        <p:nvSpPr>
+          <p:cNvPr id="36" name="TextBox 35"/>
           <p:cNvSpPr txBox="1"/>
           <p:nvPr/>
         </p:nvSpPr>
         <p:spPr>
           <a:xfrm>
             <a:off x="5017333" y="3940000"/>
-            <a:ext cx="2747333" cy="340000"/>
+            <a:ext cx="2377333" cy="340000"/>
           </a:xfrm>
           <a:prstGeom prst="rect">
             <a:avLst/>
@@ -9800,7 +9974,7 @@
       </p:sp>
       <p:sp>
         <p:nvSpPr>
-          <p:cNvPr id="32" name="TextBox 31"/>
+          <p:cNvPr id="37" name="TextBox 36"/>
           <p:cNvSpPr txBox="1"/>
           <p:nvPr/>
         </p:nvSpPr>
@@ -9846,7 +10020,7 @@
       </p:sp>
       <p:sp>
         <p:nvSpPr>
-          <p:cNvPr id="33" name="Rounded Rectangle 32"/>
+          <p:cNvPr id="38" name="Rounded Rectangle 37"/>
           <p:cNvSpPr/>
           <p:nvPr/>
         </p:nvSpPr>
@@ -9896,7 +10070,7 @@
       </p:sp>
       <p:sp>
         <p:nvSpPr>
-          <p:cNvPr id="34" name="Rectangle 33"/>
+          <p:cNvPr id="39" name="Rectangle 38"/>
           <p:cNvSpPr/>
           <p:nvPr/>
         </p:nvSpPr>
@@ -9942,7 +10116,7 @@
       </p:sp>
       <p:sp>
         <p:nvSpPr>
-          <p:cNvPr id="35" name="Oval 34"/>
+          <p:cNvPr id="40" name="Oval 39"/>
           <p:cNvSpPr/>
           <p:nvPr/>
         </p:nvSpPr>
@@ -10006,16 +10180,40 @@
           </a:p>
         </p:txBody>
       </p:sp>
-      <p:sp>
-        <p:nvSpPr>
-          <p:cNvPr id="36" name="TextBox 35"/>
+      <p:pic>
+        <p:nvPicPr>
+          <p:cNvPr id="41" name="Picture 40" descr="svc.png"/>
+          <p:cNvPicPr>
+            <a:picLocks noChangeAspect="1"/>
+          </p:cNvPicPr>
+          <p:nvPr/>
+        </p:nvPicPr>
+        <p:blipFill>
+          <a:blip r:embed="rId4"/>
+          <a:stretch>
+            <a:fillRect/>
+          </a:stretch>
+        </p:blipFill>
+        <p:spPr>
+          <a:xfrm>
+            <a:off x="11012000" y="3946000"/>
+            <a:ext cx="330000" cy="330000"/>
+          </a:xfrm>
+          <a:prstGeom prst="rect">
+            <a:avLst/>
+          </a:prstGeom>
+        </p:spPr>
+      </p:pic>
+      <p:sp>
+        <p:nvSpPr>
+          <p:cNvPr id="42" name="TextBox 41"/>
           <p:cNvSpPr txBox="1"/>
           <p:nvPr/>
         </p:nvSpPr>
         <p:spPr>
           <a:xfrm>
             <a:off x="8774666" y="3940000"/>
-            <a:ext cx="2747333" cy="340000"/>
+            <a:ext cx="2377333" cy="340000"/>
           </a:xfrm>
           <a:prstGeom prst="rect">
             <a:avLst/>
@@ -10054,7 +10252,7 @@
       </p:sp>
       <p:sp>
         <p:nvSpPr>
-          <p:cNvPr id="37" name="TextBox 36"/>
+          <p:cNvPr id="43" name="TextBox 42"/>
           <p:cNvSpPr txBox="1"/>
           <p:nvPr/>
         </p:nvSpPr>
@@ -10100,7 +10298,7 @@
       </p:sp>
       <p:sp>
         <p:nvSpPr>
-          <p:cNvPr id="38" name="Rounded Rectangle 37"/>
+          <p:cNvPr id="44" name="Rounded Rectangle 43"/>
           <p:cNvSpPr/>
           <p:nvPr/>
         </p:nvSpPr>
@@ -10150,7 +10348,7 @@
       </p:sp>
       <p:sp>
         <p:nvSpPr>
-          <p:cNvPr id="39" name="Rectangle 38"/>
+          <p:cNvPr id="45" name="Rectangle 44"/>
           <p:cNvSpPr/>
           <p:nvPr/>
         </p:nvSpPr>
@@ -10196,7 +10394,7 @@
       </p:sp>
       <p:sp>
         <p:nvSpPr>
-          <p:cNvPr id="40" name="TextBox 39"/>
+          <p:cNvPr id="46" name="TextBox 45"/>
           <p:cNvSpPr txBox="1"/>
           <p:nvPr/>
         </p:nvSpPr>
@@ -10321,7 +10519,7 @@
         <p:spPr>
           <a:xfrm>
             <a:off x="620000" y="560000"/>
-            <a:ext cx="10952000" cy="620000"/>
+            <a:ext cx="10052000" cy="620000"/>
           </a:xfrm>
           <a:prstGeom prst="rect">
             <a:avLst/>
@@ -10542,20 +10740,44 @@
           </a:p>
         </p:txBody>
       </p:sp>
-      <p:sp>
-        <p:nvSpPr>
-          <p:cNvPr id="8" name="Rounded Rectangle 7"/>
+      <p:pic>
+        <p:nvPicPr>
+          <p:cNvPr id="8" name="Picture 7" descr="svc.png"/>
+          <p:cNvPicPr>
+            <a:picLocks noChangeAspect="1"/>
+          </p:cNvPicPr>
+          <p:nvPr/>
+        </p:nvPicPr>
+        <p:blipFill>
+          <a:blip r:embed="rId2"/>
+          <a:stretch>
+            <a:fillRect/>
+          </a:stretch>
+        </p:blipFill>
+        <p:spPr>
+          <a:xfrm>
+            <a:off x="10932000" y="275000"/>
+            <a:ext cx="640000" cy="640000"/>
+          </a:xfrm>
+          <a:prstGeom prst="rect">
+            <a:avLst/>
+          </a:prstGeom>
+        </p:spPr>
+      </p:pic>
+      <p:sp>
+        <p:nvSpPr>
+          <p:cNvPr id="9" name="Rounded Rectangle 8"/>
           <p:cNvSpPr/>
           <p:nvPr/>
         </p:nvSpPr>
         <p:spPr>
           <a:xfrm>
-            <a:off x="620000" y="1670000"/>
-            <a:ext cx="3550666" cy="660000"/>
+            <a:off x="620000" y="1710000"/>
+            <a:ext cx="3510666" cy="680000"/>
           </a:xfrm>
           <a:prstGeom prst="roundRect">
             <a:avLst>
-              <a:gd name="adj" fmla="val 12000"/>
+              <a:gd name="adj" fmla="val 11000"/>
             </a:avLst>
           </a:prstGeom>
           <a:solidFill>
@@ -10594,60 +10816,14 @@
       </p:sp>
       <p:sp>
         <p:nvSpPr>
-          <p:cNvPr id="9" name="TextBox 8"/>
-          <p:cNvSpPr txBox="1"/>
-          <p:nvPr/>
-        </p:nvSpPr>
-        <p:spPr>
-          <a:xfrm>
-            <a:off x="690000" y="1670000"/>
-            <a:ext cx="3410666" cy="660000"/>
-          </a:xfrm>
-          <a:prstGeom prst="rect">
-            <a:avLst/>
-          </a:prstGeom>
-          <a:noFill/>
-        </p:spPr>
-        <p:txBody>
-          <a:bodyPr wrap="square" anchor="ctr" lIns="0" rIns="0" tIns="0" bIns="0">
-            <a:noAutofit/>
-          </a:bodyPr>
-          <a:lstStyle/>
-          <a:p>
-            <a:pPr algn="ctr" marL="0" indent="0">
-              <a:lnSpc>
-                <a:spcPct val="112000"/>
-              </a:lnSpc>
-              <a:spcBef>
-                <a:spcPts val="0"/>
-              </a:spcBef>
-              <a:spcAft>
-                <a:spcPts val="0"/>
-              </a:spcAft>
-              <a:buNone/>
-            </a:pPr>
-            <a:r>
-              <a:rPr sz="1100" b="1" i="0">
-                <a:solidFill>
-                  <a:srgbClr val="F3F6FC"/>
-                </a:solidFill>
-                <a:latin typeface="Segoe UI Semibold"/>
-              </a:rPr>
-              <a:t>PERMISOS</a:t>
-            </a:r>
-          </a:p>
-        </p:txBody>
-      </p:sp>
-      <p:sp>
-        <p:nvSpPr>
           <p:cNvPr id="10" name="TextBox 9"/>
           <p:cNvSpPr txBox="1"/>
           <p:nvPr/>
         </p:nvSpPr>
         <p:spPr>
           <a:xfrm>
-            <a:off x="4130666" y="1670000"/>
-            <a:ext cx="230000" cy="660000"/>
+            <a:off x="690000" y="1710000"/>
+            <a:ext cx="3370666" cy="680000"/>
           </a:xfrm>
           <a:prstGeom prst="rect">
             <a:avLst/>
@@ -10662,42 +10838,79 @@
           <a:p>
             <a:pPr algn="ctr" marL="0" indent="0">
               <a:lnSpc>
-                <a:spcPct val="100000"/>
-              </a:lnSpc>
-              <a:spcBef>
-                <a:spcPts val="0"/>
-              </a:spcBef>
-              <a:spcAft>
-                <a:spcPts val="0"/>
-              </a:spcAft>
-              <a:buNone/>
-            </a:pPr>
-            <a:r>
-              <a:rPr sz="1500" b="0" i="0">
-                <a:solidFill>
-                  <a:srgbClr val="74A6FF"/>
-                </a:solidFill>
-                <a:latin typeface="Segoe UI"/>
-              </a:rPr>
-              <a:t>→</a:t>
-            </a:r>
-          </a:p>
-        </p:txBody>
-      </p:sp>
-      <p:sp>
-        <p:nvSpPr>
-          <p:cNvPr id="11" name="Rounded Rectangle 10"/>
+                <a:spcPct val="112000"/>
+              </a:lnSpc>
+              <a:spcBef>
+                <a:spcPts val="0"/>
+              </a:spcBef>
+              <a:spcAft>
+                <a:spcPts val="0"/>
+              </a:spcAft>
+              <a:buNone/>
+            </a:pPr>
+            <a:r>
+              <a:rPr sz="1100" b="1" i="0">
+                <a:solidFill>
+                  <a:srgbClr val="F3F6FC"/>
+                </a:solidFill>
+                <a:latin typeface="Segoe UI Semibold"/>
+              </a:rPr>
+              <a:t>PERMISOS</a:t>
+            </a:r>
+          </a:p>
+        </p:txBody>
+      </p:sp>
+      <p:cxnSp>
+        <p:nvCxnSpPr>
+          <p:cNvPr id="11" name="Connector 10"/>
+          <p:cNvCxnSpPr/>
+          <p:nvPr/>
+        </p:nvCxnSpPr>
+        <p:spPr>
+          <a:xfrm>
+            <a:off x="4154666" y="2050000"/>
+            <a:ext cx="162000" cy="0"/>
+          </a:xfrm>
+          <a:prstGeom prst="line">
+            <a:avLst/>
+          </a:prstGeom>
+          <a:ln w="22225">
+            <a:solidFill>
+              <a:srgbClr val="74A6FF"/>
+            </a:solidFill>
+            <a:tailEnd type="triangle" w="med" len="med"/>
+          </a:ln>
+          <a:effectLst/>
+        </p:spPr>
+        <p:style>
+          <a:lnRef idx="2">
+            <a:schemeClr val="accent1"/>
+          </a:lnRef>
+          <a:fillRef idx="0">
+            <a:schemeClr val="accent1"/>
+          </a:fillRef>
+          <a:effectRef idx="1">
+            <a:schemeClr val="accent1"/>
+          </a:effectRef>
+          <a:fontRef idx="minor">
+            <a:schemeClr val="tx1"/>
+          </a:fontRef>
+        </p:style>
+      </p:cxnSp>
+      <p:sp>
+        <p:nvSpPr>
+          <p:cNvPr id="12" name="Rounded Rectangle 11"/>
           <p:cNvSpPr/>
           <p:nvPr/>
         </p:nvSpPr>
         <p:spPr>
           <a:xfrm>
-            <a:off x="4320666" y="1670000"/>
-            <a:ext cx="3550666" cy="660000"/>
+            <a:off x="4340666" y="1710000"/>
+            <a:ext cx="3510666" cy="680000"/>
           </a:xfrm>
           <a:prstGeom prst="roundRect">
             <a:avLst>
-              <a:gd name="adj" fmla="val 12000"/>
+              <a:gd name="adj" fmla="val 11000"/>
             </a:avLst>
           </a:prstGeom>
           <a:solidFill>
@@ -10736,60 +10949,14 @@
       </p:sp>
       <p:sp>
         <p:nvSpPr>
-          <p:cNvPr id="12" name="TextBox 11"/>
-          <p:cNvSpPr txBox="1"/>
-          <p:nvPr/>
-        </p:nvSpPr>
-        <p:spPr>
-          <a:xfrm>
-            <a:off x="4390666" y="1670000"/>
-            <a:ext cx="3410666" cy="660000"/>
-          </a:xfrm>
-          <a:prstGeom prst="rect">
-            <a:avLst/>
-          </a:prstGeom>
-          <a:noFill/>
-        </p:spPr>
-        <p:txBody>
-          <a:bodyPr wrap="square" anchor="ctr" lIns="0" rIns="0" tIns="0" bIns="0">
-            <a:noAutofit/>
-          </a:bodyPr>
-          <a:lstStyle/>
-          <a:p>
-            <a:pPr algn="ctr" marL="0" indent="0">
-              <a:lnSpc>
-                <a:spcPct val="112000"/>
-              </a:lnSpc>
-              <a:spcBef>
-                <a:spcPts val="0"/>
-              </a:spcBef>
-              <a:spcAft>
-                <a:spcPts val="0"/>
-              </a:spcAft>
-              <a:buNone/>
-            </a:pPr>
-            <a:r>
-              <a:rPr sz="1100" b="1" i="0">
-                <a:solidFill>
-                  <a:srgbClr val="F3F6FC"/>
-                </a:solidFill>
-                <a:latin typeface="Segoe UI Semibold"/>
-              </a:rPr>
-              <a:t>SCHEDULING</a:t>
-            </a:r>
-          </a:p>
-        </p:txBody>
-      </p:sp>
-      <p:sp>
-        <p:nvSpPr>
           <p:cNvPr id="13" name="TextBox 12"/>
           <p:cNvSpPr txBox="1"/>
           <p:nvPr/>
         </p:nvSpPr>
         <p:spPr>
           <a:xfrm>
-            <a:off x="7831333" y="1670000"/>
-            <a:ext cx="230000" cy="660000"/>
+            <a:off x="4410666" y="1710000"/>
+            <a:ext cx="3370666" cy="680000"/>
           </a:xfrm>
           <a:prstGeom prst="rect">
             <a:avLst/>
@@ -10804,42 +10971,79 @@
           <a:p>
             <a:pPr algn="ctr" marL="0" indent="0">
               <a:lnSpc>
-                <a:spcPct val="100000"/>
-              </a:lnSpc>
-              <a:spcBef>
-                <a:spcPts val="0"/>
-              </a:spcBef>
-              <a:spcAft>
-                <a:spcPts val="0"/>
-              </a:spcAft>
-              <a:buNone/>
-            </a:pPr>
-            <a:r>
-              <a:rPr sz="1500" b="0" i="0">
-                <a:solidFill>
-                  <a:srgbClr val="74A6FF"/>
-                </a:solidFill>
-                <a:latin typeface="Segoe UI"/>
-              </a:rPr>
-              <a:t>→</a:t>
-            </a:r>
-          </a:p>
-        </p:txBody>
-      </p:sp>
-      <p:sp>
-        <p:nvSpPr>
-          <p:cNvPr id="14" name="Rounded Rectangle 13"/>
+                <a:spcPct val="112000"/>
+              </a:lnSpc>
+              <a:spcBef>
+                <a:spcPts val="0"/>
+              </a:spcBef>
+              <a:spcAft>
+                <a:spcPts val="0"/>
+              </a:spcAft>
+              <a:buNone/>
+            </a:pPr>
+            <a:r>
+              <a:rPr sz="1100" b="1" i="0">
+                <a:solidFill>
+                  <a:srgbClr val="F3F6FC"/>
+                </a:solidFill>
+                <a:latin typeface="Segoe UI Semibold"/>
+              </a:rPr>
+              <a:t>SCHEDULING</a:t>
+            </a:r>
+          </a:p>
+        </p:txBody>
+      </p:sp>
+      <p:cxnSp>
+        <p:nvCxnSpPr>
+          <p:cNvPr id="14" name="Connector 13"/>
+          <p:cNvCxnSpPr/>
+          <p:nvPr/>
+        </p:nvCxnSpPr>
+        <p:spPr>
+          <a:xfrm>
+            <a:off x="7875333" y="2050000"/>
+            <a:ext cx="162000" cy="0"/>
+          </a:xfrm>
+          <a:prstGeom prst="line">
+            <a:avLst/>
+          </a:prstGeom>
+          <a:ln w="22225">
+            <a:solidFill>
+              <a:srgbClr val="74A6FF"/>
+            </a:solidFill>
+            <a:tailEnd type="triangle" w="med" len="med"/>
+          </a:ln>
+          <a:effectLst/>
+        </p:spPr>
+        <p:style>
+          <a:lnRef idx="2">
+            <a:schemeClr val="accent1"/>
+          </a:lnRef>
+          <a:fillRef idx="0">
+            <a:schemeClr val="accent1"/>
+          </a:fillRef>
+          <a:effectRef idx="1">
+            <a:schemeClr val="accent1"/>
+          </a:effectRef>
+          <a:fontRef idx="minor">
+            <a:schemeClr val="tx1"/>
+          </a:fontRef>
+        </p:style>
+      </p:cxnSp>
+      <p:sp>
+        <p:nvSpPr>
+          <p:cNvPr id="15" name="Rounded Rectangle 14"/>
           <p:cNvSpPr/>
           <p:nvPr/>
         </p:nvSpPr>
         <p:spPr>
           <a:xfrm>
-            <a:off x="8021333" y="1670000"/>
-            <a:ext cx="3550666" cy="660000"/>
+            <a:off x="8061333" y="1710000"/>
+            <a:ext cx="3510666" cy="680000"/>
           </a:xfrm>
           <a:prstGeom prst="roundRect">
             <a:avLst>
-              <a:gd name="adj" fmla="val 12000"/>
+              <a:gd name="adj" fmla="val 11000"/>
             </a:avLst>
           </a:prstGeom>
           <a:solidFill>
@@ -10878,60 +11082,14 @@
       </p:sp>
       <p:sp>
         <p:nvSpPr>
-          <p:cNvPr id="15" name="TextBox 14"/>
-          <p:cNvSpPr txBox="1"/>
-          <p:nvPr/>
-        </p:nvSpPr>
-        <p:spPr>
-          <a:xfrm>
-            <a:off x="8091333" y="1670000"/>
-            <a:ext cx="3410666" cy="660000"/>
-          </a:xfrm>
-          <a:prstGeom prst="rect">
-            <a:avLst/>
-          </a:prstGeom>
-          <a:noFill/>
-        </p:spPr>
-        <p:txBody>
-          <a:bodyPr wrap="square" anchor="ctr" lIns="0" rIns="0" tIns="0" bIns="0">
-            <a:noAutofit/>
-          </a:bodyPr>
-          <a:lstStyle/>
-          <a:p>
-            <a:pPr algn="ctr" marL="0" indent="0">
-              <a:lnSpc>
-                <a:spcPct val="112000"/>
-              </a:lnSpc>
-              <a:spcBef>
-                <a:spcPts val="0"/>
-              </a:spcBef>
-              <a:spcAft>
-                <a:spcPts val="0"/>
-              </a:spcAft>
-              <a:buNone/>
-            </a:pPr>
-            <a:r>
-              <a:rPr sz="1100" b="1" i="0">
-                <a:solidFill>
-                  <a:srgbClr val="F3F6FC"/>
-                </a:solidFill>
-                <a:latin typeface="Segoe UI Semibold"/>
-              </a:rPr>
-              <a:t>STORAGE</a:t>
-            </a:r>
-          </a:p>
-        </p:txBody>
-      </p:sp>
-      <p:sp>
-        <p:nvSpPr>
           <p:cNvPr id="16" name="TextBox 15"/>
           <p:cNvSpPr txBox="1"/>
           <p:nvPr/>
         </p:nvSpPr>
         <p:spPr>
           <a:xfrm>
-            <a:off x="9696666" y="2300000"/>
-            <a:ext cx="200000" cy="210000"/>
+            <a:off x="8131333" y="1710000"/>
+            <a:ext cx="3370666" cy="680000"/>
           </a:xfrm>
           <a:prstGeom prst="rect">
             <a:avLst/>
@@ -10946,42 +11104,79 @@
           <a:p>
             <a:pPr algn="ctr" marL="0" indent="0">
               <a:lnSpc>
-                <a:spcPct val="100000"/>
-              </a:lnSpc>
-              <a:spcBef>
-                <a:spcPts val="0"/>
-              </a:spcBef>
-              <a:spcAft>
-                <a:spcPts val="0"/>
-              </a:spcAft>
-              <a:buNone/>
-            </a:pPr>
-            <a:r>
-              <a:rPr sz="1400" b="0" i="0">
-                <a:solidFill>
-                  <a:srgbClr val="74A6FF"/>
-                </a:solidFill>
-                <a:latin typeface="Segoe UI"/>
-              </a:rPr>
-              <a:t>↓</a:t>
-            </a:r>
-          </a:p>
-        </p:txBody>
-      </p:sp>
-      <p:sp>
-        <p:nvSpPr>
-          <p:cNvPr id="17" name="Rounded Rectangle 16"/>
+                <a:spcPct val="112000"/>
+              </a:lnSpc>
+              <a:spcBef>
+                <a:spcPts val="0"/>
+              </a:spcBef>
+              <a:spcAft>
+                <a:spcPts val="0"/>
+              </a:spcAft>
+              <a:buNone/>
+            </a:pPr>
+            <a:r>
+              <a:rPr sz="1100" b="1" i="0">
+                <a:solidFill>
+                  <a:srgbClr val="F3F6FC"/>
+                </a:solidFill>
+                <a:latin typeface="Segoe UI Semibold"/>
+              </a:rPr>
+              <a:t>STORAGE</a:t>
+            </a:r>
+          </a:p>
+        </p:txBody>
+      </p:sp>
+      <p:cxnSp>
+        <p:nvCxnSpPr>
+          <p:cNvPr id="17" name="Connector 16"/>
+          <p:cNvCxnSpPr/>
+          <p:nvPr/>
+        </p:nvCxnSpPr>
+        <p:spPr>
+          <a:xfrm>
+            <a:off x="9816666" y="2416000"/>
+            <a:ext cx="0" cy="208000"/>
+          </a:xfrm>
+          <a:prstGeom prst="line">
+            <a:avLst/>
+          </a:prstGeom>
+          <a:ln w="22225">
+            <a:solidFill>
+              <a:srgbClr val="74A6FF"/>
+            </a:solidFill>
+            <a:tailEnd type="triangle" w="med" len="med"/>
+          </a:ln>
+          <a:effectLst/>
+        </p:spPr>
+        <p:style>
+          <a:lnRef idx="2">
+            <a:schemeClr val="accent1"/>
+          </a:lnRef>
+          <a:fillRef idx="0">
+            <a:schemeClr val="accent1"/>
+          </a:fillRef>
+          <a:effectRef idx="1">
+            <a:schemeClr val="accent1"/>
+          </a:effectRef>
+          <a:fontRef idx="minor">
+            <a:schemeClr val="tx1"/>
+          </a:fontRef>
+        </p:style>
+      </p:cxnSp>
+      <p:sp>
+        <p:nvSpPr>
+          <p:cNvPr id="18" name="Rounded Rectangle 17"/>
           <p:cNvSpPr/>
           <p:nvPr/>
         </p:nvSpPr>
         <p:spPr>
           <a:xfrm>
-            <a:off x="620000" y="2480000"/>
-            <a:ext cx="3550666" cy="660000"/>
+            <a:off x="620000" y="2650000"/>
+            <a:ext cx="3510666" cy="680000"/>
           </a:xfrm>
           <a:prstGeom prst="roundRect">
             <a:avLst>
-              <a:gd name="adj" fmla="val 12000"/>
+              <a:gd name="adj" fmla="val 11000"/>
             </a:avLst>
           </a:prstGeom>
           <a:solidFill>
@@ -11020,60 +11215,14 @@
       </p:sp>
       <p:sp>
         <p:nvSpPr>
-          <p:cNvPr id="18" name="TextBox 17"/>
-          <p:cNvSpPr txBox="1"/>
-          <p:nvPr/>
-        </p:nvSpPr>
-        <p:spPr>
-          <a:xfrm>
-            <a:off x="690000" y="2480000"/>
-            <a:ext cx="3410666" cy="660000"/>
-          </a:xfrm>
-          <a:prstGeom prst="rect">
-            <a:avLst/>
-          </a:prstGeom>
-          <a:noFill/>
-        </p:spPr>
-        <p:txBody>
-          <a:bodyPr wrap="square" anchor="ctr" lIns="0" rIns="0" tIns="0" bIns="0">
-            <a:noAutofit/>
-          </a:bodyPr>
-          <a:lstStyle/>
-          <a:p>
-            <a:pPr algn="ctr" marL="0" indent="0">
-              <a:lnSpc>
-                <a:spcPct val="112000"/>
-              </a:lnSpc>
-              <a:spcBef>
-                <a:spcPts val="0"/>
-              </a:spcBef>
-              <a:spcAft>
-                <a:spcPts val="0"/>
-              </a:spcAft>
-              <a:buNone/>
-            </a:pPr>
-            <a:r>
-              <a:rPr sz="1100" b="1" i="0">
-                <a:solidFill>
-                  <a:srgbClr val="F3F6FC"/>
-                </a:solidFill>
-                <a:latin typeface="Segoe UI Semibold"/>
-              </a:rPr>
-              <a:t>CONFIGURACIÓN</a:t>
-            </a:r>
-          </a:p>
-        </p:txBody>
-      </p:sp>
-      <p:sp>
-        <p:nvSpPr>
           <p:cNvPr id="19" name="TextBox 18"/>
           <p:cNvSpPr txBox="1"/>
           <p:nvPr/>
         </p:nvSpPr>
         <p:spPr>
           <a:xfrm>
-            <a:off x="4130666" y="2480000"/>
-            <a:ext cx="230000" cy="660000"/>
+            <a:off x="690000" y="2650000"/>
+            <a:ext cx="3370666" cy="680000"/>
           </a:xfrm>
           <a:prstGeom prst="rect">
             <a:avLst/>
@@ -11088,42 +11237,79 @@
           <a:p>
             <a:pPr algn="ctr" marL="0" indent="0">
               <a:lnSpc>
-                <a:spcPct val="100000"/>
-              </a:lnSpc>
-              <a:spcBef>
-                <a:spcPts val="0"/>
-              </a:spcBef>
-              <a:spcAft>
-                <a:spcPts val="0"/>
-              </a:spcAft>
-              <a:buNone/>
-            </a:pPr>
-            <a:r>
-              <a:rPr sz="1500" b="0" i="0">
-                <a:solidFill>
-                  <a:srgbClr val="74A6FF"/>
-                </a:solidFill>
-                <a:latin typeface="Segoe UI"/>
-              </a:rPr>
-              <a:t>→</a:t>
-            </a:r>
-          </a:p>
-        </p:txBody>
-      </p:sp>
-      <p:sp>
-        <p:nvSpPr>
-          <p:cNvPr id="20" name="Rounded Rectangle 19"/>
+                <a:spcPct val="112000"/>
+              </a:lnSpc>
+              <a:spcBef>
+                <a:spcPts val="0"/>
+              </a:spcBef>
+              <a:spcAft>
+                <a:spcPts val="0"/>
+              </a:spcAft>
+              <a:buNone/>
+            </a:pPr>
+            <a:r>
+              <a:rPr sz="1100" b="1" i="0">
+                <a:solidFill>
+                  <a:srgbClr val="F3F6FC"/>
+                </a:solidFill>
+                <a:latin typeface="Segoe UI Semibold"/>
+              </a:rPr>
+              <a:t>CONFIGURACIÓN</a:t>
+            </a:r>
+          </a:p>
+        </p:txBody>
+      </p:sp>
+      <p:cxnSp>
+        <p:nvCxnSpPr>
+          <p:cNvPr id="20" name="Connector 19"/>
+          <p:cNvCxnSpPr/>
+          <p:nvPr/>
+        </p:nvCxnSpPr>
+        <p:spPr>
+          <a:xfrm>
+            <a:off x="4154666" y="2990000"/>
+            <a:ext cx="162000" cy="0"/>
+          </a:xfrm>
+          <a:prstGeom prst="line">
+            <a:avLst/>
+          </a:prstGeom>
+          <a:ln w="22225">
+            <a:solidFill>
+              <a:srgbClr val="74A6FF"/>
+            </a:solidFill>
+            <a:tailEnd type="triangle" w="med" len="med"/>
+          </a:ln>
+          <a:effectLst/>
+        </p:spPr>
+        <p:style>
+          <a:lnRef idx="2">
+            <a:schemeClr val="accent1"/>
+          </a:lnRef>
+          <a:fillRef idx="0">
+            <a:schemeClr val="accent1"/>
+          </a:fillRef>
+          <a:effectRef idx="1">
+            <a:schemeClr val="accent1"/>
+          </a:effectRef>
+          <a:fontRef idx="minor">
+            <a:schemeClr val="tx1"/>
+          </a:fontRef>
+        </p:style>
+      </p:cxnSp>
+      <p:sp>
+        <p:nvSpPr>
+          <p:cNvPr id="21" name="Rounded Rectangle 20"/>
           <p:cNvSpPr/>
           <p:nvPr/>
         </p:nvSpPr>
         <p:spPr>
           <a:xfrm>
-            <a:off x="4320666" y="2480000"/>
-            <a:ext cx="3550666" cy="660000"/>
+            <a:off x="4340666" y="2650000"/>
+            <a:ext cx="3510666" cy="680000"/>
           </a:xfrm>
           <a:prstGeom prst="roundRect">
             <a:avLst>
-              <a:gd name="adj" fmla="val 12000"/>
+              <a:gd name="adj" fmla="val 11000"/>
             </a:avLst>
           </a:prstGeom>
           <a:solidFill>
@@ -11162,60 +11348,14 @@
       </p:sp>
       <p:sp>
         <p:nvSpPr>
-          <p:cNvPr id="21" name="TextBox 20"/>
-          <p:cNvSpPr txBox="1"/>
-          <p:nvPr/>
-        </p:nvSpPr>
-        <p:spPr>
-          <a:xfrm>
-            <a:off x="4390666" y="2480000"/>
-            <a:ext cx="3410666" cy="660000"/>
-          </a:xfrm>
-          <a:prstGeom prst="rect">
-            <a:avLst/>
-          </a:prstGeom>
-          <a:noFill/>
-        </p:spPr>
-        <p:txBody>
-          <a:bodyPr wrap="square" anchor="ctr" lIns="0" rIns="0" tIns="0" bIns="0">
-            <a:noAutofit/>
-          </a:bodyPr>
-          <a:lstStyle/>
-          <a:p>
-            <a:pPr algn="ctr" marL="0" indent="0">
-              <a:lnSpc>
-                <a:spcPct val="112000"/>
-              </a:lnSpc>
-              <a:spcBef>
-                <a:spcPts val="0"/>
-              </a:spcBef>
-              <a:spcAft>
-                <a:spcPts val="0"/>
-              </a:spcAft>
-              <a:buNone/>
-            </a:pPr>
-            <a:r>
-              <a:rPr sz="1100" b="1" i="0">
-                <a:solidFill>
-                  <a:srgbClr val="F3F6FC"/>
-                </a:solidFill>
-                <a:latin typeface="Segoe UI Semibold"/>
-              </a:rPr>
-              <a:t>APLICACIÓN</a:t>
-            </a:r>
-          </a:p>
-        </p:txBody>
-      </p:sp>
-      <p:sp>
-        <p:nvSpPr>
           <p:cNvPr id="22" name="TextBox 21"/>
           <p:cNvSpPr txBox="1"/>
           <p:nvPr/>
         </p:nvSpPr>
         <p:spPr>
           <a:xfrm>
-            <a:off x="7831333" y="2480000"/>
-            <a:ext cx="230000" cy="660000"/>
+            <a:off x="4410666" y="2650000"/>
+            <a:ext cx="3370666" cy="680000"/>
           </a:xfrm>
           <a:prstGeom prst="rect">
             <a:avLst/>
@@ -11230,42 +11370,79 @@
           <a:p>
             <a:pPr algn="ctr" marL="0" indent="0">
               <a:lnSpc>
-                <a:spcPct val="100000"/>
-              </a:lnSpc>
-              <a:spcBef>
-                <a:spcPts val="0"/>
-              </a:spcBef>
-              <a:spcAft>
-                <a:spcPts val="0"/>
-              </a:spcAft>
-              <a:buNone/>
-            </a:pPr>
-            <a:r>
-              <a:rPr sz="1500" b="0" i="0">
-                <a:solidFill>
-                  <a:srgbClr val="74A6FF"/>
-                </a:solidFill>
-                <a:latin typeface="Segoe UI"/>
-              </a:rPr>
-              <a:t>→</a:t>
-            </a:r>
-          </a:p>
-        </p:txBody>
-      </p:sp>
-      <p:sp>
-        <p:nvSpPr>
-          <p:cNvPr id="23" name="Rounded Rectangle 22"/>
+                <a:spcPct val="112000"/>
+              </a:lnSpc>
+              <a:spcBef>
+                <a:spcPts val="0"/>
+              </a:spcBef>
+              <a:spcAft>
+                <a:spcPts val="0"/>
+              </a:spcAft>
+              <a:buNone/>
+            </a:pPr>
+            <a:r>
+              <a:rPr sz="1100" b="1" i="0">
+                <a:solidFill>
+                  <a:srgbClr val="F3F6FC"/>
+                </a:solidFill>
+                <a:latin typeface="Segoe UI Semibold"/>
+              </a:rPr>
+              <a:t>APLICACIÓN</a:t>
+            </a:r>
+          </a:p>
+        </p:txBody>
+      </p:sp>
+      <p:cxnSp>
+        <p:nvCxnSpPr>
+          <p:cNvPr id="23" name="Connector 22"/>
+          <p:cNvCxnSpPr/>
+          <p:nvPr/>
+        </p:nvCxnSpPr>
+        <p:spPr>
+          <a:xfrm>
+            <a:off x="7875333" y="2990000"/>
+            <a:ext cx="162000" cy="0"/>
+          </a:xfrm>
+          <a:prstGeom prst="line">
+            <a:avLst/>
+          </a:prstGeom>
+          <a:ln w="22225">
+            <a:solidFill>
+              <a:srgbClr val="74A6FF"/>
+            </a:solidFill>
+            <a:tailEnd type="triangle" w="med" len="med"/>
+          </a:ln>
+          <a:effectLst/>
+        </p:spPr>
+        <p:style>
+          <a:lnRef idx="2">
+            <a:schemeClr val="accent1"/>
+          </a:lnRef>
+          <a:fillRef idx="0">
+            <a:schemeClr val="accent1"/>
+          </a:fillRef>
+          <a:effectRef idx="1">
+            <a:schemeClr val="accent1"/>
+          </a:effectRef>
+          <a:fontRef idx="minor">
+            <a:schemeClr val="tx1"/>
+          </a:fontRef>
+        </p:style>
+      </p:cxnSp>
+      <p:sp>
+        <p:nvSpPr>
+          <p:cNvPr id="24" name="Rounded Rectangle 23"/>
           <p:cNvSpPr/>
           <p:nvPr/>
         </p:nvSpPr>
         <p:spPr>
           <a:xfrm>
-            <a:off x="8021333" y="2480000"/>
-            <a:ext cx="3550666" cy="660000"/>
+            <a:off x="8061333" y="2650000"/>
+            <a:ext cx="3510666" cy="680000"/>
           </a:xfrm>
           <a:prstGeom prst="roundRect">
             <a:avLst>
-              <a:gd name="adj" fmla="val 12000"/>
+              <a:gd name="adj" fmla="val 11000"/>
             </a:avLst>
           </a:prstGeom>
           <a:solidFill>
@@ -11304,14 +11481,14 @@
       </p:sp>
       <p:sp>
         <p:nvSpPr>
-          <p:cNvPr id="24" name="TextBox 23"/>
+          <p:cNvPr id="25" name="TextBox 24"/>
           <p:cNvSpPr txBox="1"/>
           <p:nvPr/>
         </p:nvSpPr>
         <p:spPr>
           <a:xfrm>
-            <a:off x="8091333" y="2480000"/>
-            <a:ext cx="3410666" cy="660000"/>
+            <a:off x="8131333" y="2650000"/>
+            <a:ext cx="3370666" cy="680000"/>
           </a:xfrm>
           <a:prstGeom prst="rect">
             <a:avLst/>
@@ -11350,13 +11527,13 @@
       </p:sp>
       <p:sp>
         <p:nvSpPr>
-          <p:cNvPr id="25" name="Rounded Rectangle 24"/>
+          <p:cNvPr id="26" name="Rounded Rectangle 25"/>
           <p:cNvSpPr/>
           <p:nvPr/>
         </p:nvSpPr>
         <p:spPr>
           <a:xfrm>
-            <a:off x="620000" y="3460000"/>
+            <a:off x="620000" y="3690000"/>
             <a:ext cx="10952000" cy="2320000"/>
           </a:xfrm>
           <a:prstGeom prst="roundRect">
@@ -11400,13 +11577,13 @@
       </p:sp>
       <p:sp>
         <p:nvSpPr>
-          <p:cNvPr id="26" name="Rectangle 25"/>
+          <p:cNvPr id="27" name="Rectangle 26"/>
           <p:cNvSpPr/>
           <p:nvPr/>
         </p:nvSpPr>
         <p:spPr>
           <a:xfrm>
-            <a:off x="650000" y="3484000"/>
+            <a:off x="650000" y="3714000"/>
             <a:ext cx="40000" cy="2272000"/>
           </a:xfrm>
           <a:prstGeom prst="rect">
@@ -11446,13 +11623,13 @@
       </p:sp>
       <p:sp>
         <p:nvSpPr>
-          <p:cNvPr id="27" name="TextBox 26"/>
+          <p:cNvPr id="28" name="TextBox 27"/>
           <p:cNvSpPr txBox="1"/>
           <p:nvPr/>
         </p:nvSpPr>
         <p:spPr>
           <a:xfrm>
-            <a:off x="880000" y="3700000"/>
+            <a:off x="880000" y="3930000"/>
             <a:ext cx="10432000" cy="1920000"/>
           </a:xfrm>
           <a:prstGeom prst="rect">
@@ -12426,7 +12603,149 @@
       </p:sp>
       <p:sp>
         <p:nvSpPr>
-          <p:cNvPr id="16" name="Rounded Rectangle 15"/>
+          <p:cNvPr id="16" name="Freeform 15"/>
+          <p:cNvSpPr/>
+          <p:nvPr/>
+        </p:nvSpPr>
+        <p:spPr>
+          <a:xfrm>
+            <a:off x="9590000" y="1418800"/>
+            <a:ext cx="784000" cy="842800"/>
+          </a:xfrm>
+          <a:custGeom>
+            <a:avLst/>
+            <a:gdLst/>
+            <a:ahLst/>
+            <a:cxnLst/>
+            <a:rect l="l" t="t" r="r" b="b"/>
+            <a:pathLst>
+              <a:path w="784000" h="842800">
+                <a:moveTo>
+                  <a:pt x="235200" y="0"/>
+                </a:moveTo>
+                <a:lnTo>
+                  <a:pt x="235200" y="333200"/>
+                </a:lnTo>
+                <a:lnTo>
+                  <a:pt x="0" y="842800"/>
+                </a:lnTo>
+                <a:lnTo>
+                  <a:pt x="784000" y="842800"/>
+                </a:lnTo>
+                <a:lnTo>
+                  <a:pt x="548800" y="333200"/>
+                </a:lnTo>
+                <a:lnTo>
+                  <a:pt x="548800" y="0"/>
+                </a:lnTo>
+              </a:path>
+            </a:pathLst>
+          </a:custGeom>
+          <a:noFill/>
+          <a:ln w="33020">
+            <a:solidFill>
+              <a:srgbClr val="74A6FF"/>
+            </a:solidFill>
+          </a:ln>
+          <a:effectLst/>
+        </p:spPr>
+        <p:style>
+          <a:lnRef idx="1">
+            <a:schemeClr val="accent1"/>
+          </a:lnRef>
+          <a:fillRef idx="3">
+            <a:schemeClr val="accent1"/>
+          </a:fillRef>
+          <a:effectRef idx="2">
+            <a:schemeClr val="accent1"/>
+          </a:effectRef>
+          <a:fontRef idx="minor">
+            <a:schemeClr val="lt1"/>
+          </a:fontRef>
+        </p:style>
+        <p:txBody>
+          <a:bodyPr rtlCol="0" anchor="ctr"/>
+          <a:lstStyle/>
+          <a:p>
+            <a:pPr algn="ctr"/>
+          </a:p>
+        </p:txBody>
+      </p:sp>
+      <p:cxnSp>
+        <p:nvCxnSpPr>
+          <p:cNvPr id="17" name="Connector 16"/>
+          <p:cNvCxnSpPr/>
+          <p:nvPr/>
+        </p:nvCxnSpPr>
+        <p:spPr>
+          <a:xfrm>
+            <a:off x="9766400" y="1418800"/>
+            <a:ext cx="431200" cy="0"/>
+          </a:xfrm>
+          <a:prstGeom prst="line">
+            <a:avLst/>
+          </a:prstGeom>
+          <a:ln w="33020">
+            <a:solidFill>
+              <a:srgbClr val="74A6FF"/>
+            </a:solidFill>
+          </a:ln>
+          <a:effectLst/>
+        </p:spPr>
+        <p:style>
+          <a:lnRef idx="2">
+            <a:schemeClr val="accent1"/>
+          </a:lnRef>
+          <a:fillRef idx="0">
+            <a:schemeClr val="accent1"/>
+          </a:fillRef>
+          <a:effectRef idx="1">
+            <a:schemeClr val="accent1"/>
+          </a:effectRef>
+          <a:fontRef idx="minor">
+            <a:schemeClr val="tx1"/>
+          </a:fontRef>
+        </p:style>
+      </p:cxnSp>
+      <p:cxnSp>
+        <p:nvCxnSpPr>
+          <p:cNvPr id="18" name="Connector 17"/>
+          <p:cNvCxnSpPr/>
+          <p:nvPr/>
+        </p:nvCxnSpPr>
+        <p:spPr>
+          <a:xfrm>
+            <a:off x="9727200" y="2006800"/>
+            <a:ext cx="509600" cy="0"/>
+          </a:xfrm>
+          <a:prstGeom prst="line">
+            <a:avLst/>
+          </a:prstGeom>
+          <a:ln w="33020">
+            <a:solidFill>
+              <a:srgbClr val="74A6FF"/>
+            </a:solidFill>
+          </a:ln>
+          <a:effectLst/>
+        </p:spPr>
+        <p:style>
+          <a:lnRef idx="2">
+            <a:schemeClr val="accent1"/>
+          </a:lnRef>
+          <a:fillRef idx="0">
+            <a:schemeClr val="accent1"/>
+          </a:fillRef>
+          <a:effectRef idx="1">
+            <a:schemeClr val="accent1"/>
+          </a:effectRef>
+          <a:fontRef idx="minor">
+            <a:schemeClr val="tx1"/>
+          </a:fontRef>
+        </p:style>
+      </p:cxnSp>
+      <p:sp>
+        <p:nvSpPr>
+          <p:cNvPr id="19" name="Rounded Rectangle 18"/>
           <p:cNvSpPr/>
           <p:nvPr/>
         </p:nvSpPr>
@@ -12476,7 +12795,7 @@
       </p:sp>
       <p:sp>
         <p:nvSpPr>
-          <p:cNvPr id="17" name="Rectangle 16"/>
+          <p:cNvPr id="20" name="Rectangle 19"/>
           <p:cNvSpPr/>
           <p:nvPr/>
         </p:nvSpPr>
@@ -12522,7 +12841,7 @@
       </p:sp>
       <p:sp>
         <p:nvSpPr>
-          <p:cNvPr id="18" name="TextBox 17"/>
+          <p:cNvPr id="21" name="TextBox 20"/>
           <p:cNvSpPr txBox="1"/>
           <p:nvPr/>
         </p:nvSpPr>
@@ -12591,7 +12910,7 @@
       </p:sp>
       <p:sp>
         <p:nvSpPr>
-          <p:cNvPr id="19" name="Rectangle 18"/>
+          <p:cNvPr id="22" name="Rectangle 21"/>
           <p:cNvSpPr/>
           <p:nvPr/>
         </p:nvSpPr>
@@ -12637,7 +12956,7 @@
       </p:sp>
       <p:sp>
         <p:nvSpPr>
-          <p:cNvPr id="20" name="TextBox 19"/>
+          <p:cNvPr id="23" name="TextBox 22"/>
           <p:cNvSpPr txBox="1"/>
           <p:nvPr/>
         </p:nvSpPr>
@@ -12706,7 +13025,7 @@
       </p:sp>
       <p:sp>
         <p:nvSpPr>
-          <p:cNvPr id="21" name="Rectangle 20"/>
+          <p:cNvPr id="24" name="Rectangle 23"/>
           <p:cNvSpPr/>
           <p:nvPr/>
         </p:nvSpPr>
@@ -12752,7 +13071,7 @@
       </p:sp>
       <p:sp>
         <p:nvSpPr>
-          <p:cNvPr id="22" name="TextBox 21"/>
+          <p:cNvPr id="25" name="TextBox 24"/>
           <p:cNvSpPr txBox="1"/>
           <p:nvPr/>
         </p:nvSpPr>
@@ -12821,7 +13140,7 @@
       </p:sp>
       <p:sp>
         <p:nvSpPr>
-          <p:cNvPr id="23" name="Rectangle 22"/>
+          <p:cNvPr id="26" name="Rectangle 25"/>
           <p:cNvSpPr/>
           <p:nvPr/>
         </p:nvSpPr>
@@ -12867,7 +13186,7 @@
       </p:sp>
       <p:sp>
         <p:nvSpPr>
-          <p:cNvPr id="24" name="TextBox 23"/>
+          <p:cNvPr id="27" name="TextBox 26"/>
           <p:cNvSpPr txBox="1"/>
           <p:nvPr/>
         </p:nvSpPr>
@@ -12913,7 +13232,7 @@
       </p:sp>
       <p:sp>
         <p:nvSpPr>
-          <p:cNvPr id="25" name="TextBox 24"/>
+          <p:cNvPr id="28" name="TextBox 27"/>
           <p:cNvSpPr txBox="1"/>
           <p:nvPr/>
         </p:nvSpPr>
@@ -13749,7 +14068,311 @@
       </p:sp>
       <p:sp>
         <p:nvSpPr>
-          <p:cNvPr id="16" name="Rounded Rectangle 15"/>
+          <p:cNvPr id="16" name="Oval 15"/>
+          <p:cNvSpPr/>
+          <p:nvPr/>
+        </p:nvSpPr>
+        <p:spPr>
+          <a:xfrm>
+            <a:off x="9825200" y="1497200"/>
+            <a:ext cx="313600" cy="313600"/>
+          </a:xfrm>
+          <a:prstGeom prst="ellipse">
+            <a:avLst/>
+          </a:prstGeom>
+          <a:noFill/>
+          <a:ln w="33020">
+            <a:solidFill>
+              <a:srgbClr val="FF7B72"/>
+            </a:solidFill>
+          </a:ln>
+          <a:effectLst/>
+        </p:spPr>
+        <p:style>
+          <a:lnRef idx="1">
+            <a:schemeClr val="accent1"/>
+          </a:lnRef>
+          <a:fillRef idx="3">
+            <a:schemeClr val="accent1"/>
+          </a:fillRef>
+          <a:effectRef idx="2">
+            <a:schemeClr val="accent1"/>
+          </a:effectRef>
+          <a:fontRef idx="minor">
+            <a:schemeClr val="lt1"/>
+          </a:fontRef>
+        </p:style>
+        <p:txBody>
+          <a:bodyPr rtlCol="0" anchor="ctr"/>
+          <a:lstStyle/>
+          <a:p>
+            <a:pPr algn="ctr"/>
+          </a:p>
+        </p:txBody>
+      </p:sp>
+      <p:sp>
+        <p:nvSpPr>
+          <p:cNvPr id="17" name="Oval 16"/>
+          <p:cNvSpPr/>
+          <p:nvPr/>
+        </p:nvSpPr>
+        <p:spPr>
+          <a:xfrm>
+            <a:off x="9766400" y="1752000"/>
+            <a:ext cx="431200" cy="490000"/>
+          </a:xfrm>
+          <a:prstGeom prst="ellipse">
+            <a:avLst/>
+          </a:prstGeom>
+          <a:noFill/>
+          <a:ln w="33020">
+            <a:solidFill>
+              <a:srgbClr val="FF7B72"/>
+            </a:solidFill>
+          </a:ln>
+          <a:effectLst/>
+        </p:spPr>
+        <p:style>
+          <a:lnRef idx="1">
+            <a:schemeClr val="accent1"/>
+          </a:lnRef>
+          <a:fillRef idx="3">
+            <a:schemeClr val="accent1"/>
+          </a:fillRef>
+          <a:effectRef idx="2">
+            <a:schemeClr val="accent1"/>
+          </a:effectRef>
+          <a:fontRef idx="minor">
+            <a:schemeClr val="lt1"/>
+          </a:fontRef>
+        </p:style>
+        <p:txBody>
+          <a:bodyPr rtlCol="0" anchor="ctr"/>
+          <a:lstStyle/>
+          <a:p>
+            <a:pPr algn="ctr"/>
+          </a:p>
+        </p:txBody>
+      </p:sp>
+      <p:cxnSp>
+        <p:nvCxnSpPr>
+          <p:cNvPr id="18" name="Connector 17"/>
+          <p:cNvCxnSpPr/>
+          <p:nvPr/>
+        </p:nvCxnSpPr>
+        <p:spPr>
+          <a:xfrm flipH="1" flipV="1">
+            <a:off x="9550800" y="1791200"/>
+            <a:ext cx="235200" cy="58800"/>
+          </a:xfrm>
+          <a:prstGeom prst="line">
+            <a:avLst/>
+          </a:prstGeom>
+          <a:ln w="33020">
+            <a:solidFill>
+              <a:srgbClr val="FF7B72"/>
+            </a:solidFill>
+          </a:ln>
+          <a:effectLst/>
+        </p:spPr>
+        <p:style>
+          <a:lnRef idx="2">
+            <a:schemeClr val="accent1"/>
+          </a:lnRef>
+          <a:fillRef idx="0">
+            <a:schemeClr val="accent1"/>
+          </a:fillRef>
+          <a:effectRef idx="1">
+            <a:schemeClr val="accent1"/>
+          </a:effectRef>
+          <a:fontRef idx="minor">
+            <a:schemeClr val="tx1"/>
+          </a:fontRef>
+        </p:style>
+      </p:cxnSp>
+      <p:cxnSp>
+        <p:nvCxnSpPr>
+          <p:cNvPr id="19" name="Connector 18"/>
+          <p:cNvCxnSpPr/>
+          <p:nvPr/>
+        </p:nvCxnSpPr>
+        <p:spPr>
+          <a:xfrm flipV="1">
+            <a:off x="10178000" y="1791200"/>
+            <a:ext cx="235200" cy="58800"/>
+          </a:xfrm>
+          <a:prstGeom prst="line">
+            <a:avLst/>
+          </a:prstGeom>
+          <a:ln w="33020">
+            <a:solidFill>
+              <a:srgbClr val="FF7B72"/>
+            </a:solidFill>
+          </a:ln>
+          <a:effectLst/>
+        </p:spPr>
+        <p:style>
+          <a:lnRef idx="2">
+            <a:schemeClr val="accent1"/>
+          </a:lnRef>
+          <a:fillRef idx="0">
+            <a:schemeClr val="accent1"/>
+          </a:fillRef>
+          <a:effectRef idx="1">
+            <a:schemeClr val="accent1"/>
+          </a:effectRef>
+          <a:fontRef idx="minor">
+            <a:schemeClr val="tx1"/>
+          </a:fontRef>
+        </p:style>
+      </p:cxnSp>
+      <p:cxnSp>
+        <p:nvCxnSpPr>
+          <p:cNvPr id="20" name="Connector 19"/>
+          <p:cNvCxnSpPr/>
+          <p:nvPr/>
+        </p:nvCxnSpPr>
+        <p:spPr>
+          <a:xfrm flipH="1" flipV="1">
+            <a:off x="9550800" y="1948000"/>
+            <a:ext cx="235200" cy="58800"/>
+          </a:xfrm>
+          <a:prstGeom prst="line">
+            <a:avLst/>
+          </a:prstGeom>
+          <a:ln w="33020">
+            <a:solidFill>
+              <a:srgbClr val="FF7B72"/>
+            </a:solidFill>
+          </a:ln>
+          <a:effectLst/>
+        </p:spPr>
+        <p:style>
+          <a:lnRef idx="2">
+            <a:schemeClr val="accent1"/>
+          </a:lnRef>
+          <a:fillRef idx="0">
+            <a:schemeClr val="accent1"/>
+          </a:fillRef>
+          <a:effectRef idx="1">
+            <a:schemeClr val="accent1"/>
+          </a:effectRef>
+          <a:fontRef idx="minor">
+            <a:schemeClr val="tx1"/>
+          </a:fontRef>
+        </p:style>
+      </p:cxnSp>
+      <p:cxnSp>
+        <p:nvCxnSpPr>
+          <p:cNvPr id="21" name="Connector 20"/>
+          <p:cNvCxnSpPr/>
+          <p:nvPr/>
+        </p:nvCxnSpPr>
+        <p:spPr>
+          <a:xfrm flipV="1">
+            <a:off x="10178000" y="1948000"/>
+            <a:ext cx="235200" cy="58800"/>
+          </a:xfrm>
+          <a:prstGeom prst="line">
+            <a:avLst/>
+          </a:prstGeom>
+          <a:ln w="33020">
+            <a:solidFill>
+              <a:srgbClr val="FF7B72"/>
+            </a:solidFill>
+          </a:ln>
+          <a:effectLst/>
+        </p:spPr>
+        <p:style>
+          <a:lnRef idx="2">
+            <a:schemeClr val="accent1"/>
+          </a:lnRef>
+          <a:fillRef idx="0">
+            <a:schemeClr val="accent1"/>
+          </a:fillRef>
+          <a:effectRef idx="1">
+            <a:schemeClr val="accent1"/>
+          </a:effectRef>
+          <a:fontRef idx="minor">
+            <a:schemeClr val="tx1"/>
+          </a:fontRef>
+        </p:style>
+      </p:cxnSp>
+      <p:cxnSp>
+        <p:nvCxnSpPr>
+          <p:cNvPr id="22" name="Connector 21"/>
+          <p:cNvCxnSpPr/>
+          <p:nvPr/>
+        </p:nvCxnSpPr>
+        <p:spPr>
+          <a:xfrm flipH="1" flipV="1">
+            <a:off x="9550800" y="2104800"/>
+            <a:ext cx="235200" cy="58800"/>
+          </a:xfrm>
+          <a:prstGeom prst="line">
+            <a:avLst/>
+          </a:prstGeom>
+          <a:ln w="33020">
+            <a:solidFill>
+              <a:srgbClr val="FF7B72"/>
+            </a:solidFill>
+          </a:ln>
+          <a:effectLst/>
+        </p:spPr>
+        <p:style>
+          <a:lnRef idx="2">
+            <a:schemeClr val="accent1"/>
+          </a:lnRef>
+          <a:fillRef idx="0">
+            <a:schemeClr val="accent1"/>
+          </a:fillRef>
+          <a:effectRef idx="1">
+            <a:schemeClr val="accent1"/>
+          </a:effectRef>
+          <a:fontRef idx="minor">
+            <a:schemeClr val="tx1"/>
+          </a:fontRef>
+        </p:style>
+      </p:cxnSp>
+      <p:cxnSp>
+        <p:nvCxnSpPr>
+          <p:cNvPr id="23" name="Connector 22"/>
+          <p:cNvCxnSpPr/>
+          <p:nvPr/>
+        </p:nvCxnSpPr>
+        <p:spPr>
+          <a:xfrm flipV="1">
+            <a:off x="10178000" y="2104800"/>
+            <a:ext cx="235200" cy="58800"/>
+          </a:xfrm>
+          <a:prstGeom prst="line">
+            <a:avLst/>
+          </a:prstGeom>
+          <a:ln w="33020">
+            <a:solidFill>
+              <a:srgbClr val="FF7B72"/>
+            </a:solidFill>
+          </a:ln>
+          <a:effectLst/>
+        </p:spPr>
+        <p:style>
+          <a:lnRef idx="2">
+            <a:schemeClr val="accent1"/>
+          </a:lnRef>
+          <a:fillRef idx="0">
+            <a:schemeClr val="accent1"/>
+          </a:fillRef>
+          <a:effectRef idx="1">
+            <a:schemeClr val="accent1"/>
+          </a:effectRef>
+          <a:fontRef idx="minor">
+            <a:schemeClr val="tx1"/>
+          </a:fontRef>
+        </p:style>
+      </p:cxnSp>
+      <p:sp>
+        <p:nvSpPr>
+          <p:cNvPr id="24" name="Rounded Rectangle 23"/>
           <p:cNvSpPr/>
           <p:nvPr/>
         </p:nvSpPr>
@@ -13799,7 +14422,7 @@
       </p:sp>
       <p:sp>
         <p:nvSpPr>
-          <p:cNvPr id="17" name="Rectangle 16"/>
+          <p:cNvPr id="25" name="Rectangle 24"/>
           <p:cNvSpPr/>
           <p:nvPr/>
         </p:nvSpPr>
@@ -13845,7 +14468,7 @@
       </p:sp>
       <p:sp>
         <p:nvSpPr>
-          <p:cNvPr id="18" name="TextBox 17"/>
+          <p:cNvPr id="26" name="TextBox 25"/>
           <p:cNvSpPr txBox="1"/>
           <p:nvPr/>
         </p:nvSpPr>
@@ -13914,7 +14537,7 @@
       </p:sp>
       <p:sp>
         <p:nvSpPr>
-          <p:cNvPr id="19" name="Rectangle 18"/>
+          <p:cNvPr id="27" name="Rectangle 26"/>
           <p:cNvSpPr/>
           <p:nvPr/>
         </p:nvSpPr>
@@ -13960,7 +14583,7 @@
       </p:sp>
       <p:sp>
         <p:nvSpPr>
-          <p:cNvPr id="20" name="TextBox 19"/>
+          <p:cNvPr id="28" name="TextBox 27"/>
           <p:cNvSpPr txBox="1"/>
           <p:nvPr/>
         </p:nvSpPr>
@@ -14029,7 +14652,7 @@
       </p:sp>
       <p:sp>
         <p:nvSpPr>
-          <p:cNvPr id="21" name="Rectangle 20"/>
+          <p:cNvPr id="29" name="Rectangle 28"/>
           <p:cNvSpPr/>
           <p:nvPr/>
         </p:nvSpPr>
@@ -14075,7 +14698,7 @@
       </p:sp>
       <p:sp>
         <p:nvSpPr>
-          <p:cNvPr id="22" name="TextBox 21"/>
+          <p:cNvPr id="30" name="TextBox 29"/>
           <p:cNvSpPr txBox="1"/>
           <p:nvPr/>
         </p:nvSpPr>
@@ -14144,7 +14767,7 @@
       </p:sp>
       <p:sp>
         <p:nvSpPr>
-          <p:cNvPr id="23" name="Rectangle 22"/>
+          <p:cNvPr id="31" name="Rectangle 30"/>
           <p:cNvSpPr/>
           <p:nvPr/>
         </p:nvSpPr>
@@ -14190,7 +14813,7 @@
       </p:sp>
       <p:sp>
         <p:nvSpPr>
-          <p:cNvPr id="24" name="TextBox 23"/>
+          <p:cNvPr id="32" name="TextBox 31"/>
           <p:cNvSpPr txBox="1"/>
           <p:nvPr/>
         </p:nvSpPr>
@@ -14236,7 +14859,7 @@
       </p:sp>
       <p:sp>
         <p:nvSpPr>
-          <p:cNvPr id="25" name="TextBox 24"/>
+          <p:cNvPr id="33" name="TextBox 32"/>
           <p:cNvSpPr txBox="1"/>
           <p:nvPr/>
         </p:nvSpPr>
@@ -14350,80 +14973,30 @@
           </a:p>
         </p:txBody>
       </p:sp>
-      <p:sp>
-        <p:nvSpPr>
-          <p:cNvPr id="3" name="Freeform 2"/>
-          <p:cNvSpPr/>
-          <p:nvPr/>
-        </p:nvSpPr>
-        <p:spPr>
-          <a:xfrm>
-            <a:off x="9479608" y="4208000"/>
-            <a:ext cx="2924783" cy="2851453"/>
-          </a:xfrm>
-          <a:custGeom>
-            <a:avLst/>
-            <a:gdLst/>
-            <a:ahLst/>
-            <a:cxnLst/>
-            <a:rect l="l" t="t" r="r" b="b"/>
-            <a:pathLst>
-              <a:path w="2924783" h="2851453">
-                <a:moveTo>
-                  <a:pt x="1462392" y="0"/>
-                </a:moveTo>
-                <a:lnTo>
-                  <a:pt x="2635139" y="564765"/>
-                </a:lnTo>
-                <a:lnTo>
-                  <a:pt x="2924783" y="1833781"/>
-                </a:lnTo>
-                <a:lnTo>
-                  <a:pt x="2113217" y="2851453"/>
-                </a:lnTo>
-                <a:lnTo>
-                  <a:pt x="811566" y="2851453"/>
-                </a:lnTo>
-                <a:lnTo>
-                  <a:pt x="0" y="1833781"/>
-                </a:lnTo>
-                <a:lnTo>
-                  <a:pt x="289644" y="564765"/>
-                </a:lnTo>
-                <a:close/>
-              </a:path>
-            </a:pathLst>
-          </a:custGeom>
-          <a:noFill/>
-          <a:ln w="31750">
-            <a:solidFill>
-              <a:srgbClr val="26354E"/>
-            </a:solidFill>
-          </a:ln>
-          <a:effectLst/>
-        </p:spPr>
-        <p:style>
-          <a:lnRef idx="1">
-            <a:schemeClr val="accent1"/>
-          </a:lnRef>
-          <a:fillRef idx="3">
-            <a:schemeClr val="accent1"/>
-          </a:fillRef>
-          <a:effectRef idx="2">
-            <a:schemeClr val="accent1"/>
-          </a:effectRef>
-          <a:fontRef idx="minor">
-            <a:schemeClr val="lt1"/>
-          </a:fontRef>
-        </p:style>
-        <p:txBody>
-          <a:bodyPr rtlCol="0" anchor="ctr"/>
-          <a:lstStyle/>
-          <a:p>
-            <a:pPr algn="ctr"/>
-          </a:p>
-        </p:txBody>
-      </p:sp>
+      <p:pic>
+        <p:nvPicPr>
+          <p:cNvPr id="3" name="Picture 2" descr="deploy.png"/>
+          <p:cNvPicPr>
+            <a:picLocks noChangeAspect="1"/>
+          </p:cNvPicPr>
+          <p:nvPr/>
+        </p:nvPicPr>
+        <p:blipFill>
+          <a:blip r:embed="rId2"/>
+          <a:stretch>
+            <a:fillRect/>
+          </a:stretch>
+        </p:blipFill>
+        <p:spPr>
+          <a:xfrm>
+            <a:off x="8842000" y="2150000"/>
+            <a:ext cx="1800000" cy="1800000"/>
+          </a:xfrm>
+          <a:prstGeom prst="rect">
+            <a:avLst/>
+          </a:prstGeom>
+        </p:spPr>
+      </p:pic>
       <p:sp>
         <p:nvSpPr>
           <p:cNvPr id="4" name="TextBox 3"/>
@@ -14873,7 +15446,7 @@
         <p:spPr>
           <a:xfrm>
             <a:off x="620000" y="560000"/>
-            <a:ext cx="10952000" cy="620000"/>
+            <a:ext cx="10052000" cy="620000"/>
           </a:xfrm>
           <a:prstGeom prst="rect">
             <a:avLst/>
@@ -15256,52 +15829,30 @@
           </a:p>
         </p:txBody>
       </p:sp>
-      <p:sp>
-        <p:nvSpPr>
-          <p:cNvPr id="11" name="TextBox 10"/>
-          <p:cNvSpPr txBox="1"/>
-          <p:nvPr/>
-        </p:nvSpPr>
-        <p:spPr>
-          <a:xfrm>
-            <a:off x="1260000" y="2368000"/>
-            <a:ext cx="4626000" cy="340000"/>
-          </a:xfrm>
-          <a:prstGeom prst="rect">
-            <a:avLst/>
-          </a:prstGeom>
-          <a:noFill/>
-        </p:spPr>
-        <p:txBody>
-          <a:bodyPr wrap="square" anchor="ctr" lIns="0" rIns="0" tIns="0" bIns="0">
-            <a:noAutofit/>
-          </a:bodyPr>
-          <a:lstStyle/>
-          <a:p>
-            <a:pPr algn="l" marL="0" indent="0">
-              <a:lnSpc>
-                <a:spcPct val="105000"/>
-              </a:lnSpc>
-              <a:spcBef>
-                <a:spcPts val="0"/>
-              </a:spcBef>
-              <a:spcAft>
-                <a:spcPts val="0"/>
-              </a:spcAft>
-              <a:buNone/>
-            </a:pPr>
-            <a:r>
-              <a:rPr sz="1500" b="1" i="0">
-                <a:solidFill>
-                  <a:srgbClr val="F3F6FC"/>
-                </a:solidFill>
-                <a:latin typeface="Segoe UI Semibold"/>
-              </a:rPr>
-              <a:t>INGRESS</a:t>
-            </a:r>
-          </a:p>
-        </p:txBody>
-      </p:sp>
+      <p:pic>
+        <p:nvPicPr>
+          <p:cNvPr id="11" name="Picture 10" descr="ing.png"/>
+          <p:cNvPicPr>
+            <a:picLocks noChangeAspect="1"/>
+          </p:cNvPicPr>
+          <p:nvPr/>
+        </p:nvPicPr>
+        <p:blipFill>
+          <a:blip r:embed="rId2"/>
+          <a:stretch>
+            <a:fillRect/>
+          </a:stretch>
+        </p:blipFill>
+        <p:spPr>
+          <a:xfrm>
+            <a:off x="5376000" y="2374000"/>
+            <a:ext cx="330000" cy="330000"/>
+          </a:xfrm>
+          <a:prstGeom prst="rect">
+            <a:avLst/>
+          </a:prstGeom>
+        </p:spPr>
+      </p:pic>
       <p:sp>
         <p:nvSpPr>
           <p:cNvPr id="12" name="TextBox 11"/>
@@ -15310,6 +15861,52 @@
         </p:nvSpPr>
         <p:spPr>
           <a:xfrm>
+            <a:off x="1260000" y="2368000"/>
+            <a:ext cx="4256000" cy="340000"/>
+          </a:xfrm>
+          <a:prstGeom prst="rect">
+            <a:avLst/>
+          </a:prstGeom>
+          <a:noFill/>
+        </p:spPr>
+        <p:txBody>
+          <a:bodyPr wrap="square" anchor="ctr" lIns="0" rIns="0" tIns="0" bIns="0">
+            <a:noAutofit/>
+          </a:bodyPr>
+          <a:lstStyle/>
+          <a:p>
+            <a:pPr algn="l" marL="0" indent="0">
+              <a:lnSpc>
+                <a:spcPct val="105000"/>
+              </a:lnSpc>
+              <a:spcBef>
+                <a:spcPts val="0"/>
+              </a:spcBef>
+              <a:spcAft>
+                <a:spcPts val="0"/>
+              </a:spcAft>
+              <a:buNone/>
+            </a:pPr>
+            <a:r>
+              <a:rPr sz="1500" b="1" i="0">
+                <a:solidFill>
+                  <a:srgbClr val="F3F6FC"/>
+                </a:solidFill>
+                <a:latin typeface="Segoe UI Semibold"/>
+              </a:rPr>
+              <a:t>INGRESS</a:t>
+            </a:r>
+          </a:p>
+        </p:txBody>
+      </p:sp>
+      <p:sp>
+        <p:nvSpPr>
+          <p:cNvPr id="13" name="TextBox 12"/>
+          <p:cNvSpPr txBox="1"/>
+          <p:nvPr/>
+        </p:nvSpPr>
+        <p:spPr>
+          <a:xfrm>
             <a:off x="850000" y="2788000"/>
             <a:ext cx="4856000" cy="602000"/>
           </a:xfrm>
@@ -15350,7 +15947,7 @@
       </p:sp>
       <p:sp>
         <p:nvSpPr>
-          <p:cNvPr id="13" name="Rounded Rectangle 12"/>
+          <p:cNvPr id="14" name="Rounded Rectangle 13"/>
           <p:cNvSpPr/>
           <p:nvPr/>
         </p:nvSpPr>
@@ -15400,7 +15997,7 @@
       </p:sp>
       <p:sp>
         <p:nvSpPr>
-          <p:cNvPr id="14" name="Rectangle 13"/>
+          <p:cNvPr id="15" name="Rectangle 14"/>
           <p:cNvSpPr/>
           <p:nvPr/>
         </p:nvSpPr>
@@ -15446,7 +16043,7 @@
       </p:sp>
       <p:sp>
         <p:nvSpPr>
-          <p:cNvPr id="15" name="Oval 14"/>
+          <p:cNvPr id="16" name="Oval 15"/>
           <p:cNvSpPr/>
           <p:nvPr/>
         </p:nvSpPr>
@@ -15510,16 +16107,40 @@
           </a:p>
         </p:txBody>
       </p:sp>
-      <p:sp>
-        <p:nvSpPr>
-          <p:cNvPr id="16" name="TextBox 15"/>
+      <p:pic>
+        <p:nvPicPr>
+          <p:cNvPr id="17" name="Picture 16" descr="deploy.png"/>
+          <p:cNvPicPr>
+            <a:picLocks noChangeAspect="1"/>
+          </p:cNvPicPr>
+          <p:nvPr/>
+        </p:nvPicPr>
+        <p:blipFill>
+          <a:blip r:embed="rId3"/>
+          <a:stretch>
+            <a:fillRect/>
+          </a:stretch>
+        </p:blipFill>
+        <p:spPr>
+          <a:xfrm>
+            <a:off x="11012000" y="2374000"/>
+            <a:ext cx="330000" cy="330000"/>
+          </a:xfrm>
+          <a:prstGeom prst="rect">
+            <a:avLst/>
+          </a:prstGeom>
+        </p:spPr>
+      </p:pic>
+      <p:sp>
+        <p:nvSpPr>
+          <p:cNvPr id="18" name="TextBox 17"/>
           <p:cNvSpPr txBox="1"/>
           <p:nvPr/>
         </p:nvSpPr>
         <p:spPr>
           <a:xfrm>
             <a:off x="6896000" y="2368000"/>
-            <a:ext cx="4626000" cy="340000"/>
+            <a:ext cx="4256000" cy="340000"/>
           </a:xfrm>
           <a:prstGeom prst="rect">
             <a:avLst/>
@@ -15558,7 +16179,7 @@
       </p:sp>
       <p:sp>
         <p:nvSpPr>
-          <p:cNvPr id="17" name="TextBox 16"/>
+          <p:cNvPr id="19" name="TextBox 18"/>
           <p:cNvSpPr txBox="1"/>
           <p:nvPr/>
         </p:nvSpPr>
@@ -15604,7 +16225,7 @@
       </p:sp>
       <p:sp>
         <p:nvSpPr>
-          <p:cNvPr id="18" name="Rounded Rectangle 17"/>
+          <p:cNvPr id="20" name="Rounded Rectangle 19"/>
           <p:cNvSpPr/>
           <p:nvPr/>
         </p:nvSpPr>
@@ -15654,7 +16275,7 @@
       </p:sp>
       <p:sp>
         <p:nvSpPr>
-          <p:cNvPr id="19" name="Rectangle 18"/>
+          <p:cNvPr id="21" name="Rectangle 20"/>
           <p:cNvSpPr/>
           <p:nvPr/>
         </p:nvSpPr>
@@ -15700,7 +16321,7 @@
       </p:sp>
       <p:sp>
         <p:nvSpPr>
-          <p:cNvPr id="20" name="Oval 19"/>
+          <p:cNvPr id="22" name="Oval 21"/>
           <p:cNvSpPr/>
           <p:nvPr/>
         </p:nvSpPr>
@@ -15764,16 +16385,40 @@
           </a:p>
         </p:txBody>
       </p:sp>
-      <p:sp>
-        <p:nvSpPr>
-          <p:cNvPr id="21" name="TextBox 20"/>
+      <p:pic>
+        <p:nvPicPr>
+          <p:cNvPr id="23" name="Picture 22" descr="deploy.png"/>
+          <p:cNvPicPr>
+            <a:picLocks noChangeAspect="1"/>
+          </p:cNvPicPr>
+          <p:nvPr/>
+        </p:nvPicPr>
+        <p:blipFill>
+          <a:blip r:embed="rId3"/>
+          <a:stretch>
+            <a:fillRect/>
+          </a:stretch>
+        </p:blipFill>
+        <p:spPr>
+          <a:xfrm>
+            <a:off x="5376000" y="3946000"/>
+            <a:ext cx="330000" cy="330000"/>
+          </a:xfrm>
+          <a:prstGeom prst="rect">
+            <a:avLst/>
+          </a:prstGeom>
+        </p:spPr>
+      </p:pic>
+      <p:sp>
+        <p:nvSpPr>
+          <p:cNvPr id="24" name="TextBox 23"/>
           <p:cNvSpPr txBox="1"/>
           <p:nvPr/>
         </p:nvSpPr>
         <p:spPr>
           <a:xfrm>
             <a:off x="1260000" y="3940000"/>
-            <a:ext cx="4626000" cy="340000"/>
+            <a:ext cx="4256000" cy="340000"/>
           </a:xfrm>
           <a:prstGeom prst="rect">
             <a:avLst/>
@@ -15812,7 +16457,7 @@
       </p:sp>
       <p:sp>
         <p:nvSpPr>
-          <p:cNvPr id="22" name="TextBox 21"/>
+          <p:cNvPr id="25" name="TextBox 24"/>
           <p:cNvSpPr txBox="1"/>
           <p:nvPr/>
         </p:nvSpPr>
@@ -15858,7 +16503,7 @@
       </p:sp>
       <p:sp>
         <p:nvSpPr>
-          <p:cNvPr id="23" name="Rounded Rectangle 22"/>
+          <p:cNvPr id="26" name="Rounded Rectangle 25"/>
           <p:cNvSpPr/>
           <p:nvPr/>
         </p:nvSpPr>
@@ -15908,7 +16553,7 @@
       </p:sp>
       <p:sp>
         <p:nvSpPr>
-          <p:cNvPr id="24" name="Rectangle 23"/>
+          <p:cNvPr id="27" name="Rectangle 26"/>
           <p:cNvSpPr/>
           <p:nvPr/>
         </p:nvSpPr>
@@ -15954,7 +16599,7 @@
       </p:sp>
       <p:sp>
         <p:nvSpPr>
-          <p:cNvPr id="25" name="Oval 24"/>
+          <p:cNvPr id="28" name="Oval 27"/>
           <p:cNvSpPr/>
           <p:nvPr/>
         </p:nvSpPr>
@@ -16018,16 +16663,40 @@
           </a:p>
         </p:txBody>
       </p:sp>
-      <p:sp>
-        <p:nvSpPr>
-          <p:cNvPr id="26" name="TextBox 25"/>
+      <p:pic>
+        <p:nvPicPr>
+          <p:cNvPr id="29" name="Picture 28" descr="sts.png"/>
+          <p:cNvPicPr>
+            <a:picLocks noChangeAspect="1"/>
+          </p:cNvPicPr>
+          <p:nvPr/>
+        </p:nvPicPr>
+        <p:blipFill>
+          <a:blip r:embed="rId4"/>
+          <a:stretch>
+            <a:fillRect/>
+          </a:stretch>
+        </p:blipFill>
+        <p:spPr>
+          <a:xfrm>
+            <a:off x="11012000" y="3946000"/>
+            <a:ext cx="330000" cy="330000"/>
+          </a:xfrm>
+          <a:prstGeom prst="rect">
+            <a:avLst/>
+          </a:prstGeom>
+        </p:spPr>
+      </p:pic>
+      <p:sp>
+        <p:nvSpPr>
+          <p:cNvPr id="30" name="TextBox 29"/>
           <p:cNvSpPr txBox="1"/>
           <p:nvPr/>
         </p:nvSpPr>
         <p:spPr>
           <a:xfrm>
             <a:off x="6896000" y="3940000"/>
-            <a:ext cx="4626000" cy="340000"/>
+            <a:ext cx="4256000" cy="340000"/>
           </a:xfrm>
           <a:prstGeom prst="rect">
             <a:avLst/>
@@ -16066,7 +16735,7 @@
       </p:sp>
       <p:sp>
         <p:nvSpPr>
-          <p:cNvPr id="27" name="TextBox 26"/>
+          <p:cNvPr id="31" name="TextBox 30"/>
           <p:cNvSpPr txBox="1"/>
           <p:nvPr/>
         </p:nvSpPr>
@@ -16112,7 +16781,7 @@
       </p:sp>
       <p:sp>
         <p:nvSpPr>
-          <p:cNvPr id="28" name="Rounded Rectangle 27"/>
+          <p:cNvPr id="32" name="Rounded Rectangle 31"/>
           <p:cNvSpPr/>
           <p:nvPr/>
         </p:nvSpPr>
@@ -16162,7 +16831,7 @@
       </p:sp>
       <p:sp>
         <p:nvSpPr>
-          <p:cNvPr id="29" name="Rectangle 28"/>
+          <p:cNvPr id="33" name="Rectangle 32"/>
           <p:cNvSpPr/>
           <p:nvPr/>
         </p:nvSpPr>
@@ -16208,7 +16877,7 @@
       </p:sp>
       <p:sp>
         <p:nvSpPr>
-          <p:cNvPr id="30" name="TextBox 29"/>
+          <p:cNvPr id="34" name="TextBox 33"/>
           <p:cNvSpPr txBox="1"/>
           <p:nvPr/>
         </p:nvSpPr>
@@ -16333,7 +17002,7 @@
         <p:spPr>
           <a:xfrm>
             <a:off x="620000" y="560000"/>
-            <a:ext cx="10952000" cy="620000"/>
+            <a:ext cx="10052000" cy="620000"/>
           </a:xfrm>
           <a:prstGeom prst="rect">
             <a:avLst/>
@@ -16562,6 +17231,140 @@
         </p:nvSpPr>
         <p:spPr>
           <a:xfrm>
+            <a:off x="10983200" y="326200"/>
+            <a:ext cx="537600" cy="537600"/>
+          </a:xfrm>
+          <a:prstGeom prst="ellipse">
+            <a:avLst/>
+          </a:prstGeom>
+          <a:noFill/>
+          <a:ln w="38100">
+            <a:solidFill>
+              <a:srgbClr val="74A6FF"/>
+            </a:solidFill>
+          </a:ln>
+          <a:effectLst/>
+        </p:spPr>
+        <p:style>
+          <a:lnRef idx="1">
+            <a:schemeClr val="accent1"/>
+          </a:lnRef>
+          <a:fillRef idx="3">
+            <a:schemeClr val="accent1"/>
+          </a:fillRef>
+          <a:effectRef idx="2">
+            <a:schemeClr val="accent1"/>
+          </a:effectRef>
+          <a:fontRef idx="minor">
+            <a:schemeClr val="lt1"/>
+          </a:fontRef>
+        </p:style>
+        <p:txBody>
+          <a:bodyPr rtlCol="0" anchor="ctr"/>
+          <a:lstStyle/>
+          <a:p>
+            <a:pPr algn="ctr"/>
+          </a:p>
+        </p:txBody>
+      </p:sp>
+      <p:sp>
+        <p:nvSpPr>
+          <p:cNvPr id="9" name="Oval 8"/>
+          <p:cNvSpPr/>
+          <p:nvPr/>
+        </p:nvSpPr>
+        <p:spPr>
+          <a:xfrm>
+            <a:off x="11098400" y="441400"/>
+            <a:ext cx="307200" cy="307200"/>
+          </a:xfrm>
+          <a:prstGeom prst="ellipse">
+            <a:avLst/>
+          </a:prstGeom>
+          <a:noFill/>
+          <a:ln w="38100">
+            <a:solidFill>
+              <a:srgbClr val="74A6FF"/>
+            </a:solidFill>
+          </a:ln>
+          <a:effectLst/>
+        </p:spPr>
+        <p:style>
+          <a:lnRef idx="1">
+            <a:schemeClr val="accent1"/>
+          </a:lnRef>
+          <a:fillRef idx="3">
+            <a:schemeClr val="accent1"/>
+          </a:fillRef>
+          <a:effectRef idx="2">
+            <a:schemeClr val="accent1"/>
+          </a:effectRef>
+          <a:fontRef idx="minor">
+            <a:schemeClr val="lt1"/>
+          </a:fontRef>
+        </p:style>
+        <p:txBody>
+          <a:bodyPr rtlCol="0" anchor="ctr"/>
+          <a:lstStyle/>
+          <a:p>
+            <a:pPr algn="ctr"/>
+          </a:p>
+        </p:txBody>
+      </p:sp>
+      <p:sp>
+        <p:nvSpPr>
+          <p:cNvPr id="10" name="Oval 9"/>
+          <p:cNvSpPr/>
+          <p:nvPr/>
+        </p:nvSpPr>
+        <p:spPr>
+          <a:xfrm>
+            <a:off x="11200800" y="543800"/>
+            <a:ext cx="102400" cy="102400"/>
+          </a:xfrm>
+          <a:prstGeom prst="ellipse">
+            <a:avLst/>
+          </a:prstGeom>
+          <a:solidFill>
+            <a:srgbClr val="74A6FF"/>
+          </a:solidFill>
+          <a:ln w="6350">
+            <a:solidFill>
+              <a:srgbClr val="74A6FF"/>
+            </a:solidFill>
+          </a:ln>
+          <a:effectLst/>
+        </p:spPr>
+        <p:style>
+          <a:lnRef idx="1">
+            <a:schemeClr val="accent1"/>
+          </a:lnRef>
+          <a:fillRef idx="3">
+            <a:schemeClr val="accent1"/>
+          </a:fillRef>
+          <a:effectRef idx="2">
+            <a:schemeClr val="accent1"/>
+          </a:effectRef>
+          <a:fontRef idx="minor">
+            <a:schemeClr val="lt1"/>
+          </a:fontRef>
+        </p:style>
+        <p:txBody>
+          <a:bodyPr rtlCol="0" anchor="ctr"/>
+          <a:lstStyle/>
+          <a:p>
+            <a:pPr algn="ctr"/>
+          </a:p>
+        </p:txBody>
+      </p:sp>
+      <p:sp>
+        <p:nvSpPr>
+          <p:cNvPr id="11" name="Oval 10"/>
+          <p:cNvSpPr/>
+          <p:nvPr/>
+        </p:nvSpPr>
+        <p:spPr>
+          <a:xfrm>
             <a:off x="620000" y="2340000"/>
             <a:ext cx="300000" cy="300000"/>
           </a:xfrm>
@@ -16622,7 +17425,7 @@
       </p:sp>
       <p:sp>
         <p:nvSpPr>
-          <p:cNvPr id="9" name="TextBox 8"/>
+          <p:cNvPr id="12" name="TextBox 11"/>
           <p:cNvSpPr txBox="1"/>
           <p:nvPr/>
         </p:nvSpPr>
@@ -16668,7 +17471,7 @@
       </p:sp>
       <p:sp>
         <p:nvSpPr>
-          <p:cNvPr id="10" name="Oval 9"/>
+          <p:cNvPr id="13" name="Oval 12"/>
           <p:cNvSpPr/>
           <p:nvPr/>
         </p:nvSpPr>
@@ -16734,7 +17537,7 @@
       </p:sp>
       <p:sp>
         <p:nvSpPr>
-          <p:cNvPr id="11" name="TextBox 10"/>
+          <p:cNvPr id="14" name="TextBox 13"/>
           <p:cNvSpPr txBox="1"/>
           <p:nvPr/>
         </p:nvSpPr>
@@ -16780,7 +17583,7 @@
       </p:sp>
       <p:sp>
         <p:nvSpPr>
-          <p:cNvPr id="12" name="Oval 11"/>
+          <p:cNvPr id="15" name="Oval 14"/>
           <p:cNvSpPr/>
           <p:nvPr/>
         </p:nvSpPr>
@@ -16846,7 +17649,7 @@
       </p:sp>
       <p:sp>
         <p:nvSpPr>
-          <p:cNvPr id="13" name="TextBox 12"/>
+          <p:cNvPr id="16" name="TextBox 15"/>
           <p:cNvSpPr txBox="1"/>
           <p:nvPr/>
         </p:nvSpPr>
@@ -16892,7 +17695,7 @@
       </p:sp>
       <p:sp>
         <p:nvSpPr>
-          <p:cNvPr id="14" name="Oval 13"/>
+          <p:cNvPr id="17" name="Oval 16"/>
           <p:cNvSpPr/>
           <p:nvPr/>
         </p:nvSpPr>
@@ -16958,7 +17761,7 @@
       </p:sp>
       <p:sp>
         <p:nvSpPr>
-          <p:cNvPr id="15" name="TextBox 14"/>
+          <p:cNvPr id="18" name="TextBox 17"/>
           <p:cNvSpPr txBox="1"/>
           <p:nvPr/>
         </p:nvSpPr>
@@ -17004,7 +17807,7 @@
       </p:sp>
       <p:sp>
         <p:nvSpPr>
-          <p:cNvPr id="16" name="Oval 15"/>
+          <p:cNvPr id="19" name="Oval 18"/>
           <p:cNvSpPr/>
           <p:nvPr/>
         </p:nvSpPr>
@@ -17070,7 +17873,7 @@
       </p:sp>
       <p:sp>
         <p:nvSpPr>
-          <p:cNvPr id="17" name="TextBox 16"/>
+          <p:cNvPr id="20" name="TextBox 19"/>
           <p:cNvSpPr txBox="1"/>
           <p:nvPr/>
         </p:nvSpPr>
@@ -17116,7 +17919,7 @@
       </p:sp>
       <p:sp>
         <p:nvSpPr>
-          <p:cNvPr id="18" name="Oval 17"/>
+          <p:cNvPr id="21" name="Oval 20"/>
           <p:cNvSpPr/>
           <p:nvPr/>
         </p:nvSpPr>
@@ -17182,7 +17985,7 @@
       </p:sp>
       <p:sp>
         <p:nvSpPr>
-          <p:cNvPr id="19" name="TextBox 18"/>
+          <p:cNvPr id="22" name="TextBox 21"/>
           <p:cNvSpPr txBox="1"/>
           <p:nvPr/>
         </p:nvSpPr>
@@ -17307,7 +18110,7 @@
         <p:spPr>
           <a:xfrm>
             <a:off x="620000" y="560000"/>
-            <a:ext cx="10952000" cy="620000"/>
+            <a:ext cx="10052000" cy="620000"/>
           </a:xfrm>
           <a:prstGeom prst="rect">
             <a:avLst/>
@@ -17530,7 +18333,253 @@
       </p:sp>
       <p:sp>
         <p:nvSpPr>
-          <p:cNvPr id="8" name="TextBox 7"/>
+          <p:cNvPr id="8" name="Oval 7"/>
+          <p:cNvSpPr/>
+          <p:nvPr/>
+        </p:nvSpPr>
+        <p:spPr>
+          <a:xfrm>
+            <a:off x="10996000" y="390200"/>
+            <a:ext cx="76800" cy="76800"/>
+          </a:xfrm>
+          <a:prstGeom prst="ellipse">
+            <a:avLst/>
+          </a:prstGeom>
+          <a:solidFill>
+            <a:srgbClr val="FF7B72"/>
+          </a:solidFill>
+          <a:ln w="6350">
+            <a:solidFill>
+              <a:srgbClr val="FF7B72"/>
+            </a:solidFill>
+          </a:ln>
+          <a:effectLst/>
+        </p:spPr>
+        <p:style>
+          <a:lnRef idx="1">
+            <a:schemeClr val="accent1"/>
+          </a:lnRef>
+          <a:fillRef idx="3">
+            <a:schemeClr val="accent1"/>
+          </a:fillRef>
+          <a:effectRef idx="2">
+            <a:schemeClr val="accent1"/>
+          </a:effectRef>
+          <a:fontRef idx="minor">
+            <a:schemeClr val="lt1"/>
+          </a:fontRef>
+        </p:style>
+        <p:txBody>
+          <a:bodyPr rtlCol="0" anchor="ctr"/>
+          <a:lstStyle/>
+          <a:p>
+            <a:pPr algn="ctr"/>
+          </a:p>
+        </p:txBody>
+      </p:sp>
+      <p:cxnSp>
+        <p:nvCxnSpPr>
+          <p:cNvPr id="9" name="Connector 8"/>
+          <p:cNvCxnSpPr/>
+          <p:nvPr/>
+        </p:nvCxnSpPr>
+        <p:spPr>
+          <a:xfrm>
+            <a:off x="11136800" y="428600"/>
+            <a:ext cx="371200" cy="0"/>
+          </a:xfrm>
+          <a:prstGeom prst="line">
+            <a:avLst/>
+          </a:prstGeom>
+          <a:ln w="38100">
+            <a:solidFill>
+              <a:srgbClr val="FF7B72"/>
+            </a:solidFill>
+          </a:ln>
+          <a:effectLst/>
+        </p:spPr>
+        <p:style>
+          <a:lnRef idx="2">
+            <a:schemeClr val="accent1"/>
+          </a:lnRef>
+          <a:fillRef idx="0">
+            <a:schemeClr val="accent1"/>
+          </a:fillRef>
+          <a:effectRef idx="1">
+            <a:schemeClr val="accent1"/>
+          </a:effectRef>
+          <a:fontRef idx="minor">
+            <a:schemeClr val="tx1"/>
+          </a:fontRef>
+        </p:style>
+      </p:cxnSp>
+      <p:sp>
+        <p:nvSpPr>
+          <p:cNvPr id="10" name="Oval 9"/>
+          <p:cNvSpPr/>
+          <p:nvPr/>
+        </p:nvSpPr>
+        <p:spPr>
+          <a:xfrm>
+            <a:off x="10996000" y="543800"/>
+            <a:ext cx="76800" cy="76800"/>
+          </a:xfrm>
+          <a:prstGeom prst="ellipse">
+            <a:avLst/>
+          </a:prstGeom>
+          <a:solidFill>
+            <a:srgbClr val="FF7B72"/>
+          </a:solidFill>
+          <a:ln w="6350">
+            <a:solidFill>
+              <a:srgbClr val="FF7B72"/>
+            </a:solidFill>
+          </a:ln>
+          <a:effectLst/>
+        </p:spPr>
+        <p:style>
+          <a:lnRef idx="1">
+            <a:schemeClr val="accent1"/>
+          </a:lnRef>
+          <a:fillRef idx="3">
+            <a:schemeClr val="accent1"/>
+          </a:fillRef>
+          <a:effectRef idx="2">
+            <a:schemeClr val="accent1"/>
+          </a:effectRef>
+          <a:fontRef idx="minor">
+            <a:schemeClr val="lt1"/>
+          </a:fontRef>
+        </p:style>
+        <p:txBody>
+          <a:bodyPr rtlCol="0" anchor="ctr"/>
+          <a:lstStyle/>
+          <a:p>
+            <a:pPr algn="ctr"/>
+          </a:p>
+        </p:txBody>
+      </p:sp>
+      <p:cxnSp>
+        <p:nvCxnSpPr>
+          <p:cNvPr id="11" name="Connector 10"/>
+          <p:cNvCxnSpPr/>
+          <p:nvPr/>
+        </p:nvCxnSpPr>
+        <p:spPr>
+          <a:xfrm>
+            <a:off x="11136800" y="582200"/>
+            <a:ext cx="371200" cy="0"/>
+          </a:xfrm>
+          <a:prstGeom prst="line">
+            <a:avLst/>
+          </a:prstGeom>
+          <a:ln w="38100">
+            <a:solidFill>
+              <a:srgbClr val="FF7B72"/>
+            </a:solidFill>
+          </a:ln>
+          <a:effectLst/>
+        </p:spPr>
+        <p:style>
+          <a:lnRef idx="2">
+            <a:schemeClr val="accent1"/>
+          </a:lnRef>
+          <a:fillRef idx="0">
+            <a:schemeClr val="accent1"/>
+          </a:fillRef>
+          <a:effectRef idx="1">
+            <a:schemeClr val="accent1"/>
+          </a:effectRef>
+          <a:fontRef idx="minor">
+            <a:schemeClr val="tx1"/>
+          </a:fontRef>
+        </p:style>
+      </p:cxnSp>
+      <p:sp>
+        <p:nvSpPr>
+          <p:cNvPr id="12" name="Oval 11"/>
+          <p:cNvSpPr/>
+          <p:nvPr/>
+        </p:nvSpPr>
+        <p:spPr>
+          <a:xfrm>
+            <a:off x="10996000" y="697400"/>
+            <a:ext cx="76800" cy="76800"/>
+          </a:xfrm>
+          <a:prstGeom prst="ellipse">
+            <a:avLst/>
+          </a:prstGeom>
+          <a:solidFill>
+            <a:srgbClr val="FF7B72"/>
+          </a:solidFill>
+          <a:ln w="6350">
+            <a:solidFill>
+              <a:srgbClr val="FF7B72"/>
+            </a:solidFill>
+          </a:ln>
+          <a:effectLst/>
+        </p:spPr>
+        <p:style>
+          <a:lnRef idx="1">
+            <a:schemeClr val="accent1"/>
+          </a:lnRef>
+          <a:fillRef idx="3">
+            <a:schemeClr val="accent1"/>
+          </a:fillRef>
+          <a:effectRef idx="2">
+            <a:schemeClr val="accent1"/>
+          </a:effectRef>
+          <a:fontRef idx="minor">
+            <a:schemeClr val="lt1"/>
+          </a:fontRef>
+        </p:style>
+        <p:txBody>
+          <a:bodyPr rtlCol="0" anchor="ctr"/>
+          <a:lstStyle/>
+          <a:p>
+            <a:pPr algn="ctr"/>
+          </a:p>
+        </p:txBody>
+      </p:sp>
+      <p:cxnSp>
+        <p:nvCxnSpPr>
+          <p:cNvPr id="13" name="Connector 12"/>
+          <p:cNvCxnSpPr/>
+          <p:nvPr/>
+        </p:nvCxnSpPr>
+        <p:spPr>
+          <a:xfrm>
+            <a:off x="11136800" y="735800"/>
+            <a:ext cx="371200" cy="0"/>
+          </a:xfrm>
+          <a:prstGeom prst="line">
+            <a:avLst/>
+          </a:prstGeom>
+          <a:ln w="38100">
+            <a:solidFill>
+              <a:srgbClr val="FF7B72"/>
+            </a:solidFill>
+          </a:ln>
+          <a:effectLst/>
+        </p:spPr>
+        <p:style>
+          <a:lnRef idx="2">
+            <a:schemeClr val="accent1"/>
+          </a:lnRef>
+          <a:fillRef idx="0">
+            <a:schemeClr val="accent1"/>
+          </a:fillRef>
+          <a:effectRef idx="1">
+            <a:schemeClr val="accent1"/>
+          </a:effectRef>
+          <a:fontRef idx="minor">
+            <a:schemeClr val="tx1"/>
+          </a:fontRef>
+        </p:style>
+      </p:cxnSp>
+      <p:sp>
+        <p:nvSpPr>
+          <p:cNvPr id="14" name="TextBox 13"/>
           <p:cNvSpPr txBox="1"/>
           <p:nvPr/>
         </p:nvSpPr>
@@ -17576,7 +18625,7 @@
       </p:sp>
       <p:sp>
         <p:nvSpPr>
-          <p:cNvPr id="9" name="Rounded Rectangle 8"/>
+          <p:cNvPr id="15" name="Rounded Rectangle 14"/>
           <p:cNvSpPr/>
           <p:nvPr/>
         </p:nvSpPr>
@@ -17626,7 +18675,7 @@
       </p:sp>
       <p:sp>
         <p:nvSpPr>
-          <p:cNvPr id="10" name="Rectangle 9"/>
+          <p:cNvPr id="16" name="Rectangle 15"/>
           <p:cNvSpPr/>
           <p:nvPr/>
         </p:nvSpPr>
@@ -17672,7 +18721,7 @@
       </p:sp>
       <p:sp>
         <p:nvSpPr>
-          <p:cNvPr id="11" name="TextBox 10"/>
+          <p:cNvPr id="17" name="TextBox 16"/>
           <p:cNvSpPr txBox="1"/>
           <p:nvPr/>
         </p:nvSpPr>
@@ -17735,7 +18784,7 @@
       </p:sp>
       <p:sp>
         <p:nvSpPr>
-          <p:cNvPr id="12" name="Rounded Rectangle 11"/>
+          <p:cNvPr id="18" name="Rounded Rectangle 17"/>
           <p:cNvSpPr/>
           <p:nvPr/>
         </p:nvSpPr>
@@ -17785,7 +18834,7 @@
       </p:sp>
       <p:sp>
         <p:nvSpPr>
-          <p:cNvPr id="13" name="Rectangle 12"/>
+          <p:cNvPr id="19" name="Rectangle 18"/>
           <p:cNvSpPr/>
           <p:nvPr/>
         </p:nvSpPr>
@@ -17831,7 +18880,7 @@
       </p:sp>
       <p:sp>
         <p:nvSpPr>
-          <p:cNvPr id="14" name="TextBox 13"/>
+          <p:cNvPr id="20" name="TextBox 19"/>
           <p:cNvSpPr txBox="1"/>
           <p:nvPr/>
         </p:nvSpPr>
@@ -18667,7 +19716,149 @@
       </p:sp>
       <p:sp>
         <p:nvSpPr>
-          <p:cNvPr id="16" name="Rounded Rectangle 15"/>
+          <p:cNvPr id="16" name="Freeform 15"/>
+          <p:cNvSpPr/>
+          <p:nvPr/>
+        </p:nvSpPr>
+        <p:spPr>
+          <a:xfrm>
+            <a:off x="9590000" y="1418800"/>
+            <a:ext cx="784000" cy="842800"/>
+          </a:xfrm>
+          <a:custGeom>
+            <a:avLst/>
+            <a:gdLst/>
+            <a:ahLst/>
+            <a:cxnLst/>
+            <a:rect l="l" t="t" r="r" b="b"/>
+            <a:pathLst>
+              <a:path w="784000" h="842800">
+                <a:moveTo>
+                  <a:pt x="235200" y="0"/>
+                </a:moveTo>
+                <a:lnTo>
+                  <a:pt x="235200" y="333200"/>
+                </a:lnTo>
+                <a:lnTo>
+                  <a:pt x="0" y="842800"/>
+                </a:lnTo>
+                <a:lnTo>
+                  <a:pt x="784000" y="842800"/>
+                </a:lnTo>
+                <a:lnTo>
+                  <a:pt x="548800" y="333200"/>
+                </a:lnTo>
+                <a:lnTo>
+                  <a:pt x="548800" y="0"/>
+                </a:lnTo>
+              </a:path>
+            </a:pathLst>
+          </a:custGeom>
+          <a:noFill/>
+          <a:ln w="33020">
+            <a:solidFill>
+              <a:srgbClr val="74A6FF"/>
+            </a:solidFill>
+          </a:ln>
+          <a:effectLst/>
+        </p:spPr>
+        <p:style>
+          <a:lnRef idx="1">
+            <a:schemeClr val="accent1"/>
+          </a:lnRef>
+          <a:fillRef idx="3">
+            <a:schemeClr val="accent1"/>
+          </a:fillRef>
+          <a:effectRef idx="2">
+            <a:schemeClr val="accent1"/>
+          </a:effectRef>
+          <a:fontRef idx="minor">
+            <a:schemeClr val="lt1"/>
+          </a:fontRef>
+        </p:style>
+        <p:txBody>
+          <a:bodyPr rtlCol="0" anchor="ctr"/>
+          <a:lstStyle/>
+          <a:p>
+            <a:pPr algn="ctr"/>
+          </a:p>
+        </p:txBody>
+      </p:sp>
+      <p:cxnSp>
+        <p:nvCxnSpPr>
+          <p:cNvPr id="17" name="Connector 16"/>
+          <p:cNvCxnSpPr/>
+          <p:nvPr/>
+        </p:nvCxnSpPr>
+        <p:spPr>
+          <a:xfrm>
+            <a:off x="9766400" y="1418800"/>
+            <a:ext cx="431200" cy="0"/>
+          </a:xfrm>
+          <a:prstGeom prst="line">
+            <a:avLst/>
+          </a:prstGeom>
+          <a:ln w="33020">
+            <a:solidFill>
+              <a:srgbClr val="74A6FF"/>
+            </a:solidFill>
+          </a:ln>
+          <a:effectLst/>
+        </p:spPr>
+        <p:style>
+          <a:lnRef idx="2">
+            <a:schemeClr val="accent1"/>
+          </a:lnRef>
+          <a:fillRef idx="0">
+            <a:schemeClr val="accent1"/>
+          </a:fillRef>
+          <a:effectRef idx="1">
+            <a:schemeClr val="accent1"/>
+          </a:effectRef>
+          <a:fontRef idx="minor">
+            <a:schemeClr val="tx1"/>
+          </a:fontRef>
+        </p:style>
+      </p:cxnSp>
+      <p:cxnSp>
+        <p:nvCxnSpPr>
+          <p:cNvPr id="18" name="Connector 17"/>
+          <p:cNvCxnSpPr/>
+          <p:nvPr/>
+        </p:nvCxnSpPr>
+        <p:spPr>
+          <a:xfrm>
+            <a:off x="9727200" y="2006800"/>
+            <a:ext cx="509600" cy="0"/>
+          </a:xfrm>
+          <a:prstGeom prst="line">
+            <a:avLst/>
+          </a:prstGeom>
+          <a:ln w="33020">
+            <a:solidFill>
+              <a:srgbClr val="74A6FF"/>
+            </a:solidFill>
+          </a:ln>
+          <a:effectLst/>
+        </p:spPr>
+        <p:style>
+          <a:lnRef idx="2">
+            <a:schemeClr val="accent1"/>
+          </a:lnRef>
+          <a:fillRef idx="0">
+            <a:schemeClr val="accent1"/>
+          </a:fillRef>
+          <a:effectRef idx="1">
+            <a:schemeClr val="accent1"/>
+          </a:effectRef>
+          <a:fontRef idx="minor">
+            <a:schemeClr val="tx1"/>
+          </a:fontRef>
+        </p:style>
+      </p:cxnSp>
+      <p:sp>
+        <p:nvSpPr>
+          <p:cNvPr id="19" name="Rounded Rectangle 18"/>
           <p:cNvSpPr/>
           <p:nvPr/>
         </p:nvSpPr>
@@ -18717,7 +19908,7 @@
       </p:sp>
       <p:sp>
         <p:nvSpPr>
-          <p:cNvPr id="17" name="Rectangle 16"/>
+          <p:cNvPr id="20" name="Rectangle 19"/>
           <p:cNvSpPr/>
           <p:nvPr/>
         </p:nvSpPr>
@@ -18763,7 +19954,7 @@
       </p:sp>
       <p:sp>
         <p:nvSpPr>
-          <p:cNvPr id="18" name="TextBox 17"/>
+          <p:cNvPr id="21" name="TextBox 20"/>
           <p:cNvSpPr txBox="1"/>
           <p:nvPr/>
         </p:nvSpPr>
@@ -18832,7 +20023,7 @@
       </p:sp>
       <p:sp>
         <p:nvSpPr>
-          <p:cNvPr id="19" name="Rectangle 18"/>
+          <p:cNvPr id="22" name="Rectangle 21"/>
           <p:cNvSpPr/>
           <p:nvPr/>
         </p:nvSpPr>
@@ -18878,7 +20069,7 @@
       </p:sp>
       <p:sp>
         <p:nvSpPr>
-          <p:cNvPr id="20" name="TextBox 19"/>
+          <p:cNvPr id="23" name="TextBox 22"/>
           <p:cNvSpPr txBox="1"/>
           <p:nvPr/>
         </p:nvSpPr>
@@ -18947,7 +20138,7 @@
       </p:sp>
       <p:sp>
         <p:nvSpPr>
-          <p:cNvPr id="21" name="Rectangle 20"/>
+          <p:cNvPr id="24" name="Rectangle 23"/>
           <p:cNvSpPr/>
           <p:nvPr/>
         </p:nvSpPr>
@@ -18993,7 +20184,7 @@
       </p:sp>
       <p:sp>
         <p:nvSpPr>
-          <p:cNvPr id="22" name="TextBox 21"/>
+          <p:cNvPr id="25" name="TextBox 24"/>
           <p:cNvSpPr txBox="1"/>
           <p:nvPr/>
         </p:nvSpPr>
@@ -19062,7 +20253,7 @@
       </p:sp>
       <p:sp>
         <p:nvSpPr>
-          <p:cNvPr id="23" name="Rectangle 22"/>
+          <p:cNvPr id="26" name="Rectangle 25"/>
           <p:cNvSpPr/>
           <p:nvPr/>
         </p:nvSpPr>
@@ -19108,7 +20299,7 @@
       </p:sp>
       <p:sp>
         <p:nvSpPr>
-          <p:cNvPr id="24" name="TextBox 23"/>
+          <p:cNvPr id="27" name="TextBox 26"/>
           <p:cNvSpPr txBox="1"/>
           <p:nvPr/>
         </p:nvSpPr>
@@ -19154,7 +20345,7 @@
       </p:sp>
       <p:sp>
         <p:nvSpPr>
-          <p:cNvPr id="25" name="TextBox 24"/>
+          <p:cNvPr id="28" name="TextBox 27"/>
           <p:cNvSpPr txBox="1"/>
           <p:nvPr/>
         </p:nvSpPr>
@@ -19279,7 +20470,7 @@
         <p:spPr>
           <a:xfrm>
             <a:off x="620000" y="560000"/>
-            <a:ext cx="10952000" cy="620000"/>
+            <a:ext cx="10052000" cy="620000"/>
           </a:xfrm>
           <a:prstGeom prst="rect">
             <a:avLst/>
@@ -19502,7 +20693,253 @@
       </p:sp>
       <p:sp>
         <p:nvSpPr>
-          <p:cNvPr id="8" name="TextBox 7"/>
+          <p:cNvPr id="8" name="Oval 7"/>
+          <p:cNvSpPr/>
+          <p:nvPr/>
+        </p:nvSpPr>
+        <p:spPr>
+          <a:xfrm>
+            <a:off x="10996000" y="390200"/>
+            <a:ext cx="76800" cy="76800"/>
+          </a:xfrm>
+          <a:prstGeom prst="ellipse">
+            <a:avLst/>
+          </a:prstGeom>
+          <a:solidFill>
+            <a:srgbClr val="74A6FF"/>
+          </a:solidFill>
+          <a:ln w="6350">
+            <a:solidFill>
+              <a:srgbClr val="74A6FF"/>
+            </a:solidFill>
+          </a:ln>
+          <a:effectLst/>
+        </p:spPr>
+        <p:style>
+          <a:lnRef idx="1">
+            <a:schemeClr val="accent1"/>
+          </a:lnRef>
+          <a:fillRef idx="3">
+            <a:schemeClr val="accent1"/>
+          </a:fillRef>
+          <a:effectRef idx="2">
+            <a:schemeClr val="accent1"/>
+          </a:effectRef>
+          <a:fontRef idx="minor">
+            <a:schemeClr val="lt1"/>
+          </a:fontRef>
+        </p:style>
+        <p:txBody>
+          <a:bodyPr rtlCol="0" anchor="ctr"/>
+          <a:lstStyle/>
+          <a:p>
+            <a:pPr algn="ctr"/>
+          </a:p>
+        </p:txBody>
+      </p:sp>
+      <p:cxnSp>
+        <p:nvCxnSpPr>
+          <p:cNvPr id="9" name="Connector 8"/>
+          <p:cNvCxnSpPr/>
+          <p:nvPr/>
+        </p:nvCxnSpPr>
+        <p:spPr>
+          <a:xfrm>
+            <a:off x="11136800" y="428600"/>
+            <a:ext cx="371200" cy="0"/>
+          </a:xfrm>
+          <a:prstGeom prst="line">
+            <a:avLst/>
+          </a:prstGeom>
+          <a:ln w="38100">
+            <a:solidFill>
+              <a:srgbClr val="74A6FF"/>
+            </a:solidFill>
+          </a:ln>
+          <a:effectLst/>
+        </p:spPr>
+        <p:style>
+          <a:lnRef idx="2">
+            <a:schemeClr val="accent1"/>
+          </a:lnRef>
+          <a:fillRef idx="0">
+            <a:schemeClr val="accent1"/>
+          </a:fillRef>
+          <a:effectRef idx="1">
+            <a:schemeClr val="accent1"/>
+          </a:effectRef>
+          <a:fontRef idx="minor">
+            <a:schemeClr val="tx1"/>
+          </a:fontRef>
+        </p:style>
+      </p:cxnSp>
+      <p:sp>
+        <p:nvSpPr>
+          <p:cNvPr id="10" name="Oval 9"/>
+          <p:cNvSpPr/>
+          <p:nvPr/>
+        </p:nvSpPr>
+        <p:spPr>
+          <a:xfrm>
+            <a:off x="10996000" y="543800"/>
+            <a:ext cx="76800" cy="76800"/>
+          </a:xfrm>
+          <a:prstGeom prst="ellipse">
+            <a:avLst/>
+          </a:prstGeom>
+          <a:solidFill>
+            <a:srgbClr val="74A6FF"/>
+          </a:solidFill>
+          <a:ln w="6350">
+            <a:solidFill>
+              <a:srgbClr val="74A6FF"/>
+            </a:solidFill>
+          </a:ln>
+          <a:effectLst/>
+        </p:spPr>
+        <p:style>
+          <a:lnRef idx="1">
+            <a:schemeClr val="accent1"/>
+          </a:lnRef>
+          <a:fillRef idx="3">
+            <a:schemeClr val="accent1"/>
+          </a:fillRef>
+          <a:effectRef idx="2">
+            <a:schemeClr val="accent1"/>
+          </a:effectRef>
+          <a:fontRef idx="minor">
+            <a:schemeClr val="lt1"/>
+          </a:fontRef>
+        </p:style>
+        <p:txBody>
+          <a:bodyPr rtlCol="0" anchor="ctr"/>
+          <a:lstStyle/>
+          <a:p>
+            <a:pPr algn="ctr"/>
+          </a:p>
+        </p:txBody>
+      </p:sp>
+      <p:cxnSp>
+        <p:nvCxnSpPr>
+          <p:cNvPr id="11" name="Connector 10"/>
+          <p:cNvCxnSpPr/>
+          <p:nvPr/>
+        </p:nvCxnSpPr>
+        <p:spPr>
+          <a:xfrm>
+            <a:off x="11136800" y="582200"/>
+            <a:ext cx="371200" cy="0"/>
+          </a:xfrm>
+          <a:prstGeom prst="line">
+            <a:avLst/>
+          </a:prstGeom>
+          <a:ln w="38100">
+            <a:solidFill>
+              <a:srgbClr val="74A6FF"/>
+            </a:solidFill>
+          </a:ln>
+          <a:effectLst/>
+        </p:spPr>
+        <p:style>
+          <a:lnRef idx="2">
+            <a:schemeClr val="accent1"/>
+          </a:lnRef>
+          <a:fillRef idx="0">
+            <a:schemeClr val="accent1"/>
+          </a:fillRef>
+          <a:effectRef idx="1">
+            <a:schemeClr val="accent1"/>
+          </a:effectRef>
+          <a:fontRef idx="minor">
+            <a:schemeClr val="tx1"/>
+          </a:fontRef>
+        </p:style>
+      </p:cxnSp>
+      <p:sp>
+        <p:nvSpPr>
+          <p:cNvPr id="12" name="Oval 11"/>
+          <p:cNvSpPr/>
+          <p:nvPr/>
+        </p:nvSpPr>
+        <p:spPr>
+          <a:xfrm>
+            <a:off x="10996000" y="697400"/>
+            <a:ext cx="76800" cy="76800"/>
+          </a:xfrm>
+          <a:prstGeom prst="ellipse">
+            <a:avLst/>
+          </a:prstGeom>
+          <a:solidFill>
+            <a:srgbClr val="74A6FF"/>
+          </a:solidFill>
+          <a:ln w="6350">
+            <a:solidFill>
+              <a:srgbClr val="74A6FF"/>
+            </a:solidFill>
+          </a:ln>
+          <a:effectLst/>
+        </p:spPr>
+        <p:style>
+          <a:lnRef idx="1">
+            <a:schemeClr val="accent1"/>
+          </a:lnRef>
+          <a:fillRef idx="3">
+            <a:schemeClr val="accent1"/>
+          </a:fillRef>
+          <a:effectRef idx="2">
+            <a:schemeClr val="accent1"/>
+          </a:effectRef>
+          <a:fontRef idx="minor">
+            <a:schemeClr val="lt1"/>
+          </a:fontRef>
+        </p:style>
+        <p:txBody>
+          <a:bodyPr rtlCol="0" anchor="ctr"/>
+          <a:lstStyle/>
+          <a:p>
+            <a:pPr algn="ctr"/>
+          </a:p>
+        </p:txBody>
+      </p:sp>
+      <p:cxnSp>
+        <p:nvCxnSpPr>
+          <p:cNvPr id="13" name="Connector 12"/>
+          <p:cNvCxnSpPr/>
+          <p:nvPr/>
+        </p:nvCxnSpPr>
+        <p:spPr>
+          <a:xfrm>
+            <a:off x="11136800" y="735800"/>
+            <a:ext cx="371200" cy="0"/>
+          </a:xfrm>
+          <a:prstGeom prst="line">
+            <a:avLst/>
+          </a:prstGeom>
+          <a:ln w="38100">
+            <a:solidFill>
+              <a:srgbClr val="74A6FF"/>
+            </a:solidFill>
+          </a:ln>
+          <a:effectLst/>
+        </p:spPr>
+        <p:style>
+          <a:lnRef idx="2">
+            <a:schemeClr val="accent1"/>
+          </a:lnRef>
+          <a:fillRef idx="0">
+            <a:schemeClr val="accent1"/>
+          </a:fillRef>
+          <a:effectRef idx="1">
+            <a:schemeClr val="accent1"/>
+          </a:effectRef>
+          <a:fontRef idx="minor">
+            <a:schemeClr val="tx1"/>
+          </a:fontRef>
+        </p:style>
+      </p:cxnSp>
+      <p:sp>
+        <p:nvSpPr>
+          <p:cNvPr id="14" name="TextBox 13"/>
           <p:cNvSpPr txBox="1"/>
           <p:nvPr/>
         </p:nvSpPr>
@@ -19548,7 +20985,7 @@
       </p:sp>
       <p:sp>
         <p:nvSpPr>
-          <p:cNvPr id="9" name="Rounded Rectangle 8"/>
+          <p:cNvPr id="15" name="Rounded Rectangle 14"/>
           <p:cNvSpPr/>
           <p:nvPr/>
         </p:nvSpPr>
@@ -19598,7 +21035,7 @@
       </p:sp>
       <p:sp>
         <p:nvSpPr>
-          <p:cNvPr id="10" name="Rectangle 9"/>
+          <p:cNvPr id="16" name="Rectangle 15"/>
           <p:cNvSpPr/>
           <p:nvPr/>
         </p:nvSpPr>
@@ -19644,7 +21081,7 @@
       </p:sp>
       <p:sp>
         <p:nvSpPr>
-          <p:cNvPr id="11" name="TextBox 10"/>
+          <p:cNvPr id="17" name="TextBox 16"/>
           <p:cNvSpPr txBox="1"/>
           <p:nvPr/>
         </p:nvSpPr>
@@ -19776,7 +21213,7 @@
       </p:sp>
       <p:sp>
         <p:nvSpPr>
-          <p:cNvPr id="12" name="Rounded Rectangle 11"/>
+          <p:cNvPr id="18" name="Rounded Rectangle 17"/>
           <p:cNvSpPr/>
           <p:nvPr/>
         </p:nvSpPr>
@@ -19826,7 +21263,7 @@
       </p:sp>
       <p:sp>
         <p:nvSpPr>
-          <p:cNvPr id="13" name="Rectangle 12"/>
+          <p:cNvPr id="19" name="Rectangle 18"/>
           <p:cNvSpPr/>
           <p:nvPr/>
         </p:nvSpPr>
@@ -19872,7 +21309,7 @@
       </p:sp>
       <p:sp>
         <p:nvSpPr>
-          <p:cNvPr id="14" name="TextBox 13"/>
+          <p:cNvPr id="20" name="TextBox 19"/>
           <p:cNvSpPr txBox="1"/>
           <p:nvPr/>
         </p:nvSpPr>
@@ -19997,7 +21434,7 @@
         <p:spPr>
           <a:xfrm>
             <a:off x="620000" y="560000"/>
-            <a:ext cx="10952000" cy="620000"/>
+            <a:ext cx="10052000" cy="620000"/>
           </a:xfrm>
           <a:prstGeom prst="rect">
             <a:avLst/>
@@ -20226,6 +21663,252 @@
         </p:nvSpPr>
         <p:spPr>
           <a:xfrm>
+            <a:off x="10996000" y="390200"/>
+            <a:ext cx="76800" cy="76800"/>
+          </a:xfrm>
+          <a:prstGeom prst="ellipse">
+            <a:avLst/>
+          </a:prstGeom>
+          <a:solidFill>
+            <a:srgbClr val="74A6FF"/>
+          </a:solidFill>
+          <a:ln w="6350">
+            <a:solidFill>
+              <a:srgbClr val="74A6FF"/>
+            </a:solidFill>
+          </a:ln>
+          <a:effectLst/>
+        </p:spPr>
+        <p:style>
+          <a:lnRef idx="1">
+            <a:schemeClr val="accent1"/>
+          </a:lnRef>
+          <a:fillRef idx="3">
+            <a:schemeClr val="accent1"/>
+          </a:fillRef>
+          <a:effectRef idx="2">
+            <a:schemeClr val="accent1"/>
+          </a:effectRef>
+          <a:fontRef idx="minor">
+            <a:schemeClr val="lt1"/>
+          </a:fontRef>
+        </p:style>
+        <p:txBody>
+          <a:bodyPr rtlCol="0" anchor="ctr"/>
+          <a:lstStyle/>
+          <a:p>
+            <a:pPr algn="ctr"/>
+          </a:p>
+        </p:txBody>
+      </p:sp>
+      <p:cxnSp>
+        <p:nvCxnSpPr>
+          <p:cNvPr id="9" name="Connector 8"/>
+          <p:cNvCxnSpPr/>
+          <p:nvPr/>
+        </p:nvCxnSpPr>
+        <p:spPr>
+          <a:xfrm>
+            <a:off x="11136800" y="428600"/>
+            <a:ext cx="371200" cy="0"/>
+          </a:xfrm>
+          <a:prstGeom prst="line">
+            <a:avLst/>
+          </a:prstGeom>
+          <a:ln w="38100">
+            <a:solidFill>
+              <a:srgbClr val="74A6FF"/>
+            </a:solidFill>
+          </a:ln>
+          <a:effectLst/>
+        </p:spPr>
+        <p:style>
+          <a:lnRef idx="2">
+            <a:schemeClr val="accent1"/>
+          </a:lnRef>
+          <a:fillRef idx="0">
+            <a:schemeClr val="accent1"/>
+          </a:fillRef>
+          <a:effectRef idx="1">
+            <a:schemeClr val="accent1"/>
+          </a:effectRef>
+          <a:fontRef idx="minor">
+            <a:schemeClr val="tx1"/>
+          </a:fontRef>
+        </p:style>
+      </p:cxnSp>
+      <p:sp>
+        <p:nvSpPr>
+          <p:cNvPr id="10" name="Oval 9"/>
+          <p:cNvSpPr/>
+          <p:nvPr/>
+        </p:nvSpPr>
+        <p:spPr>
+          <a:xfrm>
+            <a:off x="10996000" y="543800"/>
+            <a:ext cx="76800" cy="76800"/>
+          </a:xfrm>
+          <a:prstGeom prst="ellipse">
+            <a:avLst/>
+          </a:prstGeom>
+          <a:solidFill>
+            <a:srgbClr val="74A6FF"/>
+          </a:solidFill>
+          <a:ln w="6350">
+            <a:solidFill>
+              <a:srgbClr val="74A6FF"/>
+            </a:solidFill>
+          </a:ln>
+          <a:effectLst/>
+        </p:spPr>
+        <p:style>
+          <a:lnRef idx="1">
+            <a:schemeClr val="accent1"/>
+          </a:lnRef>
+          <a:fillRef idx="3">
+            <a:schemeClr val="accent1"/>
+          </a:fillRef>
+          <a:effectRef idx="2">
+            <a:schemeClr val="accent1"/>
+          </a:effectRef>
+          <a:fontRef idx="minor">
+            <a:schemeClr val="lt1"/>
+          </a:fontRef>
+        </p:style>
+        <p:txBody>
+          <a:bodyPr rtlCol="0" anchor="ctr"/>
+          <a:lstStyle/>
+          <a:p>
+            <a:pPr algn="ctr"/>
+          </a:p>
+        </p:txBody>
+      </p:sp>
+      <p:cxnSp>
+        <p:nvCxnSpPr>
+          <p:cNvPr id="11" name="Connector 10"/>
+          <p:cNvCxnSpPr/>
+          <p:nvPr/>
+        </p:nvCxnSpPr>
+        <p:spPr>
+          <a:xfrm>
+            <a:off x="11136800" y="582200"/>
+            <a:ext cx="371200" cy="0"/>
+          </a:xfrm>
+          <a:prstGeom prst="line">
+            <a:avLst/>
+          </a:prstGeom>
+          <a:ln w="38100">
+            <a:solidFill>
+              <a:srgbClr val="74A6FF"/>
+            </a:solidFill>
+          </a:ln>
+          <a:effectLst/>
+        </p:spPr>
+        <p:style>
+          <a:lnRef idx="2">
+            <a:schemeClr val="accent1"/>
+          </a:lnRef>
+          <a:fillRef idx="0">
+            <a:schemeClr val="accent1"/>
+          </a:fillRef>
+          <a:effectRef idx="1">
+            <a:schemeClr val="accent1"/>
+          </a:effectRef>
+          <a:fontRef idx="minor">
+            <a:schemeClr val="tx1"/>
+          </a:fontRef>
+        </p:style>
+      </p:cxnSp>
+      <p:sp>
+        <p:nvSpPr>
+          <p:cNvPr id="12" name="Oval 11"/>
+          <p:cNvSpPr/>
+          <p:nvPr/>
+        </p:nvSpPr>
+        <p:spPr>
+          <a:xfrm>
+            <a:off x="10996000" y="697400"/>
+            <a:ext cx="76800" cy="76800"/>
+          </a:xfrm>
+          <a:prstGeom prst="ellipse">
+            <a:avLst/>
+          </a:prstGeom>
+          <a:solidFill>
+            <a:srgbClr val="74A6FF"/>
+          </a:solidFill>
+          <a:ln w="6350">
+            <a:solidFill>
+              <a:srgbClr val="74A6FF"/>
+            </a:solidFill>
+          </a:ln>
+          <a:effectLst/>
+        </p:spPr>
+        <p:style>
+          <a:lnRef idx="1">
+            <a:schemeClr val="accent1"/>
+          </a:lnRef>
+          <a:fillRef idx="3">
+            <a:schemeClr val="accent1"/>
+          </a:fillRef>
+          <a:effectRef idx="2">
+            <a:schemeClr val="accent1"/>
+          </a:effectRef>
+          <a:fontRef idx="minor">
+            <a:schemeClr val="lt1"/>
+          </a:fontRef>
+        </p:style>
+        <p:txBody>
+          <a:bodyPr rtlCol="0" anchor="ctr"/>
+          <a:lstStyle/>
+          <a:p>
+            <a:pPr algn="ctr"/>
+          </a:p>
+        </p:txBody>
+      </p:sp>
+      <p:cxnSp>
+        <p:nvCxnSpPr>
+          <p:cNvPr id="13" name="Connector 12"/>
+          <p:cNvCxnSpPr/>
+          <p:nvPr/>
+        </p:nvCxnSpPr>
+        <p:spPr>
+          <a:xfrm>
+            <a:off x="11136800" y="735800"/>
+            <a:ext cx="371200" cy="0"/>
+          </a:xfrm>
+          <a:prstGeom prst="line">
+            <a:avLst/>
+          </a:prstGeom>
+          <a:ln w="38100">
+            <a:solidFill>
+              <a:srgbClr val="74A6FF"/>
+            </a:solidFill>
+          </a:ln>
+          <a:effectLst/>
+        </p:spPr>
+        <p:style>
+          <a:lnRef idx="2">
+            <a:schemeClr val="accent1"/>
+          </a:lnRef>
+          <a:fillRef idx="0">
+            <a:schemeClr val="accent1"/>
+          </a:fillRef>
+          <a:effectRef idx="1">
+            <a:schemeClr val="accent1"/>
+          </a:effectRef>
+          <a:fontRef idx="minor">
+            <a:schemeClr val="tx1"/>
+          </a:fontRef>
+        </p:style>
+      </p:cxnSp>
+      <p:sp>
+        <p:nvSpPr>
+          <p:cNvPr id="14" name="Oval 13"/>
+          <p:cNvSpPr/>
+          <p:nvPr/>
+        </p:nvSpPr>
+        <p:spPr>
+          <a:xfrm>
             <a:off x="620000" y="2900000"/>
             <a:ext cx="300000" cy="300000"/>
           </a:xfrm>
@@ -20286,7 +21969,7 @@
       </p:sp>
       <p:sp>
         <p:nvSpPr>
-          <p:cNvPr id="9" name="TextBox 8"/>
+          <p:cNvPr id="15" name="TextBox 14"/>
           <p:cNvSpPr txBox="1"/>
           <p:nvPr/>
         </p:nvSpPr>
@@ -20332,7 +22015,7 @@
       </p:sp>
       <p:sp>
         <p:nvSpPr>
-          <p:cNvPr id="10" name="Oval 9"/>
+          <p:cNvPr id="16" name="Oval 15"/>
           <p:cNvSpPr/>
           <p:nvPr/>
         </p:nvSpPr>
@@ -20398,7 +22081,7 @@
       </p:sp>
       <p:sp>
         <p:nvSpPr>
-          <p:cNvPr id="11" name="TextBox 10"/>
+          <p:cNvPr id="17" name="TextBox 16"/>
           <p:cNvSpPr txBox="1"/>
           <p:nvPr/>
         </p:nvSpPr>
@@ -20444,7 +22127,7 @@
       </p:sp>
       <p:sp>
         <p:nvSpPr>
-          <p:cNvPr id="12" name="Oval 11"/>
+          <p:cNvPr id="18" name="Oval 17"/>
           <p:cNvSpPr/>
           <p:nvPr/>
         </p:nvSpPr>
@@ -20510,7 +22193,7 @@
       </p:sp>
       <p:sp>
         <p:nvSpPr>
-          <p:cNvPr id="13" name="TextBox 12"/>
+          <p:cNvPr id="19" name="TextBox 18"/>
           <p:cNvSpPr txBox="1"/>
           <p:nvPr/>
         </p:nvSpPr>
@@ -20556,7 +22239,7 @@
       </p:sp>
       <p:sp>
         <p:nvSpPr>
-          <p:cNvPr id="14" name="Oval 13"/>
+          <p:cNvPr id="20" name="Oval 19"/>
           <p:cNvSpPr/>
           <p:nvPr/>
         </p:nvSpPr>
@@ -20622,7 +22305,7 @@
       </p:sp>
       <p:sp>
         <p:nvSpPr>
-          <p:cNvPr id="15" name="TextBox 14"/>
+          <p:cNvPr id="21" name="TextBox 20"/>
           <p:cNvSpPr txBox="1"/>
           <p:nvPr/>
         </p:nvSpPr>
@@ -20668,7 +22351,7 @@
       </p:sp>
       <p:sp>
         <p:nvSpPr>
-          <p:cNvPr id="16" name="Oval 15"/>
+          <p:cNvPr id="22" name="Oval 21"/>
           <p:cNvSpPr/>
           <p:nvPr/>
         </p:nvSpPr>
@@ -20734,7 +22417,7 @@
       </p:sp>
       <p:sp>
         <p:nvSpPr>
-          <p:cNvPr id="17" name="TextBox 16"/>
+          <p:cNvPr id="23" name="TextBox 22"/>
           <p:cNvSpPr txBox="1"/>
           <p:nvPr/>
         </p:nvSpPr>
@@ -20780,7 +22463,7 @@
       </p:sp>
       <p:sp>
         <p:nvSpPr>
-          <p:cNvPr id="18" name="Oval 17"/>
+          <p:cNvPr id="24" name="Oval 23"/>
           <p:cNvSpPr/>
           <p:nvPr/>
         </p:nvSpPr>
@@ -20846,7 +22529,7 @@
       </p:sp>
       <p:sp>
         <p:nvSpPr>
-          <p:cNvPr id="19" name="TextBox 18"/>
+          <p:cNvPr id="25" name="TextBox 24"/>
           <p:cNvSpPr txBox="1"/>
           <p:nvPr/>
         </p:nvSpPr>
@@ -20892,7 +22575,7 @@
       </p:sp>
       <p:sp>
         <p:nvSpPr>
-          <p:cNvPr id="20" name="Oval 19"/>
+          <p:cNvPr id="26" name="Oval 25"/>
           <p:cNvSpPr/>
           <p:nvPr/>
         </p:nvSpPr>
@@ -20958,7 +22641,7 @@
       </p:sp>
       <p:sp>
         <p:nvSpPr>
-          <p:cNvPr id="21" name="TextBox 20"/>
+          <p:cNvPr id="27" name="TextBox 26"/>
           <p:cNvSpPr txBox="1"/>
           <p:nvPr/>
         </p:nvSpPr>
@@ -21004,7 +22687,7 @@
       </p:sp>
       <p:sp>
         <p:nvSpPr>
-          <p:cNvPr id="22" name="Oval 21"/>
+          <p:cNvPr id="28" name="Oval 27"/>
           <p:cNvSpPr/>
           <p:nvPr/>
         </p:nvSpPr>
@@ -21070,7 +22753,7 @@
       </p:sp>
       <p:sp>
         <p:nvSpPr>
-          <p:cNvPr id="23" name="TextBox 22"/>
+          <p:cNvPr id="29" name="TextBox 28"/>
           <p:cNvSpPr txBox="1"/>
           <p:nvPr/>
         </p:nvSpPr>
@@ -21186,53 +22869,23 @@
       </p:sp>
       <p:sp>
         <p:nvSpPr>
-          <p:cNvPr id="3" name="Freeform 2"/>
+          <p:cNvPr id="3" name="Oval 2"/>
           <p:cNvSpPr/>
           <p:nvPr/>
         </p:nvSpPr>
         <p:spPr>
           <a:xfrm>
-            <a:off x="-163645" y="4308000"/>
-            <a:ext cx="2827290" cy="2756404"/>
-          </a:xfrm>
-          <a:custGeom>
-            <a:avLst/>
-            <a:gdLst/>
-            <a:ahLst/>
-            <a:cxnLst/>
-            <a:rect l="l" t="t" r="r" b="b"/>
-            <a:pathLst>
-              <a:path w="2827290" h="2756404">
-                <a:moveTo>
-                  <a:pt x="1413645" y="0"/>
-                </a:moveTo>
-                <a:lnTo>
-                  <a:pt x="2547300" y="545939"/>
-                </a:lnTo>
-                <a:lnTo>
-                  <a:pt x="2827290" y="1772655"/>
-                </a:lnTo>
-                <a:lnTo>
-                  <a:pt x="2042776" y="2756404"/>
-                </a:lnTo>
-                <a:lnTo>
-                  <a:pt x="784513" y="2756404"/>
-                </a:lnTo>
-                <a:lnTo>
-                  <a:pt x="0" y="1772655"/>
-                </a:lnTo>
-                <a:lnTo>
-                  <a:pt x="279989" y="545939"/>
-                </a:lnTo>
-                <a:close/>
-              </a:path>
-            </a:pathLst>
-          </a:custGeom>
-          <a:noFill/>
-          <a:ln w="31750">
-            <a:solidFill>
-              <a:srgbClr val="26354E"/>
-            </a:solidFill>
+            <a:off x="-1400000" y="4358000"/>
+            <a:ext cx="3800000" cy="3800000"/>
+          </a:xfrm>
+          <a:prstGeom prst="ellipse">
+            <a:avLst/>
+          </a:prstGeom>
+          <a:solidFill>
+            <a:srgbClr val="0B1220"/>
+          </a:solidFill>
+          <a:ln>
+            <a:noFill/>
           </a:ln>
           <a:effectLst/>
         </p:spPr>
@@ -21258,9 +22911,33 @@
           </a:p>
         </p:txBody>
       </p:sp>
-      <p:sp>
-        <p:nvSpPr>
-          <p:cNvPr id="4" name="TextBox 3"/>
+      <p:pic>
+        <p:nvPicPr>
+          <p:cNvPr id="4" name="Picture 3" descr="kubernetes.png"/>
+          <p:cNvPicPr>
+            <a:picLocks noChangeAspect="1"/>
+          </p:cNvPicPr>
+          <p:nvPr/>
+        </p:nvPicPr>
+        <p:blipFill>
+          <a:blip r:embed="rId2"/>
+          <a:stretch>
+            <a:fillRect/>
+          </a:stretch>
+        </p:blipFill>
+        <p:spPr>
+          <a:xfrm>
+            <a:off x="9542000" y="900000"/>
+            <a:ext cx="1650000" cy="1650000"/>
+          </a:xfrm>
+          <a:prstGeom prst="rect">
+            <a:avLst/>
+          </a:prstGeom>
+        </p:spPr>
+      </p:pic>
+      <p:sp>
+        <p:nvSpPr>
+          <p:cNvPr id="5" name="TextBox 4"/>
           <p:cNvSpPr txBox="1"/>
           <p:nvPr/>
         </p:nvSpPr>
@@ -21306,14 +22983,14 @@
       </p:sp>
       <p:sp>
         <p:nvSpPr>
-          <p:cNvPr id="5" name="TextBox 4"/>
+          <p:cNvPr id="6" name="TextBox 5"/>
           <p:cNvSpPr txBox="1"/>
           <p:nvPr/>
         </p:nvSpPr>
         <p:spPr>
           <a:xfrm>
-            <a:off x="640000" y="1500000"/>
-            <a:ext cx="10000000" cy="900000"/>
+            <a:off x="640000" y="1560000"/>
+            <a:ext cx="9200000" cy="900000"/>
           </a:xfrm>
           <a:prstGeom prst="rect">
             <a:avLst/>
@@ -21339,7 +23016,7 @@
               <a:buNone/>
             </a:pPr>
             <a:r>
-              <a:rPr sz="4600" b="0" i="0">
+              <a:rPr sz="4400" b="0" i="0">
                 <a:solidFill>
                   <a:srgbClr val="F3F6FC"/>
                 </a:solidFill>
@@ -21352,7 +23029,7 @@
       </p:sp>
       <p:sp>
         <p:nvSpPr>
-          <p:cNvPr id="6" name="Rectangle 5"/>
+          <p:cNvPr id="7" name="Rectangle 6"/>
           <p:cNvSpPr/>
           <p:nvPr/>
         </p:nvSpPr>
@@ -21398,7 +23075,7 @@
       </p:sp>
       <p:sp>
         <p:nvSpPr>
-          <p:cNvPr id="7" name="TextBox 6"/>
+          <p:cNvPr id="8" name="TextBox 7"/>
           <p:cNvSpPr txBox="1"/>
           <p:nvPr/>
         </p:nvSpPr>
@@ -21490,7 +23167,7 @@
       </p:sp>
       <p:sp>
         <p:nvSpPr>
-          <p:cNvPr id="8" name="Rectangle 7"/>
+          <p:cNvPr id="9" name="Rectangle 8"/>
           <p:cNvSpPr/>
           <p:nvPr/>
         </p:nvSpPr>
@@ -21536,7 +23213,7 @@
       </p:sp>
       <p:sp>
         <p:nvSpPr>
-          <p:cNvPr id="9" name="TextBox 8"/>
+          <p:cNvPr id="10" name="TextBox 9"/>
           <p:cNvSpPr txBox="1"/>
           <p:nvPr/>
         </p:nvSpPr>
@@ -21582,7 +23259,7 @@
       </p:sp>
       <p:sp>
         <p:nvSpPr>
-          <p:cNvPr id="10" name="TextBox 9"/>
+          <p:cNvPr id="11" name="TextBox 10"/>
           <p:cNvSpPr txBox="1"/>
           <p:nvPr/>
         </p:nvSpPr>
@@ -21707,7 +23384,7 @@
         <p:spPr>
           <a:xfrm>
             <a:off x="620000" y="560000"/>
-            <a:ext cx="10952000" cy="620000"/>
+            <a:ext cx="10052000" cy="620000"/>
           </a:xfrm>
           <a:prstGeom prst="rect">
             <a:avLst/>
@@ -21930,7 +23607,123 @@
       </p:sp>
       <p:sp>
         <p:nvSpPr>
-          <p:cNvPr id="8" name="TextBox 7"/>
+          <p:cNvPr id="8" name="Oval 7"/>
+          <p:cNvSpPr/>
+          <p:nvPr/>
+        </p:nvSpPr>
+        <p:spPr>
+          <a:xfrm>
+            <a:off x="10983200" y="326200"/>
+            <a:ext cx="537600" cy="537600"/>
+          </a:xfrm>
+          <a:prstGeom prst="ellipse">
+            <a:avLst/>
+          </a:prstGeom>
+          <a:noFill/>
+          <a:ln w="38100">
+            <a:solidFill>
+              <a:srgbClr val="74A6FF"/>
+            </a:solidFill>
+          </a:ln>
+          <a:effectLst/>
+        </p:spPr>
+        <p:style>
+          <a:lnRef idx="1">
+            <a:schemeClr val="accent1"/>
+          </a:lnRef>
+          <a:fillRef idx="3">
+            <a:schemeClr val="accent1"/>
+          </a:fillRef>
+          <a:effectRef idx="2">
+            <a:schemeClr val="accent1"/>
+          </a:effectRef>
+          <a:fontRef idx="minor">
+            <a:schemeClr val="lt1"/>
+          </a:fontRef>
+        </p:style>
+        <p:txBody>
+          <a:bodyPr rtlCol="0" anchor="ctr"/>
+          <a:lstStyle/>
+          <a:p>
+            <a:pPr algn="ctr"/>
+          </a:p>
+        </p:txBody>
+      </p:sp>
+      <p:cxnSp>
+        <p:nvCxnSpPr>
+          <p:cNvPr id="9" name="Connector 8"/>
+          <p:cNvCxnSpPr/>
+          <p:nvPr/>
+        </p:nvCxnSpPr>
+        <p:spPr>
+          <a:xfrm flipV="1">
+            <a:off x="11252000" y="415800"/>
+            <a:ext cx="0" cy="179200"/>
+          </a:xfrm>
+          <a:prstGeom prst="line">
+            <a:avLst/>
+          </a:prstGeom>
+          <a:ln w="38100">
+            <a:solidFill>
+              <a:srgbClr val="74A6FF"/>
+            </a:solidFill>
+          </a:ln>
+          <a:effectLst/>
+        </p:spPr>
+        <p:style>
+          <a:lnRef idx="2">
+            <a:schemeClr val="accent1"/>
+          </a:lnRef>
+          <a:fillRef idx="0">
+            <a:schemeClr val="accent1"/>
+          </a:fillRef>
+          <a:effectRef idx="1">
+            <a:schemeClr val="accent1"/>
+          </a:effectRef>
+          <a:fontRef idx="minor">
+            <a:schemeClr val="tx1"/>
+          </a:fontRef>
+        </p:style>
+      </p:cxnSp>
+      <p:cxnSp>
+        <p:nvCxnSpPr>
+          <p:cNvPr id="10" name="Connector 9"/>
+          <p:cNvCxnSpPr/>
+          <p:nvPr/>
+        </p:nvCxnSpPr>
+        <p:spPr>
+          <a:xfrm>
+            <a:off x="11252000" y="595000"/>
+            <a:ext cx="128000" cy="51200"/>
+          </a:xfrm>
+          <a:prstGeom prst="line">
+            <a:avLst/>
+          </a:prstGeom>
+          <a:ln w="38100">
+            <a:solidFill>
+              <a:srgbClr val="74A6FF"/>
+            </a:solidFill>
+          </a:ln>
+          <a:effectLst/>
+        </p:spPr>
+        <p:style>
+          <a:lnRef idx="2">
+            <a:schemeClr val="accent1"/>
+          </a:lnRef>
+          <a:fillRef idx="0">
+            <a:schemeClr val="accent1"/>
+          </a:fillRef>
+          <a:effectRef idx="1">
+            <a:schemeClr val="accent1"/>
+          </a:effectRef>
+          <a:fontRef idx="minor">
+            <a:schemeClr val="tx1"/>
+          </a:fontRef>
+        </p:style>
+      </p:cxnSp>
+      <p:sp>
+        <p:nvSpPr>
+          <p:cNvPr id="11" name="TextBox 10"/>
           <p:cNvSpPr txBox="1"/>
           <p:nvPr/>
         </p:nvSpPr>
@@ -21976,7 +23769,7 @@
       </p:sp>
       <p:sp>
         <p:nvSpPr>
-          <p:cNvPr id="9" name="Rectangle 8"/>
+          <p:cNvPr id="12" name="Rectangle 11"/>
           <p:cNvSpPr/>
           <p:nvPr/>
         </p:nvSpPr>
@@ -22022,7 +23815,7 @@
       </p:sp>
       <p:sp>
         <p:nvSpPr>
-          <p:cNvPr id="10" name="TextBox 9"/>
+          <p:cNvPr id="13" name="TextBox 12"/>
           <p:cNvSpPr txBox="1"/>
           <p:nvPr/>
         </p:nvSpPr>
@@ -22068,7 +23861,7 @@
       </p:sp>
       <p:sp>
         <p:nvSpPr>
-          <p:cNvPr id="11" name="TextBox 10"/>
+          <p:cNvPr id="14" name="TextBox 13"/>
           <p:cNvSpPr txBox="1"/>
           <p:nvPr/>
         </p:nvSpPr>
@@ -22114,7 +23907,7 @@
       </p:sp>
       <p:sp>
         <p:nvSpPr>
-          <p:cNvPr id="12" name="Rectangle 11"/>
+          <p:cNvPr id="15" name="Rectangle 14"/>
           <p:cNvSpPr/>
           <p:nvPr/>
         </p:nvSpPr>
@@ -22160,7 +23953,7 @@
       </p:sp>
       <p:sp>
         <p:nvSpPr>
-          <p:cNvPr id="13" name="TextBox 12"/>
+          <p:cNvPr id="16" name="TextBox 15"/>
           <p:cNvSpPr txBox="1"/>
           <p:nvPr/>
         </p:nvSpPr>
@@ -22206,7 +23999,7 @@
       </p:sp>
       <p:sp>
         <p:nvSpPr>
-          <p:cNvPr id="14" name="Rounded Rectangle 13"/>
+          <p:cNvPr id="17" name="Rounded Rectangle 16"/>
           <p:cNvSpPr/>
           <p:nvPr/>
         </p:nvSpPr>
@@ -22254,7 +24047,7 @@
       </p:sp>
       <p:sp>
         <p:nvSpPr>
-          <p:cNvPr id="15" name="TextBox 14"/>
+          <p:cNvPr id="18" name="TextBox 17"/>
           <p:cNvSpPr txBox="1"/>
           <p:nvPr/>
         </p:nvSpPr>
@@ -22300,7 +24093,7 @@
       </p:sp>
       <p:sp>
         <p:nvSpPr>
-          <p:cNvPr id="16" name="Rectangle 15"/>
+          <p:cNvPr id="19" name="Rectangle 18"/>
           <p:cNvSpPr/>
           <p:nvPr/>
         </p:nvSpPr>
@@ -22346,7 +24139,7 @@
       </p:sp>
       <p:sp>
         <p:nvSpPr>
-          <p:cNvPr id="17" name="TextBox 16"/>
+          <p:cNvPr id="20" name="TextBox 19"/>
           <p:cNvSpPr txBox="1"/>
           <p:nvPr/>
         </p:nvSpPr>
@@ -22392,7 +24185,7 @@
       </p:sp>
       <p:sp>
         <p:nvSpPr>
-          <p:cNvPr id="18" name="Rounded Rectangle 17"/>
+          <p:cNvPr id="21" name="Rounded Rectangle 20"/>
           <p:cNvSpPr/>
           <p:nvPr/>
         </p:nvSpPr>
@@ -22440,7 +24233,7 @@
       </p:sp>
       <p:sp>
         <p:nvSpPr>
-          <p:cNvPr id="19" name="TextBox 18"/>
+          <p:cNvPr id="22" name="TextBox 21"/>
           <p:cNvSpPr txBox="1"/>
           <p:nvPr/>
         </p:nvSpPr>
@@ -22486,7 +24279,7 @@
       </p:sp>
       <p:sp>
         <p:nvSpPr>
-          <p:cNvPr id="20" name="Rectangle 19"/>
+          <p:cNvPr id="23" name="Rectangle 22"/>
           <p:cNvSpPr/>
           <p:nvPr/>
         </p:nvSpPr>
@@ -22532,7 +24325,7 @@
       </p:sp>
       <p:sp>
         <p:nvSpPr>
-          <p:cNvPr id="21" name="TextBox 20"/>
+          <p:cNvPr id="24" name="TextBox 23"/>
           <p:cNvSpPr txBox="1"/>
           <p:nvPr/>
         </p:nvSpPr>
@@ -22578,7 +24371,7 @@
       </p:sp>
       <p:sp>
         <p:nvSpPr>
-          <p:cNvPr id="22" name="Rounded Rectangle 21"/>
+          <p:cNvPr id="25" name="Rounded Rectangle 24"/>
           <p:cNvSpPr/>
           <p:nvPr/>
         </p:nvSpPr>
@@ -22626,7 +24419,7 @@
       </p:sp>
       <p:sp>
         <p:nvSpPr>
-          <p:cNvPr id="23" name="TextBox 22"/>
+          <p:cNvPr id="26" name="TextBox 25"/>
           <p:cNvSpPr txBox="1"/>
           <p:nvPr/>
         </p:nvSpPr>
@@ -22672,7 +24465,7 @@
       </p:sp>
       <p:sp>
         <p:nvSpPr>
-          <p:cNvPr id="24" name="Rectangle 23"/>
+          <p:cNvPr id="27" name="Rectangle 26"/>
           <p:cNvSpPr/>
           <p:nvPr/>
         </p:nvSpPr>
@@ -22718,7 +24511,7 @@
       </p:sp>
       <p:sp>
         <p:nvSpPr>
-          <p:cNvPr id="25" name="TextBox 24"/>
+          <p:cNvPr id="28" name="TextBox 27"/>
           <p:cNvSpPr txBox="1"/>
           <p:nvPr/>
         </p:nvSpPr>
@@ -22764,7 +24557,7 @@
       </p:sp>
       <p:sp>
         <p:nvSpPr>
-          <p:cNvPr id="26" name="Rounded Rectangle 25"/>
+          <p:cNvPr id="29" name="Rounded Rectangle 28"/>
           <p:cNvSpPr/>
           <p:nvPr/>
         </p:nvSpPr>
@@ -22812,7 +24605,7 @@
       </p:sp>
       <p:sp>
         <p:nvSpPr>
-          <p:cNvPr id="27" name="TextBox 26"/>
+          <p:cNvPr id="30" name="TextBox 29"/>
           <p:cNvSpPr txBox="1"/>
           <p:nvPr/>
         </p:nvSpPr>
@@ -22858,7 +24651,7 @@
       </p:sp>
       <p:sp>
         <p:nvSpPr>
-          <p:cNvPr id="28" name="Rectangle 27"/>
+          <p:cNvPr id="31" name="Rectangle 30"/>
           <p:cNvSpPr/>
           <p:nvPr/>
         </p:nvSpPr>
@@ -22904,7 +24697,7 @@
       </p:sp>
       <p:sp>
         <p:nvSpPr>
-          <p:cNvPr id="29" name="TextBox 28"/>
+          <p:cNvPr id="32" name="TextBox 31"/>
           <p:cNvSpPr txBox="1"/>
           <p:nvPr/>
         </p:nvSpPr>
@@ -22950,7 +24743,7 @@
       </p:sp>
       <p:sp>
         <p:nvSpPr>
-          <p:cNvPr id="30" name="Rounded Rectangle 29"/>
+          <p:cNvPr id="33" name="Rounded Rectangle 32"/>
           <p:cNvSpPr/>
           <p:nvPr/>
         </p:nvSpPr>
@@ -22998,7 +24791,7 @@
       </p:sp>
       <p:sp>
         <p:nvSpPr>
-          <p:cNvPr id="31" name="TextBox 30"/>
+          <p:cNvPr id="34" name="TextBox 33"/>
           <p:cNvSpPr txBox="1"/>
           <p:nvPr/>
         </p:nvSpPr>
@@ -23044,7 +24837,7 @@
       </p:sp>
       <p:sp>
         <p:nvSpPr>
-          <p:cNvPr id="32" name="Rectangle 31"/>
+          <p:cNvPr id="35" name="Rectangle 34"/>
           <p:cNvSpPr/>
           <p:nvPr/>
         </p:nvSpPr>
@@ -23090,7 +24883,7 @@
       </p:sp>
       <p:sp>
         <p:nvSpPr>
-          <p:cNvPr id="33" name="TextBox 32"/>
+          <p:cNvPr id="36" name="TextBox 35"/>
           <p:cNvSpPr txBox="1"/>
           <p:nvPr/>
         </p:nvSpPr>
@@ -23136,7 +24929,7 @@
       </p:sp>
       <p:sp>
         <p:nvSpPr>
-          <p:cNvPr id="34" name="TextBox 33"/>
+          <p:cNvPr id="37" name="TextBox 36"/>
           <p:cNvSpPr txBox="1"/>
           <p:nvPr/>
         </p:nvSpPr>
@@ -23182,7 +24975,7 @@
       </p:sp>
       <p:sp>
         <p:nvSpPr>
-          <p:cNvPr id="35" name="Rectangle 34"/>
+          <p:cNvPr id="38" name="Rectangle 37"/>
           <p:cNvSpPr/>
           <p:nvPr/>
         </p:nvSpPr>
@@ -23228,7 +25021,7 @@
       </p:sp>
       <p:sp>
         <p:nvSpPr>
-          <p:cNvPr id="36" name="TextBox 35"/>
+          <p:cNvPr id="39" name="TextBox 38"/>
           <p:cNvSpPr txBox="1"/>
           <p:nvPr/>
         </p:nvSpPr>
@@ -23274,7 +25067,7 @@
       </p:sp>
       <p:sp>
         <p:nvSpPr>
-          <p:cNvPr id="37" name="TextBox 36"/>
+          <p:cNvPr id="40" name="TextBox 39"/>
           <p:cNvSpPr txBox="1"/>
           <p:nvPr/>
         </p:nvSpPr>
@@ -23320,7 +25113,7 @@
       </p:sp>
       <p:sp>
         <p:nvSpPr>
-          <p:cNvPr id="38" name="Rectangle 37"/>
+          <p:cNvPr id="41" name="Rectangle 40"/>
           <p:cNvSpPr/>
           <p:nvPr/>
         </p:nvSpPr>
@@ -23366,7 +25159,7 @@
       </p:sp>
       <p:sp>
         <p:nvSpPr>
-          <p:cNvPr id="39" name="TextBox 38"/>
+          <p:cNvPr id="42" name="TextBox 41"/>
           <p:cNvSpPr txBox="1"/>
           <p:nvPr/>
         </p:nvSpPr>
@@ -23482,52 +25275,22 @@
       </p:sp>
       <p:sp>
         <p:nvSpPr>
-          <p:cNvPr id="3" name="Freeform 2"/>
+          <p:cNvPr id="3" name="Oval 2"/>
           <p:cNvSpPr/>
           <p:nvPr/>
         </p:nvSpPr>
         <p:spPr>
           <a:xfrm>
-            <a:off x="9479608" y="4208000"/>
-            <a:ext cx="2924783" cy="2851453"/>
-          </a:xfrm>
-          <a:custGeom>
-            <a:avLst/>
-            <a:gdLst/>
-            <a:ahLst/>
-            <a:cxnLst/>
-            <a:rect l="l" t="t" r="r" b="b"/>
-            <a:pathLst>
-              <a:path w="2924783" h="2851453">
-                <a:moveTo>
-                  <a:pt x="1462392" y="0"/>
-                </a:moveTo>
-                <a:lnTo>
-                  <a:pt x="2635139" y="564765"/>
-                </a:lnTo>
-                <a:lnTo>
-                  <a:pt x="2924783" y="1833781"/>
-                </a:lnTo>
-                <a:lnTo>
-                  <a:pt x="2113217" y="2851453"/>
-                </a:lnTo>
-                <a:lnTo>
-                  <a:pt x="811566" y="2851453"/>
-                </a:lnTo>
-                <a:lnTo>
-                  <a:pt x="0" y="1833781"/>
-                </a:lnTo>
-                <a:lnTo>
-                  <a:pt x="289644" y="564765"/>
-                </a:lnTo>
-                <a:close/>
-              </a:path>
-            </a:pathLst>
-          </a:custGeom>
+            <a:off x="9022000" y="2330000"/>
+            <a:ext cx="1080000" cy="1080000"/>
+          </a:xfrm>
+          <a:prstGeom prst="ellipse">
+            <a:avLst/>
+          </a:prstGeom>
           <a:noFill/>
-          <a:ln w="31750">
+          <a:ln w="30480">
             <a:solidFill>
-              <a:srgbClr val="26354E"/>
+              <a:srgbClr val="74A6FF"/>
             </a:solidFill>
           </a:ln>
           <a:effectLst/>
@@ -23554,9 +25317,45 @@
           </a:p>
         </p:txBody>
       </p:sp>
-      <p:sp>
-        <p:nvSpPr>
-          <p:cNvPr id="4" name="TextBox 3"/>
+      <p:cxnSp>
+        <p:nvCxnSpPr>
+          <p:cNvPr id="4" name="Connector 3"/>
+          <p:cNvCxnSpPr/>
+          <p:nvPr/>
+        </p:nvCxnSpPr>
+        <p:spPr>
+          <a:xfrm>
+            <a:off x="9958000" y="3266000"/>
+            <a:ext cx="540000" cy="540000"/>
+          </a:xfrm>
+          <a:prstGeom prst="line">
+            <a:avLst/>
+          </a:prstGeom>
+          <a:ln w="48768">
+            <a:solidFill>
+              <a:srgbClr val="74A6FF"/>
+            </a:solidFill>
+          </a:ln>
+          <a:effectLst/>
+        </p:spPr>
+        <p:style>
+          <a:lnRef idx="2">
+            <a:schemeClr val="accent1"/>
+          </a:lnRef>
+          <a:fillRef idx="0">
+            <a:schemeClr val="accent1"/>
+          </a:fillRef>
+          <a:effectRef idx="1">
+            <a:schemeClr val="accent1"/>
+          </a:effectRef>
+          <a:fontRef idx="minor">
+            <a:schemeClr val="tx1"/>
+          </a:fontRef>
+        </p:style>
+      </p:cxnSp>
+      <p:sp>
+        <p:nvSpPr>
+          <p:cNvPr id="5" name="TextBox 4"/>
           <p:cNvSpPr txBox="1"/>
           <p:nvPr/>
         </p:nvSpPr>
@@ -23602,7 +25401,7 @@
       </p:sp>
       <p:sp>
         <p:nvSpPr>
-          <p:cNvPr id="5" name="TextBox 4"/>
+          <p:cNvPr id="6" name="TextBox 5"/>
           <p:cNvSpPr txBox="1"/>
           <p:nvPr/>
         </p:nvSpPr>
@@ -23648,7 +25447,7 @@
       </p:sp>
       <p:sp>
         <p:nvSpPr>
-          <p:cNvPr id="6" name="TextBox 5"/>
+          <p:cNvPr id="7" name="TextBox 6"/>
           <p:cNvSpPr txBox="1"/>
           <p:nvPr/>
         </p:nvSpPr>
@@ -23694,7 +25493,7 @@
       </p:sp>
       <p:sp>
         <p:nvSpPr>
-          <p:cNvPr id="7" name="Rectangle 6"/>
+          <p:cNvPr id="8" name="Rectangle 7"/>
           <p:cNvSpPr/>
           <p:nvPr/>
         </p:nvSpPr>
@@ -23740,7 +25539,7 @@
       </p:sp>
       <p:sp>
         <p:nvSpPr>
-          <p:cNvPr id="8" name="TextBox 7"/>
+          <p:cNvPr id="9" name="TextBox 8"/>
           <p:cNvSpPr txBox="1"/>
           <p:nvPr/>
         </p:nvSpPr>
@@ -23786,7 +25585,7 @@
       </p:sp>
       <p:sp>
         <p:nvSpPr>
-          <p:cNvPr id="9" name="Rectangle 8"/>
+          <p:cNvPr id="10" name="Rectangle 9"/>
           <p:cNvSpPr/>
           <p:nvPr/>
         </p:nvSpPr>
@@ -23832,7 +25631,7 @@
       </p:sp>
       <p:sp>
         <p:nvSpPr>
-          <p:cNvPr id="10" name="TextBox 9"/>
+          <p:cNvPr id="11" name="TextBox 10"/>
           <p:cNvSpPr txBox="1"/>
           <p:nvPr/>
         </p:nvSpPr>
@@ -23878,7 +25677,7 @@
       </p:sp>
       <p:sp>
         <p:nvSpPr>
-          <p:cNvPr id="11" name="TextBox 10"/>
+          <p:cNvPr id="12" name="TextBox 11"/>
           <p:cNvSpPr txBox="1"/>
           <p:nvPr/>
         </p:nvSpPr>
@@ -24003,7 +25802,7 @@
         <p:spPr>
           <a:xfrm>
             <a:off x="620000" y="560000"/>
-            <a:ext cx="10952000" cy="620000"/>
+            <a:ext cx="10052000" cy="620000"/>
           </a:xfrm>
           <a:prstGeom prst="rect">
             <a:avLst/>
@@ -24226,7 +26025,87 @@
       </p:sp>
       <p:sp>
         <p:nvSpPr>
-          <p:cNvPr id="8" name="Rounded Rectangle 7"/>
+          <p:cNvPr id="8" name="Oval 7"/>
+          <p:cNvSpPr/>
+          <p:nvPr/>
+        </p:nvSpPr>
+        <p:spPr>
+          <a:xfrm>
+            <a:off x="10996000" y="339000"/>
+            <a:ext cx="384000" cy="384000"/>
+          </a:xfrm>
+          <a:prstGeom prst="ellipse">
+            <a:avLst/>
+          </a:prstGeom>
+          <a:noFill/>
+          <a:ln w="38100">
+            <a:solidFill>
+              <a:srgbClr val="74A6FF"/>
+            </a:solidFill>
+          </a:ln>
+          <a:effectLst/>
+        </p:spPr>
+        <p:style>
+          <a:lnRef idx="1">
+            <a:schemeClr val="accent1"/>
+          </a:lnRef>
+          <a:fillRef idx="3">
+            <a:schemeClr val="accent1"/>
+          </a:fillRef>
+          <a:effectRef idx="2">
+            <a:schemeClr val="accent1"/>
+          </a:effectRef>
+          <a:fontRef idx="minor">
+            <a:schemeClr val="lt1"/>
+          </a:fontRef>
+        </p:style>
+        <p:txBody>
+          <a:bodyPr rtlCol="0" anchor="ctr"/>
+          <a:lstStyle/>
+          <a:p>
+            <a:pPr algn="ctr"/>
+          </a:p>
+        </p:txBody>
+      </p:sp>
+      <p:cxnSp>
+        <p:nvCxnSpPr>
+          <p:cNvPr id="9" name="Connector 8"/>
+          <p:cNvCxnSpPr/>
+          <p:nvPr/>
+        </p:nvCxnSpPr>
+        <p:spPr>
+          <a:xfrm>
+            <a:off x="11328800" y="671800"/>
+            <a:ext cx="192000" cy="192000"/>
+          </a:xfrm>
+          <a:prstGeom prst="line">
+            <a:avLst/>
+          </a:prstGeom>
+          <a:ln w="60960">
+            <a:solidFill>
+              <a:srgbClr val="74A6FF"/>
+            </a:solidFill>
+          </a:ln>
+          <a:effectLst/>
+        </p:spPr>
+        <p:style>
+          <a:lnRef idx="2">
+            <a:schemeClr val="accent1"/>
+          </a:lnRef>
+          <a:fillRef idx="0">
+            <a:schemeClr val="accent1"/>
+          </a:fillRef>
+          <a:effectRef idx="1">
+            <a:schemeClr val="accent1"/>
+          </a:effectRef>
+          <a:fontRef idx="minor">
+            <a:schemeClr val="tx1"/>
+          </a:fontRef>
+        </p:style>
+      </p:cxnSp>
+      <p:sp>
+        <p:nvSpPr>
+          <p:cNvPr id="10" name="Rounded Rectangle 9"/>
           <p:cNvSpPr/>
           <p:nvPr/>
         </p:nvSpPr>
@@ -24276,7 +26155,7 @@
       </p:sp>
       <p:sp>
         <p:nvSpPr>
-          <p:cNvPr id="9" name="Oval 8"/>
+          <p:cNvPr id="11" name="Oval 10"/>
           <p:cNvSpPr/>
           <p:nvPr/>
         </p:nvSpPr>
@@ -24342,7 +26221,7 @@
       </p:sp>
       <p:sp>
         <p:nvSpPr>
-          <p:cNvPr id="10" name="TextBox 9"/>
+          <p:cNvPr id="12" name="TextBox 11"/>
           <p:cNvSpPr txBox="1"/>
           <p:nvPr/>
         </p:nvSpPr>
@@ -24388,7 +26267,7 @@
       </p:sp>
       <p:sp>
         <p:nvSpPr>
-          <p:cNvPr id="11" name="Rectangle 10"/>
+          <p:cNvPr id="13" name="Rectangle 12"/>
           <p:cNvSpPr/>
           <p:nvPr/>
         </p:nvSpPr>
@@ -24434,7 +26313,7 @@
       </p:sp>
       <p:sp>
         <p:nvSpPr>
-          <p:cNvPr id="12" name="TextBox 11"/>
+          <p:cNvPr id="14" name="TextBox 13"/>
           <p:cNvSpPr txBox="1"/>
           <p:nvPr/>
         </p:nvSpPr>
@@ -24480,7 +26359,7 @@
       </p:sp>
       <p:sp>
         <p:nvSpPr>
-          <p:cNvPr id="13" name="TextBox 12"/>
+          <p:cNvPr id="15" name="TextBox 14"/>
           <p:cNvSpPr txBox="1"/>
           <p:nvPr/>
         </p:nvSpPr>
@@ -24526,7 +26405,7 @@
       </p:sp>
       <p:sp>
         <p:nvSpPr>
-          <p:cNvPr id="14" name="Rounded Rectangle 13"/>
+          <p:cNvPr id="16" name="Rounded Rectangle 15"/>
           <p:cNvSpPr/>
           <p:nvPr/>
         </p:nvSpPr>
@@ -24576,7 +26455,7 @@
       </p:sp>
       <p:sp>
         <p:nvSpPr>
-          <p:cNvPr id="15" name="Oval 14"/>
+          <p:cNvPr id="17" name="Oval 16"/>
           <p:cNvSpPr/>
           <p:nvPr/>
         </p:nvSpPr>
@@ -24642,7 +26521,7 @@
       </p:sp>
       <p:sp>
         <p:nvSpPr>
-          <p:cNvPr id="16" name="TextBox 15"/>
+          <p:cNvPr id="18" name="TextBox 17"/>
           <p:cNvSpPr txBox="1"/>
           <p:nvPr/>
         </p:nvSpPr>
@@ -24688,7 +26567,7 @@
       </p:sp>
       <p:sp>
         <p:nvSpPr>
-          <p:cNvPr id="17" name="Rectangle 16"/>
+          <p:cNvPr id="19" name="Rectangle 18"/>
           <p:cNvSpPr/>
           <p:nvPr/>
         </p:nvSpPr>
@@ -24734,7 +26613,7 @@
       </p:sp>
       <p:sp>
         <p:nvSpPr>
-          <p:cNvPr id="18" name="TextBox 17"/>
+          <p:cNvPr id="20" name="TextBox 19"/>
           <p:cNvSpPr txBox="1"/>
           <p:nvPr/>
         </p:nvSpPr>
@@ -24780,7 +26659,7 @@
       </p:sp>
       <p:sp>
         <p:nvSpPr>
-          <p:cNvPr id="19" name="TextBox 18"/>
+          <p:cNvPr id="21" name="TextBox 20"/>
           <p:cNvSpPr txBox="1"/>
           <p:nvPr/>
         </p:nvSpPr>
@@ -24826,7 +26705,7 @@
       </p:sp>
       <p:sp>
         <p:nvSpPr>
-          <p:cNvPr id="20" name="Rounded Rectangle 19"/>
+          <p:cNvPr id="22" name="Rounded Rectangle 21"/>
           <p:cNvSpPr/>
           <p:nvPr/>
         </p:nvSpPr>
@@ -24876,7 +26755,7 @@
       </p:sp>
       <p:sp>
         <p:nvSpPr>
-          <p:cNvPr id="21" name="Oval 20"/>
+          <p:cNvPr id="23" name="Oval 22"/>
           <p:cNvSpPr/>
           <p:nvPr/>
         </p:nvSpPr>
@@ -24942,7 +26821,7 @@
       </p:sp>
       <p:sp>
         <p:nvSpPr>
-          <p:cNvPr id="22" name="TextBox 21"/>
+          <p:cNvPr id="24" name="TextBox 23"/>
           <p:cNvSpPr txBox="1"/>
           <p:nvPr/>
         </p:nvSpPr>
@@ -24988,7 +26867,7 @@
       </p:sp>
       <p:sp>
         <p:nvSpPr>
-          <p:cNvPr id="23" name="Rectangle 22"/>
+          <p:cNvPr id="25" name="Rectangle 24"/>
           <p:cNvSpPr/>
           <p:nvPr/>
         </p:nvSpPr>
@@ -25034,7 +26913,7 @@
       </p:sp>
       <p:sp>
         <p:nvSpPr>
-          <p:cNvPr id="24" name="TextBox 23"/>
+          <p:cNvPr id="26" name="TextBox 25"/>
           <p:cNvSpPr txBox="1"/>
           <p:nvPr/>
         </p:nvSpPr>
@@ -25080,7 +26959,7 @@
       </p:sp>
       <p:sp>
         <p:nvSpPr>
-          <p:cNvPr id="25" name="TextBox 24"/>
+          <p:cNvPr id="27" name="TextBox 26"/>
           <p:cNvSpPr txBox="1"/>
           <p:nvPr/>
         </p:nvSpPr>
@@ -25126,7 +27005,7 @@
       </p:sp>
       <p:sp>
         <p:nvSpPr>
-          <p:cNvPr id="26" name="Rounded Rectangle 25"/>
+          <p:cNvPr id="28" name="Rounded Rectangle 27"/>
           <p:cNvSpPr/>
           <p:nvPr/>
         </p:nvSpPr>
@@ -25176,7 +27055,7 @@
       </p:sp>
       <p:sp>
         <p:nvSpPr>
-          <p:cNvPr id="27" name="Oval 26"/>
+          <p:cNvPr id="29" name="Oval 28"/>
           <p:cNvSpPr/>
           <p:nvPr/>
         </p:nvSpPr>
@@ -25242,7 +27121,7 @@
       </p:sp>
       <p:sp>
         <p:nvSpPr>
-          <p:cNvPr id="28" name="TextBox 27"/>
+          <p:cNvPr id="30" name="TextBox 29"/>
           <p:cNvSpPr txBox="1"/>
           <p:nvPr/>
         </p:nvSpPr>
@@ -25288,7 +27167,7 @@
       </p:sp>
       <p:sp>
         <p:nvSpPr>
-          <p:cNvPr id="29" name="Rectangle 28"/>
+          <p:cNvPr id="31" name="Rectangle 30"/>
           <p:cNvSpPr/>
           <p:nvPr/>
         </p:nvSpPr>
@@ -25334,7 +27213,7 @@
       </p:sp>
       <p:sp>
         <p:nvSpPr>
-          <p:cNvPr id="30" name="TextBox 29"/>
+          <p:cNvPr id="32" name="TextBox 31"/>
           <p:cNvSpPr txBox="1"/>
           <p:nvPr/>
         </p:nvSpPr>
@@ -25380,7 +27259,7 @@
       </p:sp>
       <p:sp>
         <p:nvSpPr>
-          <p:cNvPr id="31" name="TextBox 30"/>
+          <p:cNvPr id="33" name="TextBox 32"/>
           <p:cNvSpPr txBox="1"/>
           <p:nvPr/>
         </p:nvSpPr>
@@ -25426,7 +27305,7 @@
       </p:sp>
       <p:sp>
         <p:nvSpPr>
-          <p:cNvPr id="32" name="Rounded Rectangle 31"/>
+          <p:cNvPr id="34" name="Rounded Rectangle 33"/>
           <p:cNvSpPr/>
           <p:nvPr/>
         </p:nvSpPr>
@@ -25476,7 +27355,7 @@
       </p:sp>
       <p:sp>
         <p:nvSpPr>
-          <p:cNvPr id="33" name="Oval 32"/>
+          <p:cNvPr id="35" name="Oval 34"/>
           <p:cNvSpPr/>
           <p:nvPr/>
         </p:nvSpPr>
@@ -25542,7 +27421,7 @@
       </p:sp>
       <p:sp>
         <p:nvSpPr>
-          <p:cNvPr id="34" name="TextBox 33"/>
+          <p:cNvPr id="36" name="TextBox 35"/>
           <p:cNvSpPr txBox="1"/>
           <p:nvPr/>
         </p:nvSpPr>
@@ -25588,7 +27467,7 @@
       </p:sp>
       <p:sp>
         <p:nvSpPr>
-          <p:cNvPr id="35" name="Rectangle 34"/>
+          <p:cNvPr id="37" name="Rectangle 36"/>
           <p:cNvSpPr/>
           <p:nvPr/>
         </p:nvSpPr>
@@ -25634,7 +27513,7 @@
       </p:sp>
       <p:sp>
         <p:nvSpPr>
-          <p:cNvPr id="36" name="TextBox 35"/>
+          <p:cNvPr id="38" name="TextBox 37"/>
           <p:cNvSpPr txBox="1"/>
           <p:nvPr/>
         </p:nvSpPr>
@@ -25680,7 +27559,7 @@
       </p:sp>
       <p:sp>
         <p:nvSpPr>
-          <p:cNvPr id="37" name="TextBox 36"/>
+          <p:cNvPr id="39" name="TextBox 38"/>
           <p:cNvSpPr txBox="1"/>
           <p:nvPr/>
         </p:nvSpPr>
@@ -25726,7 +27605,7 @@
       </p:sp>
       <p:sp>
         <p:nvSpPr>
-          <p:cNvPr id="38" name="Rounded Rectangle 37"/>
+          <p:cNvPr id="40" name="Rounded Rectangle 39"/>
           <p:cNvSpPr/>
           <p:nvPr/>
         </p:nvSpPr>
@@ -25776,7 +27655,7 @@
       </p:sp>
       <p:sp>
         <p:nvSpPr>
-          <p:cNvPr id="39" name="Oval 38"/>
+          <p:cNvPr id="41" name="Oval 40"/>
           <p:cNvSpPr/>
           <p:nvPr/>
         </p:nvSpPr>
@@ -25842,7 +27721,7 @@
       </p:sp>
       <p:sp>
         <p:nvSpPr>
-          <p:cNvPr id="40" name="TextBox 39"/>
+          <p:cNvPr id="42" name="TextBox 41"/>
           <p:cNvSpPr txBox="1"/>
           <p:nvPr/>
         </p:nvSpPr>
@@ -25888,7 +27767,7 @@
       </p:sp>
       <p:sp>
         <p:nvSpPr>
-          <p:cNvPr id="41" name="Rectangle 40"/>
+          <p:cNvPr id="43" name="Rectangle 42"/>
           <p:cNvSpPr/>
           <p:nvPr/>
         </p:nvSpPr>
@@ -25934,7 +27813,7 @@
       </p:sp>
       <p:sp>
         <p:nvSpPr>
-          <p:cNvPr id="42" name="TextBox 41"/>
+          <p:cNvPr id="44" name="TextBox 43"/>
           <p:cNvSpPr txBox="1"/>
           <p:nvPr/>
         </p:nvSpPr>
@@ -25980,7 +27859,7 @@
       </p:sp>
       <p:sp>
         <p:nvSpPr>
-          <p:cNvPr id="43" name="Rounded Rectangle 42"/>
+          <p:cNvPr id="45" name="Rounded Rectangle 44"/>
           <p:cNvSpPr/>
           <p:nvPr/>
         </p:nvSpPr>
@@ -26030,7 +27909,7 @@
       </p:sp>
       <p:sp>
         <p:nvSpPr>
-          <p:cNvPr id="44" name="Rectangle 43"/>
+          <p:cNvPr id="46" name="Rectangle 45"/>
           <p:cNvSpPr/>
           <p:nvPr/>
         </p:nvSpPr>
@@ -26076,7 +27955,7 @@
       </p:sp>
       <p:sp>
         <p:nvSpPr>
-          <p:cNvPr id="45" name="TextBox 44"/>
+          <p:cNvPr id="47" name="TextBox 46"/>
           <p:cNvSpPr txBox="1"/>
           <p:nvPr/>
         </p:nvSpPr>
@@ -26201,7 +28080,7 @@
         <p:spPr>
           <a:xfrm>
             <a:off x="620000" y="560000"/>
-            <a:ext cx="10952000" cy="620000"/>
+            <a:ext cx="10052000" cy="620000"/>
           </a:xfrm>
           <a:prstGeom prst="rect">
             <a:avLst/>
@@ -26422,9 +28301,33 @@
           </a:p>
         </p:txBody>
       </p:sp>
-      <p:sp>
-        <p:nvSpPr>
-          <p:cNvPr id="8" name="Rectangle 7"/>
+      <p:pic>
+        <p:nvPicPr>
+          <p:cNvPr id="8" name="Picture 7" descr="pod.png"/>
+          <p:cNvPicPr>
+            <a:picLocks noChangeAspect="1"/>
+          </p:cNvPicPr>
+          <p:nvPr/>
+        </p:nvPicPr>
+        <p:blipFill>
+          <a:blip r:embed="rId2"/>
+          <a:stretch>
+            <a:fillRect/>
+          </a:stretch>
+        </p:blipFill>
+        <p:spPr>
+          <a:xfrm>
+            <a:off x="10932000" y="275000"/>
+            <a:ext cx="640000" cy="640000"/>
+          </a:xfrm>
+          <a:prstGeom prst="rect">
+            <a:avLst/>
+          </a:prstGeom>
+        </p:spPr>
+      </p:pic>
+      <p:sp>
+        <p:nvSpPr>
+          <p:cNvPr id="9" name="Rectangle 8"/>
           <p:cNvSpPr/>
           <p:nvPr/>
         </p:nvSpPr>
@@ -26470,7 +28373,7 @@
       </p:sp>
       <p:sp>
         <p:nvSpPr>
-          <p:cNvPr id="9" name="Rectangle 8"/>
+          <p:cNvPr id="10" name="Rectangle 9"/>
           <p:cNvSpPr/>
           <p:nvPr/>
         </p:nvSpPr>
@@ -26516,7 +28419,7 @@
       </p:sp>
       <p:sp>
         <p:nvSpPr>
-          <p:cNvPr id="10" name="TextBox 9"/>
+          <p:cNvPr id="11" name="TextBox 10"/>
           <p:cNvSpPr txBox="1"/>
           <p:nvPr/>
         </p:nvSpPr>
@@ -26562,7 +28465,7 @@
       </p:sp>
       <p:sp>
         <p:nvSpPr>
-          <p:cNvPr id="11" name="TextBox 10"/>
+          <p:cNvPr id="12" name="TextBox 11"/>
           <p:cNvSpPr txBox="1"/>
           <p:nvPr/>
         </p:nvSpPr>
@@ -26608,7 +28511,7 @@
       </p:sp>
       <p:sp>
         <p:nvSpPr>
-          <p:cNvPr id="12" name="TextBox 11"/>
+          <p:cNvPr id="13" name="TextBox 12"/>
           <p:cNvSpPr txBox="1"/>
           <p:nvPr/>
         </p:nvSpPr>
@@ -26654,7 +28557,7 @@
       </p:sp>
       <p:sp>
         <p:nvSpPr>
-          <p:cNvPr id="13" name="Rectangle 12"/>
+          <p:cNvPr id="14" name="Rectangle 13"/>
           <p:cNvSpPr/>
           <p:nvPr/>
         </p:nvSpPr>
@@ -26700,7 +28603,7 @@
       </p:sp>
       <p:sp>
         <p:nvSpPr>
-          <p:cNvPr id="14" name="TextBox 13"/>
+          <p:cNvPr id="15" name="TextBox 14"/>
           <p:cNvSpPr txBox="1"/>
           <p:nvPr/>
         </p:nvSpPr>
@@ -26746,7 +28649,7 @@
       </p:sp>
       <p:sp>
         <p:nvSpPr>
-          <p:cNvPr id="15" name="TextBox 14"/>
+          <p:cNvPr id="16" name="TextBox 15"/>
           <p:cNvSpPr txBox="1"/>
           <p:nvPr/>
         </p:nvSpPr>
@@ -26792,7 +28695,7 @@
       </p:sp>
       <p:sp>
         <p:nvSpPr>
-          <p:cNvPr id="16" name="TextBox 15"/>
+          <p:cNvPr id="17" name="TextBox 16"/>
           <p:cNvSpPr txBox="1"/>
           <p:nvPr/>
         </p:nvSpPr>
@@ -26838,7 +28741,7 @@
       </p:sp>
       <p:sp>
         <p:nvSpPr>
-          <p:cNvPr id="17" name="Rectangle 16"/>
+          <p:cNvPr id="18" name="Rectangle 17"/>
           <p:cNvSpPr/>
           <p:nvPr/>
         </p:nvSpPr>
@@ -26884,7 +28787,7 @@
       </p:sp>
       <p:sp>
         <p:nvSpPr>
-          <p:cNvPr id="18" name="Rectangle 17"/>
+          <p:cNvPr id="19" name="Rectangle 18"/>
           <p:cNvSpPr/>
           <p:nvPr/>
         </p:nvSpPr>
@@ -26930,7 +28833,7 @@
       </p:sp>
       <p:sp>
         <p:nvSpPr>
-          <p:cNvPr id="19" name="TextBox 18"/>
+          <p:cNvPr id="20" name="TextBox 19"/>
           <p:cNvSpPr txBox="1"/>
           <p:nvPr/>
         </p:nvSpPr>
@@ -26976,7 +28879,7 @@
       </p:sp>
       <p:sp>
         <p:nvSpPr>
-          <p:cNvPr id="20" name="TextBox 19"/>
+          <p:cNvPr id="21" name="TextBox 20"/>
           <p:cNvSpPr txBox="1"/>
           <p:nvPr/>
         </p:nvSpPr>
@@ -27022,7 +28925,7 @@
       </p:sp>
       <p:sp>
         <p:nvSpPr>
-          <p:cNvPr id="21" name="TextBox 20"/>
+          <p:cNvPr id="22" name="TextBox 21"/>
           <p:cNvSpPr txBox="1"/>
           <p:nvPr/>
         </p:nvSpPr>
@@ -27068,7 +28971,7 @@
       </p:sp>
       <p:sp>
         <p:nvSpPr>
-          <p:cNvPr id="22" name="Rectangle 21"/>
+          <p:cNvPr id="23" name="Rectangle 22"/>
           <p:cNvSpPr/>
           <p:nvPr/>
         </p:nvSpPr>
@@ -27114,7 +29017,7 @@
       </p:sp>
       <p:sp>
         <p:nvSpPr>
-          <p:cNvPr id="23" name="TextBox 22"/>
+          <p:cNvPr id="24" name="TextBox 23"/>
           <p:cNvSpPr txBox="1"/>
           <p:nvPr/>
         </p:nvSpPr>
@@ -27160,7 +29063,7 @@
       </p:sp>
       <p:sp>
         <p:nvSpPr>
-          <p:cNvPr id="24" name="TextBox 23"/>
+          <p:cNvPr id="25" name="TextBox 24"/>
           <p:cNvSpPr txBox="1"/>
           <p:nvPr/>
         </p:nvSpPr>
@@ -27206,7 +29109,7 @@
       </p:sp>
       <p:sp>
         <p:nvSpPr>
-          <p:cNvPr id="25" name="TextBox 24"/>
+          <p:cNvPr id="26" name="TextBox 25"/>
           <p:cNvSpPr txBox="1"/>
           <p:nvPr/>
         </p:nvSpPr>
@@ -27252,7 +29155,7 @@
       </p:sp>
       <p:sp>
         <p:nvSpPr>
-          <p:cNvPr id="26" name="Rectangle 25"/>
+          <p:cNvPr id="27" name="Rectangle 26"/>
           <p:cNvSpPr/>
           <p:nvPr/>
         </p:nvSpPr>
@@ -27298,7 +29201,7 @@
       </p:sp>
       <p:sp>
         <p:nvSpPr>
-          <p:cNvPr id="27" name="Rectangle 26"/>
+          <p:cNvPr id="28" name="Rectangle 27"/>
           <p:cNvSpPr/>
           <p:nvPr/>
         </p:nvSpPr>
@@ -27344,7 +29247,7 @@
       </p:sp>
       <p:sp>
         <p:nvSpPr>
-          <p:cNvPr id="28" name="TextBox 27"/>
+          <p:cNvPr id="29" name="TextBox 28"/>
           <p:cNvSpPr txBox="1"/>
           <p:nvPr/>
         </p:nvSpPr>
@@ -27390,7 +29293,7 @@
       </p:sp>
       <p:sp>
         <p:nvSpPr>
-          <p:cNvPr id="29" name="TextBox 28"/>
+          <p:cNvPr id="30" name="TextBox 29"/>
           <p:cNvSpPr txBox="1"/>
           <p:nvPr/>
         </p:nvSpPr>
@@ -27436,7 +29339,7 @@
       </p:sp>
       <p:sp>
         <p:nvSpPr>
-          <p:cNvPr id="30" name="TextBox 29"/>
+          <p:cNvPr id="31" name="TextBox 30"/>
           <p:cNvSpPr txBox="1"/>
           <p:nvPr/>
         </p:nvSpPr>
@@ -27482,7 +29385,7 @@
       </p:sp>
       <p:sp>
         <p:nvSpPr>
-          <p:cNvPr id="31" name="Rectangle 30"/>
+          <p:cNvPr id="32" name="Rectangle 31"/>
           <p:cNvSpPr/>
           <p:nvPr/>
         </p:nvSpPr>
@@ -27528,7 +29431,7 @@
       </p:sp>
       <p:sp>
         <p:nvSpPr>
-          <p:cNvPr id="32" name="TextBox 31"/>
+          <p:cNvPr id="33" name="TextBox 32"/>
           <p:cNvSpPr txBox="1"/>
           <p:nvPr/>
         </p:nvSpPr>
@@ -27574,7 +29477,7 @@
       </p:sp>
       <p:sp>
         <p:nvSpPr>
-          <p:cNvPr id="33" name="TextBox 32"/>
+          <p:cNvPr id="34" name="TextBox 33"/>
           <p:cNvSpPr txBox="1"/>
           <p:nvPr/>
         </p:nvSpPr>
@@ -27620,7 +29523,7 @@
       </p:sp>
       <p:sp>
         <p:nvSpPr>
-          <p:cNvPr id="34" name="TextBox 33"/>
+          <p:cNvPr id="35" name="TextBox 34"/>
           <p:cNvSpPr txBox="1"/>
           <p:nvPr/>
         </p:nvSpPr>
@@ -27666,7 +29569,7 @@
       </p:sp>
       <p:sp>
         <p:nvSpPr>
-          <p:cNvPr id="35" name="Rectangle 34"/>
+          <p:cNvPr id="36" name="Rectangle 35"/>
           <p:cNvSpPr/>
           <p:nvPr/>
         </p:nvSpPr>
@@ -27712,7 +29615,7 @@
       </p:sp>
       <p:sp>
         <p:nvSpPr>
-          <p:cNvPr id="36" name="Rectangle 35"/>
+          <p:cNvPr id="37" name="Rectangle 36"/>
           <p:cNvSpPr/>
           <p:nvPr/>
         </p:nvSpPr>
@@ -27758,7 +29661,7 @@
       </p:sp>
       <p:sp>
         <p:nvSpPr>
-          <p:cNvPr id="37" name="TextBox 36"/>
+          <p:cNvPr id="38" name="TextBox 37"/>
           <p:cNvSpPr txBox="1"/>
           <p:nvPr/>
         </p:nvSpPr>
@@ -27804,7 +29707,7 @@
       </p:sp>
       <p:sp>
         <p:nvSpPr>
-          <p:cNvPr id="38" name="TextBox 37"/>
+          <p:cNvPr id="39" name="TextBox 38"/>
           <p:cNvSpPr txBox="1"/>
           <p:nvPr/>
         </p:nvSpPr>
@@ -27850,7 +29753,7 @@
       </p:sp>
       <p:sp>
         <p:nvSpPr>
-          <p:cNvPr id="39" name="TextBox 38"/>
+          <p:cNvPr id="40" name="TextBox 39"/>
           <p:cNvSpPr txBox="1"/>
           <p:nvPr/>
         </p:nvSpPr>
@@ -27896,7 +29799,7 @@
       </p:sp>
       <p:sp>
         <p:nvSpPr>
-          <p:cNvPr id="40" name="Rectangle 39"/>
+          <p:cNvPr id="41" name="Rectangle 40"/>
           <p:cNvSpPr/>
           <p:nvPr/>
         </p:nvSpPr>
@@ -27942,7 +29845,7 @@
       </p:sp>
       <p:sp>
         <p:nvSpPr>
-          <p:cNvPr id="41" name="TextBox 40"/>
+          <p:cNvPr id="42" name="TextBox 41"/>
           <p:cNvSpPr txBox="1"/>
           <p:nvPr/>
         </p:nvSpPr>
@@ -27988,7 +29891,7 @@
       </p:sp>
       <p:sp>
         <p:nvSpPr>
-          <p:cNvPr id="42" name="TextBox 41"/>
+          <p:cNvPr id="43" name="TextBox 42"/>
           <p:cNvSpPr txBox="1"/>
           <p:nvPr/>
         </p:nvSpPr>
@@ -28034,7 +29937,7 @@
       </p:sp>
       <p:sp>
         <p:nvSpPr>
-          <p:cNvPr id="43" name="TextBox 42"/>
+          <p:cNvPr id="44" name="TextBox 43"/>
           <p:cNvSpPr txBox="1"/>
           <p:nvPr/>
         </p:nvSpPr>
@@ -28080,7 +29983,7 @@
       </p:sp>
       <p:sp>
         <p:nvSpPr>
-          <p:cNvPr id="44" name="Rounded Rectangle 43"/>
+          <p:cNvPr id="45" name="Rounded Rectangle 44"/>
           <p:cNvSpPr/>
           <p:nvPr/>
         </p:nvSpPr>
@@ -28130,7 +30033,7 @@
       </p:sp>
       <p:sp>
         <p:nvSpPr>
-          <p:cNvPr id="45" name="Rectangle 44"/>
+          <p:cNvPr id="46" name="Rectangle 45"/>
           <p:cNvSpPr/>
           <p:nvPr/>
         </p:nvSpPr>
@@ -28176,7 +30079,7 @@
       </p:sp>
       <p:sp>
         <p:nvSpPr>
-          <p:cNvPr id="46" name="TextBox 45"/>
+          <p:cNvPr id="47" name="TextBox 46"/>
           <p:cNvSpPr txBox="1"/>
           <p:nvPr/>
         </p:nvSpPr>
@@ -28301,7 +30204,7 @@
         <p:spPr>
           <a:xfrm>
             <a:off x="620000" y="560000"/>
-            <a:ext cx="10952000" cy="620000"/>
+            <a:ext cx="10052000" cy="620000"/>
           </a:xfrm>
           <a:prstGeom prst="rect">
             <a:avLst/>
@@ -28522,9 +30425,33 @@
           </a:p>
         </p:txBody>
       </p:sp>
-      <p:sp>
-        <p:nvSpPr>
-          <p:cNvPr id="8" name="TextBox 7"/>
+      <p:pic>
+        <p:nvPicPr>
+          <p:cNvPr id="8" name="Picture 7" descr="kubernetes.png"/>
+          <p:cNvPicPr>
+            <a:picLocks noChangeAspect="1"/>
+          </p:cNvPicPr>
+          <p:nvPr/>
+        </p:nvPicPr>
+        <p:blipFill>
+          <a:blip r:embed="rId2"/>
+          <a:stretch>
+            <a:fillRect/>
+          </a:stretch>
+        </p:blipFill>
+        <p:spPr>
+          <a:xfrm>
+            <a:off x="10932000" y="275000"/>
+            <a:ext cx="640000" cy="640000"/>
+          </a:xfrm>
+          <a:prstGeom prst="rect">
+            <a:avLst/>
+          </a:prstGeom>
+        </p:spPr>
+      </p:pic>
+      <p:sp>
+        <p:nvSpPr>
+          <p:cNvPr id="9" name="TextBox 8"/>
           <p:cNvSpPr txBox="1"/>
           <p:nvPr/>
         </p:nvSpPr>
@@ -28570,7 +30497,7 @@
       </p:sp>
       <p:sp>
         <p:nvSpPr>
-          <p:cNvPr id="9" name="Rounded Rectangle 8"/>
+          <p:cNvPr id="10" name="Rounded Rectangle 9"/>
           <p:cNvSpPr/>
           <p:nvPr/>
         </p:nvSpPr>
@@ -28620,7 +30547,7 @@
       </p:sp>
       <p:sp>
         <p:nvSpPr>
-          <p:cNvPr id="10" name="Rectangle 9"/>
+          <p:cNvPr id="11" name="Rectangle 10"/>
           <p:cNvSpPr/>
           <p:nvPr/>
         </p:nvSpPr>
@@ -28666,7 +30593,7 @@
       </p:sp>
       <p:sp>
         <p:nvSpPr>
-          <p:cNvPr id="11" name="TextBox 10"/>
+          <p:cNvPr id="12" name="TextBox 11"/>
           <p:cNvSpPr txBox="1"/>
           <p:nvPr/>
         </p:nvSpPr>
@@ -29467,7 +31394,149 @@
       </p:sp>
       <p:sp>
         <p:nvSpPr>
-          <p:cNvPr id="14" name="Rounded Rectangle 13"/>
+          <p:cNvPr id="14" name="Freeform 13"/>
+          <p:cNvSpPr/>
+          <p:nvPr/>
+        </p:nvSpPr>
+        <p:spPr>
+          <a:xfrm>
+            <a:off x="9590000" y="1418800"/>
+            <a:ext cx="784000" cy="842800"/>
+          </a:xfrm>
+          <a:custGeom>
+            <a:avLst/>
+            <a:gdLst/>
+            <a:ahLst/>
+            <a:cxnLst/>
+            <a:rect l="l" t="t" r="r" b="b"/>
+            <a:pathLst>
+              <a:path w="784000" h="842800">
+                <a:moveTo>
+                  <a:pt x="235200" y="0"/>
+                </a:moveTo>
+                <a:lnTo>
+                  <a:pt x="235200" y="333200"/>
+                </a:lnTo>
+                <a:lnTo>
+                  <a:pt x="0" y="842800"/>
+                </a:lnTo>
+                <a:lnTo>
+                  <a:pt x="784000" y="842800"/>
+                </a:lnTo>
+                <a:lnTo>
+                  <a:pt x="548800" y="333200"/>
+                </a:lnTo>
+                <a:lnTo>
+                  <a:pt x="548800" y="0"/>
+                </a:lnTo>
+              </a:path>
+            </a:pathLst>
+          </a:custGeom>
+          <a:noFill/>
+          <a:ln w="33020">
+            <a:solidFill>
+              <a:srgbClr val="74A6FF"/>
+            </a:solidFill>
+          </a:ln>
+          <a:effectLst/>
+        </p:spPr>
+        <p:style>
+          <a:lnRef idx="1">
+            <a:schemeClr val="accent1"/>
+          </a:lnRef>
+          <a:fillRef idx="3">
+            <a:schemeClr val="accent1"/>
+          </a:fillRef>
+          <a:effectRef idx="2">
+            <a:schemeClr val="accent1"/>
+          </a:effectRef>
+          <a:fontRef idx="minor">
+            <a:schemeClr val="lt1"/>
+          </a:fontRef>
+        </p:style>
+        <p:txBody>
+          <a:bodyPr rtlCol="0" anchor="ctr"/>
+          <a:lstStyle/>
+          <a:p>
+            <a:pPr algn="ctr"/>
+          </a:p>
+        </p:txBody>
+      </p:sp>
+      <p:cxnSp>
+        <p:nvCxnSpPr>
+          <p:cNvPr id="15" name="Connector 14"/>
+          <p:cNvCxnSpPr/>
+          <p:nvPr/>
+        </p:nvCxnSpPr>
+        <p:spPr>
+          <a:xfrm>
+            <a:off x="9766400" y="1418800"/>
+            <a:ext cx="431200" cy="0"/>
+          </a:xfrm>
+          <a:prstGeom prst="line">
+            <a:avLst/>
+          </a:prstGeom>
+          <a:ln w="33020">
+            <a:solidFill>
+              <a:srgbClr val="74A6FF"/>
+            </a:solidFill>
+          </a:ln>
+          <a:effectLst/>
+        </p:spPr>
+        <p:style>
+          <a:lnRef idx="2">
+            <a:schemeClr val="accent1"/>
+          </a:lnRef>
+          <a:fillRef idx="0">
+            <a:schemeClr val="accent1"/>
+          </a:fillRef>
+          <a:effectRef idx="1">
+            <a:schemeClr val="accent1"/>
+          </a:effectRef>
+          <a:fontRef idx="minor">
+            <a:schemeClr val="tx1"/>
+          </a:fontRef>
+        </p:style>
+      </p:cxnSp>
+      <p:cxnSp>
+        <p:nvCxnSpPr>
+          <p:cNvPr id="16" name="Connector 15"/>
+          <p:cNvCxnSpPr/>
+          <p:nvPr/>
+        </p:nvCxnSpPr>
+        <p:spPr>
+          <a:xfrm>
+            <a:off x="9727200" y="2006800"/>
+            <a:ext cx="509600" cy="0"/>
+          </a:xfrm>
+          <a:prstGeom prst="line">
+            <a:avLst/>
+          </a:prstGeom>
+          <a:ln w="33020">
+            <a:solidFill>
+              <a:srgbClr val="74A6FF"/>
+            </a:solidFill>
+          </a:ln>
+          <a:effectLst/>
+        </p:spPr>
+        <p:style>
+          <a:lnRef idx="2">
+            <a:schemeClr val="accent1"/>
+          </a:lnRef>
+          <a:fillRef idx="0">
+            <a:schemeClr val="accent1"/>
+          </a:fillRef>
+          <a:effectRef idx="1">
+            <a:schemeClr val="accent1"/>
+          </a:effectRef>
+          <a:fontRef idx="minor">
+            <a:schemeClr val="tx1"/>
+          </a:fontRef>
+        </p:style>
+      </p:cxnSp>
+      <p:sp>
+        <p:nvSpPr>
+          <p:cNvPr id="17" name="Rounded Rectangle 16"/>
           <p:cNvSpPr/>
           <p:nvPr/>
         </p:nvSpPr>
@@ -29517,7 +31586,7 @@
       </p:sp>
       <p:sp>
         <p:nvSpPr>
-          <p:cNvPr id="15" name="Rectangle 14"/>
+          <p:cNvPr id="18" name="Rectangle 17"/>
           <p:cNvSpPr/>
           <p:nvPr/>
         </p:nvSpPr>
@@ -29563,7 +31632,7 @@
       </p:sp>
       <p:sp>
         <p:nvSpPr>
-          <p:cNvPr id="16" name="TextBox 15"/>
+          <p:cNvPr id="19" name="TextBox 18"/>
           <p:cNvSpPr txBox="1"/>
           <p:nvPr/>
         </p:nvSpPr>
@@ -29632,7 +31701,7 @@
       </p:sp>
       <p:sp>
         <p:nvSpPr>
-          <p:cNvPr id="17" name="Rectangle 16"/>
+          <p:cNvPr id="20" name="Rectangle 19"/>
           <p:cNvSpPr/>
           <p:nvPr/>
         </p:nvSpPr>
@@ -29678,7 +31747,7 @@
       </p:sp>
       <p:sp>
         <p:nvSpPr>
-          <p:cNvPr id="18" name="TextBox 17"/>
+          <p:cNvPr id="21" name="TextBox 20"/>
           <p:cNvSpPr txBox="1"/>
           <p:nvPr/>
         </p:nvSpPr>
@@ -29747,7 +31816,7 @@
       </p:sp>
       <p:sp>
         <p:nvSpPr>
-          <p:cNvPr id="19" name="Rectangle 18"/>
+          <p:cNvPr id="22" name="Rectangle 21"/>
           <p:cNvSpPr/>
           <p:nvPr/>
         </p:nvSpPr>
@@ -29793,7 +31862,7 @@
       </p:sp>
       <p:sp>
         <p:nvSpPr>
-          <p:cNvPr id="20" name="TextBox 19"/>
+          <p:cNvPr id="23" name="TextBox 22"/>
           <p:cNvSpPr txBox="1"/>
           <p:nvPr/>
         </p:nvSpPr>
@@ -29862,7 +31931,7 @@
       </p:sp>
       <p:sp>
         <p:nvSpPr>
-          <p:cNvPr id="21" name="Rectangle 20"/>
+          <p:cNvPr id="24" name="Rectangle 23"/>
           <p:cNvSpPr/>
           <p:nvPr/>
         </p:nvSpPr>
@@ -29908,7 +31977,7 @@
       </p:sp>
       <p:sp>
         <p:nvSpPr>
-          <p:cNvPr id="22" name="TextBox 21"/>
+          <p:cNvPr id="25" name="TextBox 24"/>
           <p:cNvSpPr txBox="1"/>
           <p:nvPr/>
         </p:nvSpPr>
@@ -29954,7 +32023,7 @@
       </p:sp>
       <p:sp>
         <p:nvSpPr>
-          <p:cNvPr id="23" name="TextBox 22"/>
+          <p:cNvPr id="26" name="TextBox 25"/>
           <p:cNvSpPr txBox="1"/>
           <p:nvPr/>
         </p:nvSpPr>
@@ -30068,80 +32137,30 @@
           </a:p>
         </p:txBody>
       </p:sp>
-      <p:sp>
-        <p:nvSpPr>
-          <p:cNvPr id="3" name="Freeform 2"/>
-          <p:cNvSpPr/>
-          <p:nvPr/>
-        </p:nvSpPr>
-        <p:spPr>
-          <a:xfrm>
-            <a:off x="9479608" y="4208000"/>
-            <a:ext cx="2924783" cy="2851453"/>
-          </a:xfrm>
-          <a:custGeom>
-            <a:avLst/>
-            <a:gdLst/>
-            <a:ahLst/>
-            <a:cxnLst/>
-            <a:rect l="l" t="t" r="r" b="b"/>
-            <a:pathLst>
-              <a:path w="2924783" h="2851453">
-                <a:moveTo>
-                  <a:pt x="1462392" y="0"/>
-                </a:moveTo>
-                <a:lnTo>
-                  <a:pt x="2635139" y="564765"/>
-                </a:lnTo>
-                <a:lnTo>
-                  <a:pt x="2924783" y="1833781"/>
-                </a:lnTo>
-                <a:lnTo>
-                  <a:pt x="2113217" y="2851453"/>
-                </a:lnTo>
-                <a:lnTo>
-                  <a:pt x="811566" y="2851453"/>
-                </a:lnTo>
-                <a:lnTo>
-                  <a:pt x="0" y="1833781"/>
-                </a:lnTo>
-                <a:lnTo>
-                  <a:pt x="289644" y="564765"/>
-                </a:lnTo>
-                <a:close/>
-              </a:path>
-            </a:pathLst>
-          </a:custGeom>
-          <a:noFill/>
-          <a:ln w="31750">
-            <a:solidFill>
-              <a:srgbClr val="26354E"/>
-            </a:solidFill>
-          </a:ln>
-          <a:effectLst/>
-        </p:spPr>
-        <p:style>
-          <a:lnRef idx="1">
-            <a:schemeClr val="accent1"/>
-          </a:lnRef>
-          <a:fillRef idx="3">
-            <a:schemeClr val="accent1"/>
-          </a:fillRef>
-          <a:effectRef idx="2">
-            <a:schemeClr val="accent1"/>
-          </a:effectRef>
-          <a:fontRef idx="minor">
-            <a:schemeClr val="lt1"/>
-          </a:fontRef>
-        </p:style>
-        <p:txBody>
-          <a:bodyPr rtlCol="0" anchor="ctr"/>
-          <a:lstStyle/>
-          <a:p>
-            <a:pPr algn="ctr"/>
-          </a:p>
-        </p:txBody>
-      </p:sp>
+      <p:pic>
+        <p:nvPicPr>
+          <p:cNvPr id="3" name="Picture 2" descr="control-plane.png"/>
+          <p:cNvPicPr>
+            <a:picLocks noChangeAspect="1"/>
+          </p:cNvPicPr>
+          <p:nvPr/>
+        </p:nvPicPr>
+        <p:blipFill>
+          <a:blip r:embed="rId2"/>
+          <a:stretch>
+            <a:fillRect/>
+          </a:stretch>
+        </p:blipFill>
+        <p:spPr>
+          <a:xfrm>
+            <a:off x="8842000" y="2150000"/>
+            <a:ext cx="1800000" cy="1800000"/>
+          </a:xfrm>
+          <a:prstGeom prst="rect">
+            <a:avLst/>
+          </a:prstGeom>
+        </p:spPr>
+      </p:pic>
       <p:sp>
         <p:nvSpPr>
           <p:cNvPr id="4" name="TextBox 3"/>

--- a/CLASE-06/01-CLASE-06-CKA.pptx
+++ b/CLASE-06/01-CLASE-06-CKA.pptx
@@ -4455,8 +4455,8 @@
         </p:nvSpPr>
         <p:spPr>
           <a:xfrm>
-            <a:off x="620000" y="2061000"/>
-            <a:ext cx="5316000" cy="3058000"/>
+            <a:off x="620000" y="1470000"/>
+            <a:ext cx="5316000" cy="2670000"/>
           </a:xfrm>
           <a:prstGeom prst="roundRect">
             <a:avLst>
@@ -4505,7 +4505,7 @@
         </p:nvSpPr>
         <p:spPr>
           <a:xfrm>
-            <a:off x="644000" y="2061000"/>
+            <a:off x="644000" y="1470000"/>
             <a:ext cx="5268000" cy="46000"/>
           </a:xfrm>
           <a:prstGeom prst="rect">
@@ -4551,7 +4551,7 @@
         </p:nvSpPr>
         <p:spPr>
           <a:xfrm>
-            <a:off x="880000" y="2321000"/>
+            <a:off x="880000" y="1730000"/>
             <a:ext cx="4796000" cy="570000"/>
           </a:xfrm>
           <a:prstGeom prst="rect">
@@ -4620,8 +4620,8 @@
         </p:nvSpPr>
         <p:spPr>
           <a:xfrm>
-            <a:off x="880000" y="2891000"/>
-            <a:ext cx="4796000" cy="2048000"/>
+            <a:off x="880000" y="2300000"/>
+            <a:ext cx="4796000" cy="1660000"/>
           </a:xfrm>
           <a:prstGeom prst="rect">
             <a:avLst/>
@@ -4740,8 +4740,8 @@
         </p:nvSpPr>
         <p:spPr>
           <a:xfrm>
-            <a:off x="6256000" y="2061000"/>
-            <a:ext cx="5316000" cy="3058000"/>
+            <a:off x="6256000" y="1470000"/>
+            <a:ext cx="5316000" cy="2670000"/>
           </a:xfrm>
           <a:prstGeom prst="roundRect">
             <a:avLst>
@@ -4790,7 +4790,7 @@
         </p:nvSpPr>
         <p:spPr>
           <a:xfrm>
-            <a:off x="6280000" y="2061000"/>
+            <a:off x="6280000" y="1470000"/>
             <a:ext cx="5268000" cy="46000"/>
           </a:xfrm>
           <a:prstGeom prst="rect">
@@ -4836,7 +4836,7 @@
         </p:nvSpPr>
         <p:spPr>
           <a:xfrm>
-            <a:off x="6516000" y="2321000"/>
+            <a:off x="6516000" y="1730000"/>
             <a:ext cx="4796000" cy="570000"/>
           </a:xfrm>
           <a:prstGeom prst="rect">
@@ -4905,8 +4905,8 @@
         </p:nvSpPr>
         <p:spPr>
           <a:xfrm>
-            <a:off x="6516000" y="2891000"/>
-            <a:ext cx="4796000" cy="2048000"/>
+            <a:off x="6516000" y="2300000"/>
+            <a:ext cx="4796000" cy="1660000"/>
           </a:xfrm>
           <a:prstGeom prst="rect">
             <a:avLst/>
@@ -5025,12 +5025,12 @@
         </p:nvSpPr>
         <p:spPr>
           <a:xfrm>
-            <a:off x="620000" y="5860000"/>
-            <a:ext cx="10952000" cy="470000"/>
+            <a:off x="620000" y="4310000"/>
+            <a:ext cx="10952000" cy="2000000"/>
           </a:xfrm>
           <a:prstGeom prst="roundRect">
             <a:avLst>
-              <a:gd name="adj" fmla="val 10000"/>
+              <a:gd name="adj" fmla="val 4500"/>
             </a:avLst>
           </a:prstGeom>
           <a:solidFill>
@@ -5075,8 +5075,8 @@
         </p:nvSpPr>
         <p:spPr>
           <a:xfrm>
-            <a:off x="650000" y="5884000"/>
-            <a:ext cx="40000" cy="422000"/>
+            <a:off x="646000" y="4332000"/>
+            <a:ext cx="40000" cy="1956000"/>
           </a:xfrm>
           <a:prstGeom prst="rect">
             <a:avLst/>
@@ -5121,8 +5121,8 @@
         </p:nvSpPr>
         <p:spPr>
           <a:xfrm>
-            <a:off x="860000" y="5860000"/>
-            <a:ext cx="10482000" cy="470000"/>
+            <a:off x="860000" y="4440000"/>
+            <a:ext cx="10522000" cy="1740000"/>
           </a:xfrm>
           <a:prstGeom prst="rect">
             <a:avLst/>
@@ -5130,31 +5130,100 @@
           <a:noFill/>
         </p:spPr>
         <p:txBody>
-          <a:bodyPr wrap="square" anchor="ctr" lIns="0" rIns="0" tIns="0" bIns="0">
+          <a:bodyPr wrap="square" anchor="t" lIns="0" rIns="0" tIns="0" bIns="0">
             <a:noAutofit/>
           </a:bodyPr>
           <a:lstStyle/>
           <a:p>
             <a:pPr algn="l" marL="0" indent="0">
               <a:lnSpc>
-                <a:spcPct val="116000"/>
-              </a:lnSpc>
-              <a:spcBef>
-                <a:spcPts val="0"/>
-              </a:spcBef>
-              <a:spcAft>
-                <a:spcPts val="0"/>
-              </a:spcAft>
-              <a:buNone/>
-            </a:pPr>
-            <a:r>
-              <a:rPr sz="1100" b="0" i="1">
+                <a:spcPct val="100000"/>
+              </a:lnSpc>
+              <a:spcBef>
+                <a:spcPts val="0"/>
+              </a:spcBef>
+              <a:spcAft>
+                <a:spcPts val="600"/>
+              </a:spcAft>
+              <a:buNone/>
+            </a:pPr>
+            <a:r>
+              <a:rPr sz="900" b="1" i="0" spc="200">
+                <a:solidFill>
+                  <a:srgbClr val="326CE5"/>
+                </a:solidFill>
+                <a:latin typeface="Segoe UI Semibold"/>
+              </a:rPr>
+              <a:t>TEORÍA</a:t>
+            </a:r>
+          </a:p>
+          <a:p>
+            <a:pPr algn="l" marL="0" indent="0">
+              <a:lnSpc>
+                <a:spcPct val="128000"/>
+              </a:lnSpc>
+              <a:spcBef>
+                <a:spcPts val="0"/>
+              </a:spcBef>
+              <a:spcAft>
+                <a:spcPts val="400"/>
+              </a:spcAft>
+              <a:buNone/>
+            </a:pPr>
+            <a:r>
+              <a:rPr sz="1050" b="0" i="0">
                 <a:solidFill>
                   <a:srgbClr val="BDC9DB"/>
                 </a:solidFill>
                 <a:latin typeface="Segoe UI"/>
               </a:rPr>
-              <a:t>Confundirlos cuesta diez minutos revisando el kubelet de un nodo que no tiene absolutamente nada.</a:t>
+              <a:t>Un nodo puede aparecer «mal» por dos razones opuestas que se confunden constantemente. NotReady significa que el nodo está averiado: el kubelet ha dejado de reportar al API server. Las causas típicas son el kubelet parado, el container runtime caído, el disco lleno o un problema de red del nodo. Se diagnostica por SSH: systemctl status kubelet, journalctl -u kubelet, df -h. Pasado un tiempo, los Pods que había en ese nodo se marcan para desalojo.</a:t>
+            </a:r>
+          </a:p>
+          <a:p>
+            <a:pPr algn="l" marL="0" indent="0">
+              <a:lnSpc>
+                <a:spcPct val="128000"/>
+              </a:lnSpc>
+              <a:spcBef>
+                <a:spcPts val="0"/>
+              </a:spcBef>
+              <a:spcAft>
+                <a:spcPts val="400"/>
+              </a:spcAft>
+              <a:buNone/>
+            </a:pPr>
+            <a:r>
+              <a:rPr sz="1050" b="0" i="0">
+                <a:solidFill>
+                  <a:srgbClr val="BDC9DB"/>
+                </a:solidFill>
+                <a:latin typeface="Segoe UI"/>
+              </a:rPr>
+              <a:t>SchedulingDisabled significa que el nodo está cerrado A PROPÓSITO: alguien ejecutó cordon o drain y no hizo uncordon. El nodo está perfectamente sano, los Pods que ya corren siguen funcionando con normalidad, y solo se rechazan Pods nuevos. Se arregla con un único comando: kubectl uncordon &lt;nodo&gt;.</a:t>
+            </a:r>
+          </a:p>
+          <a:p>
+            <a:pPr algn="l" marL="0" indent="0">
+              <a:lnSpc>
+                <a:spcPct val="128000"/>
+              </a:lnSpc>
+              <a:spcBef>
+                <a:spcPts val="0"/>
+              </a:spcBef>
+              <a:spcAft>
+                <a:spcPts val="400"/>
+              </a:spcAft>
+              <a:buNone/>
+            </a:pPr>
+            <a:r>
+              <a:rPr sz="1050" b="0" i="0">
+                <a:solidFill>
+                  <a:srgbClr val="BDC9DB"/>
+                </a:solidFill>
+                <a:latin typeface="Segoe UI"/>
+              </a:rPr>
+              <a:t>Confundirlos cuesta diez minutos revisando el kubelet de un nodo que no tiene absolutamente nada. La pista está en las Conditions del kubectl describe node y en la columna STATUS: «Ready,SchedulingDisabled» no es lo mismo que «NotReady».</a:t>
             </a:r>
           </a:p>
         </p:txBody>
@@ -5493,8 +5562,8 @@
         </p:nvSpPr>
         <p:spPr>
           <a:xfrm>
-            <a:off x="620000" y="1830000"/>
-            <a:ext cx="2022400" cy="760000"/>
+            <a:off x="620000" y="1670000"/>
+            <a:ext cx="2022400" cy="700000"/>
           </a:xfrm>
           <a:prstGeom prst="roundRect">
             <a:avLst>
@@ -5543,8 +5612,8 @@
         </p:nvSpPr>
         <p:spPr>
           <a:xfrm>
-            <a:off x="690000" y="1830000"/>
-            <a:ext cx="1882400" cy="760000"/>
+            <a:off x="690000" y="1670000"/>
+            <a:ext cx="1882400" cy="700000"/>
           </a:xfrm>
           <a:prstGeom prst="rect">
             <a:avLst/>
@@ -5589,7 +5658,7 @@
         </p:nvCxnSpPr>
         <p:spPr>
           <a:xfrm>
-            <a:off x="2666400" y="2210000"/>
+            <a:off x="2666400" y="2020000"/>
             <a:ext cx="162000" cy="0"/>
           </a:xfrm>
           <a:prstGeom prst="line">
@@ -5626,8 +5695,8 @@
         </p:nvSpPr>
         <p:spPr>
           <a:xfrm>
-            <a:off x="2852400" y="1830000"/>
-            <a:ext cx="2022400" cy="760000"/>
+            <a:off x="2852400" y="1670000"/>
+            <a:ext cx="2022400" cy="700000"/>
           </a:xfrm>
           <a:prstGeom prst="roundRect">
             <a:avLst>
@@ -5676,8 +5745,8 @@
         </p:nvSpPr>
         <p:spPr>
           <a:xfrm>
-            <a:off x="2922400" y="1830000"/>
-            <a:ext cx="1882400" cy="760000"/>
+            <a:off x="2922400" y="1670000"/>
+            <a:ext cx="1882400" cy="700000"/>
           </a:xfrm>
           <a:prstGeom prst="rect">
             <a:avLst/>
@@ -5722,7 +5791,7 @@
         </p:nvCxnSpPr>
         <p:spPr>
           <a:xfrm>
-            <a:off x="4898800" y="2210000"/>
+            <a:off x="4898800" y="2020000"/>
             <a:ext cx="162000" cy="0"/>
           </a:xfrm>
           <a:prstGeom prst="line">
@@ -5759,8 +5828,8 @@
         </p:nvSpPr>
         <p:spPr>
           <a:xfrm>
-            <a:off x="5084800" y="1830000"/>
-            <a:ext cx="2022400" cy="760000"/>
+            <a:off x="5084800" y="1670000"/>
+            <a:ext cx="2022400" cy="700000"/>
           </a:xfrm>
           <a:prstGeom prst="roundRect">
             <a:avLst>
@@ -5809,8 +5878,8 @@
         </p:nvSpPr>
         <p:spPr>
           <a:xfrm>
-            <a:off x="5154800" y="1830000"/>
-            <a:ext cx="1882400" cy="760000"/>
+            <a:off x="5154800" y="1670000"/>
+            <a:ext cx="1882400" cy="700000"/>
           </a:xfrm>
           <a:prstGeom prst="rect">
             <a:avLst/>
@@ -5855,7 +5924,7 @@
         </p:nvCxnSpPr>
         <p:spPr>
           <a:xfrm>
-            <a:off x="7131200" y="2210000"/>
+            <a:off x="7131200" y="2020000"/>
             <a:ext cx="162000" cy="0"/>
           </a:xfrm>
           <a:prstGeom prst="line">
@@ -5892,8 +5961,8 @@
         </p:nvSpPr>
         <p:spPr>
           <a:xfrm>
-            <a:off x="7317200" y="1830000"/>
-            <a:ext cx="2022400" cy="760000"/>
+            <a:off x="7317200" y="1670000"/>
+            <a:ext cx="2022400" cy="700000"/>
           </a:xfrm>
           <a:prstGeom prst="roundRect">
             <a:avLst>
@@ -5942,8 +6011,8 @@
         </p:nvSpPr>
         <p:spPr>
           <a:xfrm>
-            <a:off x="7387200" y="1830000"/>
-            <a:ext cx="1882400" cy="760000"/>
+            <a:off x="7387200" y="1670000"/>
+            <a:ext cx="1882400" cy="700000"/>
           </a:xfrm>
           <a:prstGeom prst="rect">
             <a:avLst/>
@@ -5988,7 +6057,7 @@
         </p:nvCxnSpPr>
         <p:spPr>
           <a:xfrm>
-            <a:off x="9363600" y="2210000"/>
+            <a:off x="9363600" y="2020000"/>
             <a:ext cx="162000" cy="0"/>
           </a:xfrm>
           <a:prstGeom prst="line">
@@ -6025,8 +6094,8 @@
         </p:nvSpPr>
         <p:spPr>
           <a:xfrm>
-            <a:off x="9549600" y="1830000"/>
-            <a:ext cx="2022400" cy="760000"/>
+            <a:off x="9549600" y="1670000"/>
+            <a:ext cx="2022400" cy="700000"/>
           </a:xfrm>
           <a:prstGeom prst="roundRect">
             <a:avLst>
@@ -6075,8 +6144,8 @@
         </p:nvSpPr>
         <p:spPr>
           <a:xfrm>
-            <a:off x="9619600" y="1830000"/>
-            <a:ext cx="1882400" cy="760000"/>
+            <a:off x="9619600" y="1670000"/>
+            <a:ext cx="1882400" cy="700000"/>
           </a:xfrm>
           <a:prstGeom prst="rect">
             <a:avLst/>
@@ -6121,12 +6190,12 @@
         </p:nvSpPr>
         <p:spPr>
           <a:xfrm>
-            <a:off x="620000" y="2950000"/>
-            <a:ext cx="10952000" cy="2320000"/>
+            <a:off x="620000" y="2670000"/>
+            <a:ext cx="10952000" cy="3610000"/>
           </a:xfrm>
           <a:prstGeom prst="roundRect">
             <a:avLst>
-              <a:gd name="adj" fmla="val 6000"/>
+              <a:gd name="adj" fmla="val 4500"/>
             </a:avLst>
           </a:prstGeom>
           <a:solidFill>
@@ -6171,8 +6240,8 @@
         </p:nvSpPr>
         <p:spPr>
           <a:xfrm>
-            <a:off x="650000" y="2974000"/>
-            <a:ext cx="40000" cy="2272000"/>
+            <a:off x="646000" y="2692000"/>
+            <a:ext cx="40000" cy="3566000"/>
           </a:xfrm>
           <a:prstGeom prst="rect">
             <a:avLst/>
@@ -6217,8 +6286,8 @@
         </p:nvSpPr>
         <p:spPr>
           <a:xfrm>
-            <a:off x="880000" y="3190000"/>
-            <a:ext cx="10432000" cy="1920000"/>
+            <a:off x="860000" y="2800000"/>
+            <a:ext cx="10522000" cy="3350000"/>
           </a:xfrm>
           <a:prstGeom prst="rect">
             <a:avLst/>
@@ -6239,14 +6308,14 @@
                 <a:spcPts val="0"/>
               </a:spcBef>
               <a:spcAft>
-                <a:spcPts val="1200"/>
-              </a:spcAft>
-              <a:buNone/>
-            </a:pPr>
-            <a:r>
-              <a:rPr sz="1000" b="1" i="0" spc="180">
-                <a:solidFill>
-                  <a:srgbClr val="74A6FF"/>
+                <a:spcPts val="600"/>
+              </a:spcAft>
+              <a:buNone/>
+            </a:pPr>
+            <a:r>
+              <a:rPr sz="900" b="1" i="0" spc="200">
+                <a:solidFill>
+                  <a:srgbClr val="326CE5"/>
                 </a:solidFill>
                 <a:latin typeface="Segoe UI Semibold"/>
               </a:rPr>
@@ -6254,18 +6323,17 @@
             </a:r>
           </a:p>
           <a:p>
-            <a:pPr algn="l" marL="182880" indent="-182880">
-              <a:lnSpc>
-                <a:spcPct val="120000"/>
-              </a:lnSpc>
-              <a:spcBef>
-                <a:spcPts val="0"/>
-              </a:spcBef>
-              <a:spcAft>
-                <a:spcPts val="700"/>
-              </a:spcAft>
-              <a:buFont typeface="Arial"/>
-              <a:buChar char="•"/>
+            <a:pPr algn="l" marL="0" indent="0">
+              <a:lnSpc>
+                <a:spcPct val="128000"/>
+              </a:lnSpc>
+              <a:spcBef>
+                <a:spcPts val="0"/>
+              </a:spcBef>
+              <a:spcAft>
+                <a:spcPts val="400"/>
+              </a:spcAft>
+              <a:buNone/>
             </a:pPr>
             <a:r>
               <a:rPr sz="1100" b="0" i="0">
@@ -6274,22 +6342,21 @@
                 </a:solidFill>
                 <a:latin typeface="Segoe UI"/>
               </a:rPr>
-              <a:t>El kubelet es un servicio de systemd, no un contenedor: sigue vivo aunque el API server esté caído.</a:t>
-            </a:r>
-          </a:p>
-          <a:p>
-            <a:pPr algn="l" marL="182880" indent="-182880">
-              <a:lnSpc>
-                <a:spcPct val="120000"/>
-              </a:lnSpc>
-              <a:spcBef>
-                <a:spcPts val="0"/>
-              </a:spcBef>
-              <a:spcAft>
-                <a:spcPts val="700"/>
-              </a:spcAft>
-              <a:buFont typeface="Arial"/>
-              <a:buChar char="•"/>
+              <a:t>Si kubectl no responde, el API server está caído, y como el API server es un static Pod que gestiona el kubelet, no hay ningún kubectl que pueda ayudarte. El diagnóstico se hace en el nodo maestro por SSH. El kubelet es un servicio de systemd, no un contenedor, así que sigue vivo: systemctl status kubelet y journalctl -u kubelet -n 80 te dicen por qué no consigue arrancar el static Pod (un error de sintaxis en el manifiesto, un flag mal, un certificado caducado).</a:t>
+            </a:r>
+          </a:p>
+          <a:p>
+            <a:pPr algn="l" marL="0" indent="0">
+              <a:lnSpc>
+                <a:spcPct val="128000"/>
+              </a:lnSpc>
+              <a:spcBef>
+                <a:spcPts val="0"/>
+              </a:spcBef>
+              <a:spcAft>
+                <a:spcPts val="400"/>
+              </a:spcAft>
+              <a:buNone/>
             </a:pPr>
             <a:r>
               <a:rPr sz="1100" b="0" i="0">
@@ -6298,22 +6365,21 @@
                 </a:solidFill>
                 <a:latin typeface="Segoe UI"/>
               </a:rPr>
-              <a:t>Sus logs registran por qué no consigue arrancar un static Pod. Es la fuente de verdad.</a:t>
-            </a:r>
-          </a:p>
-          <a:p>
-            <a:pPr algn="l" marL="182880" indent="-182880">
-              <a:lnSpc>
-                <a:spcPct val="120000"/>
-              </a:lnSpc>
-              <a:spcBef>
-                <a:spcPts val="0"/>
-              </a:spcBef>
-              <a:spcAft>
-                <a:spcPts val="700"/>
-              </a:spcAft>
-              <a:buFont typeface="Arial"/>
-              <a:buChar char="•"/>
+              <a:t>crictl es el sustituto de kubectl a nivel de nodo: crictl ps -a lista los contenedores, crictl logs &lt;id&gt; muestra sus logs. Con eso ves si el contenedor de kube-apiserver está reiniciándose y por qué.</a:t>
+            </a:r>
+          </a:p>
+          <a:p>
+            <a:pPr algn="l" marL="0" indent="0">
+              <a:lnSpc>
+                <a:spcPct val="128000"/>
+              </a:lnSpc>
+              <a:spcBef>
+                <a:spcPts val="0"/>
+              </a:spcBef>
+              <a:spcAft>
+                <a:spcPts val="400"/>
+              </a:spcAft>
+              <a:buNone/>
             </a:pPr>
             <a:r>
               <a:rPr sz="1100" b="0" i="0">
@@ -6322,79 +6388,7 @@
                 </a:solidFill>
                 <a:latin typeface="Segoe UI"/>
               </a:rPr>
-              <a:t>crictl sustituye a kubectl para ver y depurar contenedores en el nodo.</a:t>
-            </a:r>
-          </a:p>
-          <a:p>
-            <a:pPr algn="l" marL="182880" indent="-182880">
-              <a:lnSpc>
-                <a:spcPct val="120000"/>
-              </a:lnSpc>
-              <a:spcBef>
-                <a:spcPts val="0"/>
-              </a:spcBef>
-              <a:spcAft>
-                <a:spcPts val="700"/>
-              </a:spcAft>
-              <a:buFont typeface="Arial"/>
-              <a:buChar char="•"/>
-            </a:pPr>
-            <a:r>
-              <a:rPr sz="1100" b="0" i="0">
-                <a:solidFill>
-                  <a:srgbClr val="BDC9DB"/>
-                </a:solidFill>
-                <a:latin typeface="Segoe UI"/>
-              </a:rPr>
-              <a:t>Editar el manifiesto en /etc/kubernetes/manifests/ hace que el kubelet recree el componente en segundos.</a:t>
-            </a:r>
-          </a:p>
-          <a:p>
-            <a:pPr algn="l" marL="182880" indent="-182880">
-              <a:lnSpc>
-                <a:spcPct val="120000"/>
-              </a:lnSpc>
-              <a:spcBef>
-                <a:spcPts val="0"/>
-              </a:spcBef>
-              <a:spcAft>
-                <a:spcPts val="700"/>
-              </a:spcAft>
-              <a:buFont typeface="Arial"/>
-              <a:buChar char="•"/>
-            </a:pPr>
-            <a:r>
-              <a:rPr sz="1100" b="0" i="0">
-                <a:solidFill>
-                  <a:srgbClr val="BDC9DB"/>
-                </a:solidFill>
-                <a:latin typeface="Segoe UI"/>
-              </a:rPr>
-              <a:t>No existe systemctl restart kube-apiserver: el API server es un contenedor que gestiona el kubelet.</a:t>
-            </a:r>
-          </a:p>
-          <a:p>
-            <a:pPr algn="l" marL="182880" indent="-182880">
-              <a:lnSpc>
-                <a:spcPct val="120000"/>
-              </a:lnSpc>
-              <a:spcBef>
-                <a:spcPts val="0"/>
-              </a:spcBef>
-              <a:spcAft>
-                <a:spcPts val="700"/>
-              </a:spcAft>
-              <a:buFont typeface="Arial"/>
-              <a:buChar char="•"/>
-            </a:pPr>
-            <a:r>
-              <a:rPr sz="1100" b="0" i="0">
-                <a:solidFill>
-                  <a:srgbClr val="BDC9DB"/>
-                </a:solidFill>
-                <a:latin typeface="Segoe UI"/>
-              </a:rPr>
-              <a:t>kubeadm guarda copias de seguridad en /etc/kubernetes/tmp/kubeadm-backup-manifests-*</a:t>
+              <a:t>La corrección casi siempre es editar el manifiesto en /etc/kubernetes/manifests/: el kubelet detecta el cambio y recrea el componente en segundos. No existe systemctl restart kube-apiserver. Y kubeadm guarda copias de seguridad de los manifiestos en /etc/kubernetes/tmp/kubeadm-backup-manifests-* por si necesitas volver atrás.</a:t>
             </a:r>
           </a:p>
         </p:txBody>
@@ -8636,8 +8630,8 @@
         </p:nvSpPr>
         <p:spPr>
           <a:xfrm>
-            <a:off x="620000" y="1902000"/>
-            <a:ext cx="3437333" cy="1568000"/>
+            <a:off x="620000" y="1470000"/>
+            <a:ext cx="3437333" cy="1215000"/>
           </a:xfrm>
           <a:prstGeom prst="roundRect">
             <a:avLst>
@@ -8686,7 +8680,7 @@
         </p:nvSpPr>
         <p:spPr>
           <a:xfrm>
-            <a:off x="644000" y="1902000"/>
+            <a:off x="644000" y="1470000"/>
             <a:ext cx="3389333" cy="46000"/>
           </a:xfrm>
           <a:prstGeom prst="rect">
@@ -8732,7 +8726,7 @@
         </p:nvSpPr>
         <p:spPr>
           <a:xfrm>
-            <a:off x="850000" y="2152000"/>
+            <a:off x="820000" y="1690000"/>
             <a:ext cx="300000" cy="300000"/>
           </a:xfrm>
           <a:prstGeom prst="ellipse">
@@ -8806,7 +8800,7 @@
         </p:blipFill>
         <p:spPr>
           <a:xfrm>
-            <a:off x="3497333" y="2138000"/>
+            <a:off x="3527333" y="1676000"/>
             <a:ext cx="330000" cy="330000"/>
           </a:xfrm>
           <a:prstGeom prst="rect">
@@ -8822,8 +8816,8 @@
         </p:nvSpPr>
         <p:spPr>
           <a:xfrm>
-            <a:off x="1260000" y="2132000"/>
-            <a:ext cx="2377333" cy="340000"/>
+            <a:off x="1230000" y="1670000"/>
+            <a:ext cx="2407333" cy="340000"/>
           </a:xfrm>
           <a:prstGeom prst="rect">
             <a:avLst/>
@@ -8868,8 +8862,8 @@
         </p:nvSpPr>
         <p:spPr>
           <a:xfrm>
-            <a:off x="850000" y="2552000"/>
-            <a:ext cx="2977333" cy="838000"/>
+            <a:off x="820000" y="2030000"/>
+            <a:ext cx="3037333" cy="595000"/>
           </a:xfrm>
           <a:prstGeom prst="rect">
             <a:avLst/>
@@ -8884,18 +8878,18 @@
           <a:p>
             <a:pPr algn="l" marL="0" indent="0">
               <a:lnSpc>
-                <a:spcPct val="118000"/>
-              </a:lnSpc>
-              <a:spcBef>
-                <a:spcPts val="0"/>
-              </a:spcBef>
-              <a:spcAft>
-                <a:spcPts val="0"/>
-              </a:spcAft>
-              <a:buNone/>
-            </a:pPr>
-            <a:r>
-              <a:rPr sz="1100" b="0" i="0">
+                <a:spcPct val="112000"/>
+              </a:lnSpc>
+              <a:spcBef>
+                <a:spcPts val="0"/>
+              </a:spcBef>
+              <a:spcAft>
+                <a:spcPts val="0"/>
+              </a:spcAft>
+              <a:buNone/>
+            </a:pPr>
+            <a:r>
+              <a:rPr sz="1000" b="0" i="0">
                 <a:solidFill>
                   <a:srgbClr val="BDC9DB"/>
                 </a:solidFill>
@@ -8914,8 +8908,8 @@
         </p:nvSpPr>
         <p:spPr>
           <a:xfrm>
-            <a:off x="4377333" y="1902000"/>
-            <a:ext cx="3437333" cy="1568000"/>
+            <a:off x="4377333" y="1470000"/>
+            <a:ext cx="3437333" cy="1215000"/>
           </a:xfrm>
           <a:prstGeom prst="roundRect">
             <a:avLst>
@@ -8964,7 +8958,7 @@
         </p:nvSpPr>
         <p:spPr>
           <a:xfrm>
-            <a:off x="4401333" y="1902000"/>
+            <a:off x="4401333" y="1470000"/>
             <a:ext cx="3389333" cy="46000"/>
           </a:xfrm>
           <a:prstGeom prst="rect">
@@ -9010,7 +9004,7 @@
         </p:nvSpPr>
         <p:spPr>
           <a:xfrm>
-            <a:off x="4607333" y="2152000"/>
+            <a:off x="4577333" y="1690000"/>
             <a:ext cx="300000" cy="300000"/>
           </a:xfrm>
           <a:prstGeom prst="ellipse">
@@ -9084,7 +9078,7 @@
         </p:blipFill>
         <p:spPr>
           <a:xfrm>
-            <a:off x="7254666" y="2138000"/>
+            <a:off x="7284666" y="1676000"/>
             <a:ext cx="330000" cy="330000"/>
           </a:xfrm>
           <a:prstGeom prst="rect">
@@ -9100,8 +9094,8 @@
         </p:nvSpPr>
         <p:spPr>
           <a:xfrm>
-            <a:off x="5017333" y="2132000"/>
-            <a:ext cx="2377333" cy="340000"/>
+            <a:off x="4987333" y="1670000"/>
+            <a:ext cx="2407333" cy="340000"/>
           </a:xfrm>
           <a:prstGeom prst="rect">
             <a:avLst/>
@@ -9146,8 +9140,8 @@
         </p:nvSpPr>
         <p:spPr>
           <a:xfrm>
-            <a:off x="4607333" y="2552000"/>
-            <a:ext cx="2977333" cy="838000"/>
+            <a:off x="4577333" y="2030000"/>
+            <a:ext cx="3037333" cy="595000"/>
           </a:xfrm>
           <a:prstGeom prst="rect">
             <a:avLst/>
@@ -9162,18 +9156,18 @@
           <a:p>
             <a:pPr algn="l" marL="0" indent="0">
               <a:lnSpc>
-                <a:spcPct val="118000"/>
-              </a:lnSpc>
-              <a:spcBef>
-                <a:spcPts val="0"/>
-              </a:spcBef>
-              <a:spcAft>
-                <a:spcPts val="0"/>
-              </a:spcAft>
-              <a:buNone/>
-            </a:pPr>
-            <a:r>
-              <a:rPr sz="1100" b="0" i="0">
+                <a:spcPct val="112000"/>
+              </a:lnSpc>
+              <a:spcBef>
+                <a:spcPts val="0"/>
+              </a:spcBef>
+              <a:spcAft>
+                <a:spcPts val="0"/>
+              </a:spcAft>
+              <a:buNone/>
+            </a:pPr>
+            <a:r>
+              <a:rPr sz="1000" b="0" i="0">
                 <a:solidFill>
                   <a:srgbClr val="BDC9DB"/>
                 </a:solidFill>
@@ -9192,8 +9186,8 @@
         </p:nvSpPr>
         <p:spPr>
           <a:xfrm>
-            <a:off x="8134666" y="1902000"/>
-            <a:ext cx="3437333" cy="1568000"/>
+            <a:off x="8134666" y="1470000"/>
+            <a:ext cx="3437333" cy="1215000"/>
           </a:xfrm>
           <a:prstGeom prst="roundRect">
             <a:avLst>
@@ -9242,7 +9236,7 @@
         </p:nvSpPr>
         <p:spPr>
           <a:xfrm>
-            <a:off x="8158666" y="1902000"/>
+            <a:off x="8158666" y="1470000"/>
             <a:ext cx="3389333" cy="46000"/>
           </a:xfrm>
           <a:prstGeom prst="rect">
@@ -9288,7 +9282,7 @@
         </p:nvSpPr>
         <p:spPr>
           <a:xfrm>
-            <a:off x="8364666" y="2152000"/>
+            <a:off x="8334666" y="1690000"/>
             <a:ext cx="300000" cy="300000"/>
           </a:xfrm>
           <a:prstGeom prst="ellipse">
@@ -9362,7 +9356,7 @@
         </p:blipFill>
         <p:spPr>
           <a:xfrm>
-            <a:off x="11012000" y="2138000"/>
+            <a:off x="11042000" y="1676000"/>
             <a:ext cx="330000" cy="330000"/>
           </a:xfrm>
           <a:prstGeom prst="rect">
@@ -9378,8 +9372,8 @@
         </p:nvSpPr>
         <p:spPr>
           <a:xfrm>
-            <a:off x="8774666" y="2132000"/>
-            <a:ext cx="2377333" cy="340000"/>
+            <a:off x="8744666" y="1670000"/>
+            <a:ext cx="2407333" cy="340000"/>
           </a:xfrm>
           <a:prstGeom prst="rect">
             <a:avLst/>
@@ -9424,8 +9418,8 @@
         </p:nvSpPr>
         <p:spPr>
           <a:xfrm>
-            <a:off x="8364666" y="2552000"/>
-            <a:ext cx="2977333" cy="838000"/>
+            <a:off x="8334666" y="2030000"/>
+            <a:ext cx="3037333" cy="595000"/>
           </a:xfrm>
           <a:prstGeom prst="rect">
             <a:avLst/>
@@ -9440,18 +9434,18 @@
           <a:p>
             <a:pPr algn="l" marL="0" indent="0">
               <a:lnSpc>
-                <a:spcPct val="118000"/>
-              </a:lnSpc>
-              <a:spcBef>
-                <a:spcPts val="0"/>
-              </a:spcBef>
-              <a:spcAft>
-                <a:spcPts val="0"/>
-              </a:spcAft>
-              <a:buNone/>
-            </a:pPr>
-            <a:r>
-              <a:rPr sz="1100" b="0" i="0">
+                <a:spcPct val="112000"/>
+              </a:lnSpc>
+              <a:spcBef>
+                <a:spcPts val="0"/>
+              </a:spcBef>
+              <a:spcAft>
+                <a:spcPts val="0"/>
+              </a:spcAft>
+              <a:buNone/>
+            </a:pPr>
+            <a:r>
+              <a:rPr sz="1000" b="0" i="0">
                 <a:solidFill>
                   <a:srgbClr val="BDC9DB"/>
                 </a:solidFill>
@@ -9470,8 +9464,8 @@
         </p:nvSpPr>
         <p:spPr>
           <a:xfrm>
-            <a:off x="620000" y="3710000"/>
-            <a:ext cx="3437333" cy="1568000"/>
+            <a:off x="620000" y="2925000"/>
+            <a:ext cx="3437333" cy="1215000"/>
           </a:xfrm>
           <a:prstGeom prst="roundRect">
             <a:avLst>
@@ -9520,7 +9514,7 @@
         </p:nvSpPr>
         <p:spPr>
           <a:xfrm>
-            <a:off x="644000" y="3710000"/>
+            <a:off x="644000" y="2925000"/>
             <a:ext cx="3389333" cy="46000"/>
           </a:xfrm>
           <a:prstGeom prst="rect">
@@ -9566,7 +9560,7 @@
         </p:nvSpPr>
         <p:spPr>
           <a:xfrm>
-            <a:off x="850000" y="3960000"/>
+            <a:off x="820000" y="3145000"/>
             <a:ext cx="300000" cy="300000"/>
           </a:xfrm>
           <a:prstGeom prst="ellipse">
@@ -9640,7 +9634,7 @@
         </p:blipFill>
         <p:spPr>
           <a:xfrm>
-            <a:off x="3497333" y="3946000"/>
+            <a:off x="3527333" y="3131000"/>
             <a:ext cx="330000" cy="330000"/>
           </a:xfrm>
           <a:prstGeom prst="rect">
@@ -9656,8 +9650,8 @@
         </p:nvSpPr>
         <p:spPr>
           <a:xfrm>
-            <a:off x="1260000" y="3940000"/>
-            <a:ext cx="2377333" cy="340000"/>
+            <a:off x="1230000" y="3125000"/>
+            <a:ext cx="2407333" cy="340000"/>
           </a:xfrm>
           <a:prstGeom prst="rect">
             <a:avLst/>
@@ -9702,8 +9696,8 @@
         </p:nvSpPr>
         <p:spPr>
           <a:xfrm>
-            <a:off x="850000" y="4360000"/>
-            <a:ext cx="2977333" cy="838000"/>
+            <a:off x="820000" y="3485000"/>
+            <a:ext cx="3037333" cy="595000"/>
           </a:xfrm>
           <a:prstGeom prst="rect">
             <a:avLst/>
@@ -9718,18 +9712,18 @@
           <a:p>
             <a:pPr algn="l" marL="0" indent="0">
               <a:lnSpc>
-                <a:spcPct val="118000"/>
-              </a:lnSpc>
-              <a:spcBef>
-                <a:spcPts val="0"/>
-              </a:spcBef>
-              <a:spcAft>
-                <a:spcPts val="0"/>
-              </a:spcAft>
-              <a:buNone/>
-            </a:pPr>
-            <a:r>
-              <a:rPr sz="1100" b="0" i="0">
+                <a:spcPct val="112000"/>
+              </a:lnSpc>
+              <a:spcBef>
+                <a:spcPts val="0"/>
+              </a:spcBef>
+              <a:spcAft>
+                <a:spcPts val="0"/>
+              </a:spcAft>
+              <a:buNone/>
+            </a:pPr>
+            <a:r>
+              <a:rPr sz="1000" b="0" i="0">
                 <a:solidFill>
                   <a:srgbClr val="BDC9DB"/>
                 </a:solidFill>
@@ -9748,8 +9742,8 @@
         </p:nvSpPr>
         <p:spPr>
           <a:xfrm>
-            <a:off x="4377333" y="3710000"/>
-            <a:ext cx="3437333" cy="1568000"/>
+            <a:off x="4377333" y="2925000"/>
+            <a:ext cx="3437333" cy="1215000"/>
           </a:xfrm>
           <a:prstGeom prst="roundRect">
             <a:avLst>
@@ -9798,7 +9792,7 @@
         </p:nvSpPr>
         <p:spPr>
           <a:xfrm>
-            <a:off x="4401333" y="3710000"/>
+            <a:off x="4401333" y="2925000"/>
             <a:ext cx="3389333" cy="46000"/>
           </a:xfrm>
           <a:prstGeom prst="rect">
@@ -9844,7 +9838,7 @@
         </p:nvSpPr>
         <p:spPr>
           <a:xfrm>
-            <a:off x="4607333" y="3960000"/>
+            <a:off x="4577333" y="3145000"/>
             <a:ext cx="300000" cy="300000"/>
           </a:xfrm>
           <a:prstGeom prst="ellipse">
@@ -9918,7 +9912,7 @@
         </p:blipFill>
         <p:spPr>
           <a:xfrm>
-            <a:off x="7254666" y="3946000"/>
+            <a:off x="7284666" y="3131000"/>
             <a:ext cx="330000" cy="330000"/>
           </a:xfrm>
           <a:prstGeom prst="rect">
@@ -9934,8 +9928,8 @@
         </p:nvSpPr>
         <p:spPr>
           <a:xfrm>
-            <a:off x="5017333" y="3940000"/>
-            <a:ext cx="2377333" cy="340000"/>
+            <a:off x="4987333" y="3125000"/>
+            <a:ext cx="2407333" cy="340000"/>
           </a:xfrm>
           <a:prstGeom prst="rect">
             <a:avLst/>
@@ -9980,8 +9974,8 @@
         </p:nvSpPr>
         <p:spPr>
           <a:xfrm>
-            <a:off x="4607333" y="4360000"/>
-            <a:ext cx="2977333" cy="838000"/>
+            <a:off x="4577333" y="3485000"/>
+            <a:ext cx="3037333" cy="595000"/>
           </a:xfrm>
           <a:prstGeom prst="rect">
             <a:avLst/>
@@ -9996,18 +9990,18 @@
           <a:p>
             <a:pPr algn="l" marL="0" indent="0">
               <a:lnSpc>
-                <a:spcPct val="118000"/>
-              </a:lnSpc>
-              <a:spcBef>
-                <a:spcPts val="0"/>
-              </a:spcBef>
-              <a:spcAft>
-                <a:spcPts val="0"/>
-              </a:spcAft>
-              <a:buNone/>
-            </a:pPr>
-            <a:r>
-              <a:rPr sz="1100" b="0" i="0">
+                <a:spcPct val="112000"/>
+              </a:lnSpc>
+              <a:spcBef>
+                <a:spcPts val="0"/>
+              </a:spcBef>
+              <a:spcAft>
+                <a:spcPts val="0"/>
+              </a:spcAft>
+              <a:buNone/>
+            </a:pPr>
+            <a:r>
+              <a:rPr sz="1000" b="0" i="0">
                 <a:solidFill>
                   <a:srgbClr val="BDC9DB"/>
                 </a:solidFill>
@@ -10026,8 +10020,8 @@
         </p:nvSpPr>
         <p:spPr>
           <a:xfrm>
-            <a:off x="8134666" y="3710000"/>
-            <a:ext cx="3437333" cy="1568000"/>
+            <a:off x="8134666" y="2925000"/>
+            <a:ext cx="3437333" cy="1215000"/>
           </a:xfrm>
           <a:prstGeom prst="roundRect">
             <a:avLst>
@@ -10076,7 +10070,7 @@
         </p:nvSpPr>
         <p:spPr>
           <a:xfrm>
-            <a:off x="8158666" y="3710000"/>
+            <a:off x="8158666" y="2925000"/>
             <a:ext cx="3389333" cy="46000"/>
           </a:xfrm>
           <a:prstGeom prst="rect">
@@ -10122,7 +10116,7 @@
         </p:nvSpPr>
         <p:spPr>
           <a:xfrm>
-            <a:off x="8364666" y="3960000"/>
+            <a:off x="8334666" y="3145000"/>
             <a:ext cx="300000" cy="300000"/>
           </a:xfrm>
           <a:prstGeom prst="ellipse">
@@ -10196,7 +10190,7 @@
         </p:blipFill>
         <p:spPr>
           <a:xfrm>
-            <a:off x="11012000" y="3946000"/>
+            <a:off x="11042000" y="3131000"/>
             <a:ext cx="330000" cy="330000"/>
           </a:xfrm>
           <a:prstGeom prst="rect">
@@ -10212,8 +10206,8 @@
         </p:nvSpPr>
         <p:spPr>
           <a:xfrm>
-            <a:off x="8774666" y="3940000"/>
-            <a:ext cx="2377333" cy="340000"/>
+            <a:off x="8744666" y="3125000"/>
+            <a:ext cx="2407333" cy="340000"/>
           </a:xfrm>
           <a:prstGeom prst="rect">
             <a:avLst/>
@@ -10258,8 +10252,8 @@
         </p:nvSpPr>
         <p:spPr>
           <a:xfrm>
-            <a:off x="8364666" y="4360000"/>
-            <a:ext cx="2977333" cy="838000"/>
+            <a:off x="8334666" y="3485000"/>
+            <a:ext cx="3037333" cy="595000"/>
           </a:xfrm>
           <a:prstGeom prst="rect">
             <a:avLst/>
@@ -10274,18 +10268,18 @@
           <a:p>
             <a:pPr algn="l" marL="0" indent="0">
               <a:lnSpc>
-                <a:spcPct val="118000"/>
-              </a:lnSpc>
-              <a:spcBef>
-                <a:spcPts val="0"/>
-              </a:spcBef>
-              <a:spcAft>
-                <a:spcPts val="0"/>
-              </a:spcAft>
-              <a:buNone/>
-            </a:pPr>
-            <a:r>
-              <a:rPr sz="1100" b="0" i="0">
+                <a:spcPct val="112000"/>
+              </a:lnSpc>
+              <a:spcBef>
+                <a:spcPts val="0"/>
+              </a:spcBef>
+              <a:spcAft>
+                <a:spcPts val="0"/>
+              </a:spcAft>
+              <a:buNone/>
+            </a:pPr>
+            <a:r>
+              <a:rPr sz="1000" b="0" i="0">
                 <a:solidFill>
                   <a:srgbClr val="BDC9DB"/>
                 </a:solidFill>
@@ -10304,12 +10298,12 @@
         </p:nvSpPr>
         <p:spPr>
           <a:xfrm>
-            <a:off x="620000" y="5860000"/>
-            <a:ext cx="10952000" cy="470000"/>
+            <a:off x="620000" y="4310000"/>
+            <a:ext cx="10952000" cy="2000000"/>
           </a:xfrm>
           <a:prstGeom prst="roundRect">
             <a:avLst>
-              <a:gd name="adj" fmla="val 10000"/>
+              <a:gd name="adj" fmla="val 4500"/>
             </a:avLst>
           </a:prstGeom>
           <a:solidFill>
@@ -10354,8 +10348,8 @@
         </p:nvSpPr>
         <p:spPr>
           <a:xfrm>
-            <a:off x="650000" y="5884000"/>
-            <a:ext cx="40000" cy="422000"/>
+            <a:off x="646000" y="4332000"/>
+            <a:ext cx="40000" cy="1956000"/>
           </a:xfrm>
           <a:prstGeom prst="rect">
             <a:avLst/>
@@ -10400,8 +10394,8 @@
         </p:nvSpPr>
         <p:spPr>
           <a:xfrm>
-            <a:off x="860000" y="5860000"/>
-            <a:ext cx="10482000" cy="470000"/>
+            <a:off x="860000" y="4440000"/>
+            <a:ext cx="10522000" cy="1740000"/>
           </a:xfrm>
           <a:prstGeom prst="rect">
             <a:avLst/>
@@ -10409,31 +10403,100 @@
           <a:noFill/>
         </p:spPr>
         <p:txBody>
-          <a:bodyPr wrap="square" anchor="ctr" lIns="0" rIns="0" tIns="0" bIns="0">
+          <a:bodyPr wrap="square" anchor="t" lIns="0" rIns="0" tIns="0" bIns="0">
             <a:noAutofit/>
           </a:bodyPr>
           <a:lstStyle/>
           <a:p>
             <a:pPr algn="l" marL="0" indent="0">
               <a:lnSpc>
-                <a:spcPct val="116000"/>
-              </a:lnSpc>
-              <a:spcBef>
-                <a:spcPts val="0"/>
-              </a:spcBef>
-              <a:spcAft>
-                <a:spcPts val="0"/>
-              </a:spcAft>
-              <a:buNone/>
-            </a:pPr>
-            <a:r>
-              <a:rPr sz="1100" b="0" i="1">
+                <a:spcPct val="100000"/>
+              </a:lnSpc>
+              <a:spcBef>
+                <a:spcPts val="0"/>
+              </a:spcBef>
+              <a:spcAft>
+                <a:spcPts val="600"/>
+              </a:spcAft>
+              <a:buNone/>
+            </a:pPr>
+            <a:r>
+              <a:rPr sz="900" b="1" i="0" spc="200">
+                <a:solidFill>
+                  <a:srgbClr val="326CE5"/>
+                </a:solidFill>
+                <a:latin typeface="Segoe UI Semibold"/>
+              </a:rPr>
+              <a:t>TEORÍA</a:t>
+            </a:r>
+          </a:p>
+          <a:p>
+            <a:pPr algn="l" marL="0" indent="0">
+              <a:lnSpc>
+                <a:spcPct val="128000"/>
+              </a:lnSpc>
+              <a:spcBef>
+                <a:spcPts val="0"/>
+              </a:spcBef>
+              <a:spcAft>
+                <a:spcPts val="400"/>
+              </a:spcAft>
+              <a:buNone/>
+            </a:pPr>
+            <a:r>
+              <a:rPr sz="1000" b="0" i="0">
                 <a:solidFill>
                   <a:srgbClr val="BDC9DB"/>
                 </a:solidFill>
                 <a:latin typeface="Segoe UI"/>
               </a:rPr>
-              <a:t>No son mnemotecnias: son el orden en que hay que descartar causas. Saltarse un escalón es lo que hace perder tiempo.</a:t>
+              <a:t>Los seis mental models del curso no son mnemotecnias: son el ORDEN exacto en que hay que ir descartando causas dentro de cada capa. El de POD es el punto de partida de todo: get → describe → events → logs → logs --previous. El de SCHEDULING, para un Pod en Pending: Events → recursos → nodeSelector → affinity → taints.</a:t>
+            </a:r>
+          </a:p>
+          <a:p>
+            <a:pPr algn="l" marL="0" indent="0">
+              <a:lnSpc>
+                <a:spcPct val="128000"/>
+              </a:lnSpc>
+              <a:spcBef>
+                <a:spcPts val="0"/>
+              </a:spcBef>
+              <a:spcAft>
+                <a:spcPts val="400"/>
+              </a:spcAft>
+              <a:buNone/>
+            </a:pPr>
+            <a:r>
+              <a:rPr sz="1000" b="0" i="0">
+                <a:solidFill>
+                  <a:srgbClr val="BDC9DB"/>
+                </a:solidFill>
+                <a:latin typeface="Segoe UI"/>
+              </a:rPr>
+              <a:t>El de SERVICE, para conectividad interna: Service → selector → EndpointSlice → labels del Pod → targetPort. El de STORAGE, para un PVC que no enlaza: PVC → StorageClass → PV → accessMode → capacity → Pod. El de RBAC, para un Forbidden: identidad → Role/ClusterRole → binding → recurso → verbo, confirmado con auth can-i.</a:t>
+            </a:r>
+          </a:p>
+          <a:p>
+            <a:pPr algn="l" marL="0" indent="0">
+              <a:lnSpc>
+                <a:spcPct val="128000"/>
+              </a:lnSpc>
+              <a:spcBef>
+                <a:spcPts val="0"/>
+              </a:spcBef>
+              <a:spcAft>
+                <a:spcPts val="400"/>
+              </a:spcAft>
+              <a:buNone/>
+            </a:pPr>
+            <a:r>
+              <a:rPr sz="1000" b="0" i="0">
+                <a:solidFill>
+                  <a:srgbClr val="BDC9DB"/>
+                </a:solidFill>
+                <a:latin typeface="Segoe UI"/>
+              </a:rPr>
+              <a:t>El de NETWORKING junta todo lo externo: Pod → Service → EndpointSlice → DNS → NetworkPolicy → Ingress. Saltarse un escalón de cualquiera de estas rutas es lo que hace perder tiempo: se investiga algo de más arriba cuando el fallo estaba abajo.</a:t>
             </a:r>
           </a:p>
         </p:txBody>
@@ -10772,8 +10835,8 @@
         </p:nvSpPr>
         <p:spPr>
           <a:xfrm>
-            <a:off x="620000" y="1710000"/>
-            <a:ext cx="3510666" cy="680000"/>
+            <a:off x="620000" y="1670000"/>
+            <a:ext cx="3510666" cy="660000"/>
           </a:xfrm>
           <a:prstGeom prst="roundRect">
             <a:avLst>
@@ -10822,8 +10885,8 @@
         </p:nvSpPr>
         <p:spPr>
           <a:xfrm>
-            <a:off x="690000" y="1710000"/>
-            <a:ext cx="3370666" cy="680000"/>
+            <a:off x="690000" y="1670000"/>
+            <a:ext cx="3370666" cy="660000"/>
           </a:xfrm>
           <a:prstGeom prst="rect">
             <a:avLst/>
@@ -10868,7 +10931,7 @@
         </p:nvCxnSpPr>
         <p:spPr>
           <a:xfrm>
-            <a:off x="4154666" y="2050000"/>
+            <a:off x="4154666" y="2000000"/>
             <a:ext cx="162000" cy="0"/>
           </a:xfrm>
           <a:prstGeom prst="line">
@@ -10905,8 +10968,8 @@
         </p:nvSpPr>
         <p:spPr>
           <a:xfrm>
-            <a:off x="4340666" y="1710000"/>
-            <a:ext cx="3510666" cy="680000"/>
+            <a:off x="4340666" y="1670000"/>
+            <a:ext cx="3510666" cy="660000"/>
           </a:xfrm>
           <a:prstGeom prst="roundRect">
             <a:avLst>
@@ -10955,8 +11018,8 @@
         </p:nvSpPr>
         <p:spPr>
           <a:xfrm>
-            <a:off x="4410666" y="1710000"/>
-            <a:ext cx="3370666" cy="680000"/>
+            <a:off x="4410666" y="1670000"/>
+            <a:ext cx="3370666" cy="660000"/>
           </a:xfrm>
           <a:prstGeom prst="rect">
             <a:avLst/>
@@ -11001,7 +11064,7 @@
         </p:nvCxnSpPr>
         <p:spPr>
           <a:xfrm>
-            <a:off x="7875333" y="2050000"/>
+            <a:off x="7875333" y="2000000"/>
             <a:ext cx="162000" cy="0"/>
           </a:xfrm>
           <a:prstGeom prst="line">
@@ -11038,8 +11101,8 @@
         </p:nvSpPr>
         <p:spPr>
           <a:xfrm>
-            <a:off x="8061333" y="1710000"/>
-            <a:ext cx="3510666" cy="680000"/>
+            <a:off x="8061333" y="1670000"/>
+            <a:ext cx="3510666" cy="660000"/>
           </a:xfrm>
           <a:prstGeom prst="roundRect">
             <a:avLst>
@@ -11088,8 +11151,8 @@
         </p:nvSpPr>
         <p:spPr>
           <a:xfrm>
-            <a:off x="8131333" y="1710000"/>
-            <a:ext cx="3370666" cy="680000"/>
+            <a:off x="8131333" y="1670000"/>
+            <a:ext cx="3370666" cy="660000"/>
           </a:xfrm>
           <a:prstGeom prst="rect">
             <a:avLst/>
@@ -11134,8 +11197,8 @@
         </p:nvCxnSpPr>
         <p:spPr>
           <a:xfrm>
-            <a:off x="9816666" y="2416000"/>
-            <a:ext cx="0" cy="208000"/>
+            <a:off x="9816666" y="2356000"/>
+            <a:ext cx="0" cy="168000"/>
           </a:xfrm>
           <a:prstGeom prst="line">
             <a:avLst/>
@@ -11171,8 +11234,8 @@
         </p:nvSpPr>
         <p:spPr>
           <a:xfrm>
-            <a:off x="620000" y="2650000"/>
-            <a:ext cx="3510666" cy="680000"/>
+            <a:off x="620000" y="2550000"/>
+            <a:ext cx="3510666" cy="660000"/>
           </a:xfrm>
           <a:prstGeom prst="roundRect">
             <a:avLst>
@@ -11221,8 +11284,8 @@
         </p:nvSpPr>
         <p:spPr>
           <a:xfrm>
-            <a:off x="690000" y="2650000"/>
-            <a:ext cx="3370666" cy="680000"/>
+            <a:off x="690000" y="2550000"/>
+            <a:ext cx="3370666" cy="660000"/>
           </a:xfrm>
           <a:prstGeom prst="rect">
             <a:avLst/>
@@ -11267,7 +11330,7 @@
         </p:nvCxnSpPr>
         <p:spPr>
           <a:xfrm>
-            <a:off x="4154666" y="2990000"/>
+            <a:off x="4154666" y="2880000"/>
             <a:ext cx="162000" cy="0"/>
           </a:xfrm>
           <a:prstGeom prst="line">
@@ -11304,8 +11367,8 @@
         </p:nvSpPr>
         <p:spPr>
           <a:xfrm>
-            <a:off x="4340666" y="2650000"/>
-            <a:ext cx="3510666" cy="680000"/>
+            <a:off x="4340666" y="2550000"/>
+            <a:ext cx="3510666" cy="660000"/>
           </a:xfrm>
           <a:prstGeom prst="roundRect">
             <a:avLst>
@@ -11354,8 +11417,8 @@
         </p:nvSpPr>
         <p:spPr>
           <a:xfrm>
-            <a:off x="4410666" y="2650000"/>
-            <a:ext cx="3370666" cy="680000"/>
+            <a:off x="4410666" y="2550000"/>
+            <a:ext cx="3370666" cy="660000"/>
           </a:xfrm>
           <a:prstGeom prst="rect">
             <a:avLst/>
@@ -11400,7 +11463,7 @@
         </p:nvCxnSpPr>
         <p:spPr>
           <a:xfrm>
-            <a:off x="7875333" y="2990000"/>
+            <a:off x="7875333" y="2880000"/>
             <a:ext cx="162000" cy="0"/>
           </a:xfrm>
           <a:prstGeom prst="line">
@@ -11437,8 +11500,8 @@
         </p:nvSpPr>
         <p:spPr>
           <a:xfrm>
-            <a:off x="8061333" y="2650000"/>
-            <a:ext cx="3510666" cy="680000"/>
+            <a:off x="8061333" y="2550000"/>
+            <a:ext cx="3510666" cy="660000"/>
           </a:xfrm>
           <a:prstGeom prst="roundRect">
             <a:avLst>
@@ -11487,8 +11550,8 @@
         </p:nvSpPr>
         <p:spPr>
           <a:xfrm>
-            <a:off x="8131333" y="2650000"/>
-            <a:ext cx="3370666" cy="680000"/>
+            <a:off x="8131333" y="2550000"/>
+            <a:ext cx="3370666" cy="660000"/>
           </a:xfrm>
           <a:prstGeom prst="rect">
             <a:avLst/>
@@ -11533,12 +11596,12 @@
         </p:nvSpPr>
         <p:spPr>
           <a:xfrm>
-            <a:off x="620000" y="3690000"/>
-            <a:ext cx="10952000" cy="2320000"/>
+            <a:off x="620000" y="3510000"/>
+            <a:ext cx="10952000" cy="2770000"/>
           </a:xfrm>
           <a:prstGeom prst="roundRect">
             <a:avLst>
-              <a:gd name="adj" fmla="val 6000"/>
+              <a:gd name="adj" fmla="val 4500"/>
             </a:avLst>
           </a:prstGeom>
           <a:solidFill>
@@ -11583,8 +11646,8 @@
         </p:nvSpPr>
         <p:spPr>
           <a:xfrm>
-            <a:off x="650000" y="3714000"/>
-            <a:ext cx="40000" cy="2272000"/>
+            <a:off x="646000" y="3532000"/>
+            <a:ext cx="40000" cy="2726000"/>
           </a:xfrm>
           <a:prstGeom prst="rect">
             <a:avLst/>
@@ -11629,8 +11692,8 @@
         </p:nvSpPr>
         <p:spPr>
           <a:xfrm>
-            <a:off x="880000" y="3930000"/>
-            <a:ext cx="10432000" cy="1920000"/>
+            <a:off x="860000" y="3640000"/>
+            <a:ext cx="10522000" cy="2510000"/>
           </a:xfrm>
           <a:prstGeom prst="rect">
             <a:avLst/>
@@ -11651,14 +11714,14 @@
                 <a:spcPts val="0"/>
               </a:spcBef>
               <a:spcAft>
-                <a:spcPts val="1200"/>
-              </a:spcAft>
-              <a:buNone/>
-            </a:pPr>
-            <a:r>
-              <a:rPr sz="1000" b="1" i="0" spc="180">
-                <a:solidFill>
-                  <a:srgbClr val="74A6FF"/>
+                <a:spcPts val="600"/>
+              </a:spcAft>
+              <a:buNone/>
+            </a:pPr>
+            <a:r>
+              <a:rPr sz="900" b="1" i="0" spc="200">
+                <a:solidFill>
+                  <a:srgbClr val="326CE5"/>
                 </a:solidFill>
                 <a:latin typeface="Segoe UI Semibold"/>
               </a:rPr>
@@ -11666,18 +11729,17 @@
             </a:r>
           </a:p>
           <a:p>
-            <a:pPr algn="l" marL="182880" indent="-182880">
-              <a:lnSpc>
-                <a:spcPct val="120000"/>
-              </a:lnSpc>
-              <a:spcBef>
-                <a:spcPts val="0"/>
-              </a:spcBef>
-              <a:spcAft>
-                <a:spcPts val="700"/>
-              </a:spcAft>
-              <a:buFont typeface="Arial"/>
-              <a:buChar char="•"/>
+            <a:pPr algn="l" marL="0" indent="0">
+              <a:lnSpc>
+                <a:spcPct val="128000"/>
+              </a:lnSpc>
+              <a:spcBef>
+                <a:spcPts val="0"/>
+              </a:spcBef>
+              <a:spcAft>
+                <a:spcPts val="400"/>
+              </a:spcAft>
+              <a:buNone/>
             </a:pPr>
             <a:r>
               <a:rPr sz="1100" b="0" i="0">
@@ -11686,22 +11748,21 @@
                 </a:solidFill>
                 <a:latin typeface="Segoe UI"/>
               </a:rPr>
-              <a:t>Sin permisos no puedes ni operar: auth can-i primero.</a:t>
-            </a:r>
-          </a:p>
-          <a:p>
-            <a:pPr algn="l" marL="182880" indent="-182880">
-              <a:lnSpc>
-                <a:spcPct val="120000"/>
-              </a:lnSpc>
-              <a:spcBef>
-                <a:spcPts val="0"/>
-              </a:spcBef>
-              <a:spcAft>
-                <a:spcPts val="700"/>
-              </a:spcAft>
-              <a:buFont typeface="Arial"/>
-              <a:buChar char="•"/>
+              <a:t>Cuando un escenario tiene varios fallos encadenados y todo parece roto a la vez, hay un orden fijo para atacarlos: de abajo hacia arriba, porque cada capa depende de que la anterior funcione.</a:t>
+            </a:r>
+          </a:p>
+          <a:p>
+            <a:pPr algn="l" marL="0" indent="0">
+              <a:lnSpc>
+                <a:spcPct val="128000"/>
+              </a:lnSpc>
+              <a:spcBef>
+                <a:spcPts val="0"/>
+              </a:spcBef>
+              <a:spcAft>
+                <a:spcPts val="400"/>
+              </a:spcAft>
+              <a:buNone/>
             </a:pPr>
             <a:r>
               <a:rPr sz="1100" b="0" i="0">
@@ -11710,22 +11771,21 @@
                 </a:solidFill>
                 <a:latin typeface="Segoe UI"/>
               </a:rPr>
-              <a:t>Sin nodo no hay Pod: un Pod Pending no puede tener un problema de red.</a:t>
-            </a:r>
-          </a:p>
-          <a:p>
-            <a:pPr algn="l" marL="182880" indent="-182880">
-              <a:lnSpc>
-                <a:spcPct val="120000"/>
-              </a:lnSpc>
-              <a:spcBef>
-                <a:spcPts val="0"/>
-              </a:spcBef>
-              <a:spcAft>
-                <a:spcPts val="700"/>
-              </a:spcAft>
-              <a:buFont typeface="Arial"/>
-              <a:buChar char="•"/>
+              <a:t>Sin PERMISOS no puedes ni operar: auth can-i primero. Sin nodo asignado no hay Pod, así que un Pod en Pending no puede tener un problema de red — se resuelve el SCHEDULING antes. Sin volumen, el Pod no monta y se queda en ContainerCreating: STORAGE va antes que nada que pase dentro del contenedor. Sin ConfigMap ni Secret, el contenedor ni siquiera se crea: CONFIGURACIÓN antes que APLICACIÓN.</a:t>
+            </a:r>
+          </a:p>
+          <a:p>
+            <a:pPr algn="l" marL="0" indent="0">
+              <a:lnSpc>
+                <a:spcPct val="128000"/>
+              </a:lnSpc>
+              <a:spcBef>
+                <a:spcPts val="0"/>
+              </a:spcBef>
+              <a:spcAft>
+                <a:spcPts val="400"/>
+              </a:spcAft>
+              <a:buNone/>
             </a:pPr>
             <a:r>
               <a:rPr sz="1100" b="0" i="0">
@@ -11734,79 +11794,7 @@
                 </a:solidFill>
                 <a:latin typeface="Segoe UI"/>
               </a:rPr>
-              <a:t>Sin volumen el Pod no monta y se queda en ContainerCreating.</a:t>
-            </a:r>
-          </a:p>
-          <a:p>
-            <a:pPr algn="l" marL="182880" indent="-182880">
-              <a:lnSpc>
-                <a:spcPct val="120000"/>
-              </a:lnSpc>
-              <a:spcBef>
-                <a:spcPts val="0"/>
-              </a:spcBef>
-              <a:spcAft>
-                <a:spcPts val="700"/>
-              </a:spcAft>
-              <a:buFont typeface="Arial"/>
-              <a:buChar char="•"/>
-            </a:pPr>
-            <a:r>
-              <a:rPr sz="1100" b="0" i="0">
-                <a:solidFill>
-                  <a:srgbClr val="BDC9DB"/>
-                </a:solidFill>
-                <a:latin typeface="Segoe UI"/>
-              </a:rPr>
-              <a:t>Sin ConfigMap o Secret el contenedor ni siquiera se crea.</a:t>
-            </a:r>
-          </a:p>
-          <a:p>
-            <a:pPr algn="l" marL="182880" indent="-182880">
-              <a:lnSpc>
-                <a:spcPct val="120000"/>
-              </a:lnSpc>
-              <a:spcBef>
-                <a:spcPts val="0"/>
-              </a:spcBef>
-              <a:spcAft>
-                <a:spcPts val="700"/>
-              </a:spcAft>
-              <a:buFont typeface="Arial"/>
-              <a:buChar char="•"/>
-            </a:pPr>
-            <a:r>
-              <a:rPr sz="1100" b="0" i="0">
-                <a:solidFill>
-                  <a:srgbClr val="BDC9DB"/>
-                </a:solidFill>
-                <a:latin typeface="Segoe UI"/>
-              </a:rPr>
-              <a:t>Sin contenedor corriendo no hay nada que probar por red.</a:t>
-            </a:r>
-          </a:p>
-          <a:p>
-            <a:pPr algn="l" marL="182880" indent="-182880">
-              <a:lnSpc>
-                <a:spcPct val="120000"/>
-              </a:lnSpc>
-              <a:spcBef>
-                <a:spcPts val="0"/>
-              </a:spcBef>
-              <a:spcAft>
-                <a:spcPts val="700"/>
-              </a:spcAft>
-              <a:buFont typeface="Arial"/>
-              <a:buChar char="•"/>
-            </a:pPr>
-            <a:r>
-              <a:rPr sz="1100" b="0" i="0">
-                <a:solidFill>
-                  <a:srgbClr val="BDC9DB"/>
-                </a:solidFill>
-                <a:latin typeface="Segoe UI"/>
-              </a:rPr>
-              <a:t>Y solo entonces: DNS, endpoints, políticas e Ingress.</a:t>
+              <a:t>Solo cuando hay un contenedor corriendo y sano tiene sentido probar la RED: DNS, endpoints, NetworkPolicy e Ingress. Intentar depurar la red de un Pod que está en CrashLoopBackOff es tiempo perdido.</a:t>
             </a:r>
           </a:p>
         </p:txBody>
@@ -15908,7 +15896,7 @@
         <p:spPr>
           <a:xfrm>
             <a:off x="850000" y="2788000"/>
-            <a:ext cx="4856000" cy="602000"/>
+            <a:ext cx="4856000" cy="622000"/>
           </a:xfrm>
           <a:prstGeom prst="rect">
             <a:avLst/>
@@ -16186,7 +16174,7 @@
         <p:spPr>
           <a:xfrm>
             <a:off x="6486000" y="2788000"/>
-            <a:ext cx="4856000" cy="602000"/>
+            <a:ext cx="4856000" cy="622000"/>
           </a:xfrm>
           <a:prstGeom prst="rect">
             <a:avLst/>
@@ -16464,7 +16452,7 @@
         <p:spPr>
           <a:xfrm>
             <a:off x="850000" y="4360000"/>
-            <a:ext cx="4856000" cy="602000"/>
+            <a:ext cx="4856000" cy="622000"/>
           </a:xfrm>
           <a:prstGeom prst="rect">
             <a:avLst/>
@@ -16742,7 +16730,7 @@
         <p:spPr>
           <a:xfrm>
             <a:off x="6486000" y="4360000"/>
-            <a:ext cx="4856000" cy="602000"/>
+            <a:ext cx="4856000" cy="622000"/>
           </a:xfrm>
           <a:prstGeom prst="rect">
             <a:avLst/>
@@ -26112,7 +26100,7 @@
         <p:spPr>
           <a:xfrm>
             <a:off x="620000" y="1470000"/>
-            <a:ext cx="10952000" cy="578333"/>
+            <a:ext cx="10952000" cy="303333"/>
           </a:xfrm>
           <a:prstGeom prst="roundRect">
             <a:avLst>
@@ -26161,7 +26149,7 @@
         </p:nvSpPr>
         <p:spPr>
           <a:xfrm>
-            <a:off x="840000" y="1594166"/>
+            <a:off x="840000" y="1456666"/>
             <a:ext cx="330000" cy="330000"/>
           </a:xfrm>
           <a:prstGeom prst="ellipse">
@@ -26228,7 +26216,7 @@
         <p:spPr>
           <a:xfrm>
             <a:off x="1370000" y="1470000"/>
-            <a:ext cx="2500000" cy="578333"/>
+            <a:ext cx="2500000" cy="303333"/>
           </a:xfrm>
           <a:prstGeom prst="rect">
             <a:avLst/>
@@ -26273,8 +26261,8 @@
         </p:nvSpPr>
         <p:spPr>
           <a:xfrm>
-            <a:off x="3970000" y="1597233"/>
-            <a:ext cx="8000" cy="323866"/>
+            <a:off x="3970000" y="1536733"/>
+            <a:ext cx="8000" cy="169866"/>
           </a:xfrm>
           <a:prstGeom prst="rect">
             <a:avLst/>
@@ -26320,7 +26308,7 @@
         <p:spPr>
           <a:xfrm>
             <a:off x="4170000" y="1470000"/>
-            <a:ext cx="7202000" cy="578333"/>
+            <a:ext cx="7202000" cy="303333"/>
           </a:xfrm>
           <a:prstGeom prst="rect">
             <a:avLst/>
@@ -26365,7 +26353,7 @@
         </p:nvSpPr>
         <p:spPr>
           <a:xfrm>
-            <a:off x="915000" y="2056333"/>
+            <a:off x="915000" y="1781333"/>
             <a:ext cx="180000" cy="154000"/>
           </a:xfrm>
           <a:prstGeom prst="rect">
@@ -26411,8 +26399,8 @@
         </p:nvSpPr>
         <p:spPr>
           <a:xfrm>
-            <a:off x="620000" y="2218333"/>
-            <a:ext cx="10952000" cy="578333"/>
+            <a:off x="620000" y="1943333"/>
+            <a:ext cx="10952000" cy="303333"/>
           </a:xfrm>
           <a:prstGeom prst="roundRect">
             <a:avLst>
@@ -26461,7 +26449,7 @@
         </p:nvSpPr>
         <p:spPr>
           <a:xfrm>
-            <a:off x="840000" y="2342500"/>
+            <a:off x="840000" y="1930000"/>
             <a:ext cx="330000" cy="330000"/>
           </a:xfrm>
           <a:prstGeom prst="ellipse">
@@ -26527,8 +26515,8 @@
         </p:nvSpPr>
         <p:spPr>
           <a:xfrm>
-            <a:off x="1370000" y="2218333"/>
-            <a:ext cx="2500000" cy="578333"/>
+            <a:off x="1370000" y="1943333"/>
+            <a:ext cx="2500000" cy="303333"/>
           </a:xfrm>
           <a:prstGeom prst="rect">
             <a:avLst/>
@@ -26573,8 +26561,8 @@
         </p:nvSpPr>
         <p:spPr>
           <a:xfrm>
-            <a:off x="3970000" y="2345566"/>
-            <a:ext cx="8000" cy="323866"/>
+            <a:off x="3970000" y="2010066"/>
+            <a:ext cx="8000" cy="169866"/>
           </a:xfrm>
           <a:prstGeom prst="rect">
             <a:avLst/>
@@ -26619,8 +26607,8 @@
         </p:nvSpPr>
         <p:spPr>
           <a:xfrm>
-            <a:off x="4170000" y="2218333"/>
-            <a:ext cx="7202000" cy="578333"/>
+            <a:off x="4170000" y="1943333"/>
+            <a:ext cx="7202000" cy="303333"/>
           </a:xfrm>
           <a:prstGeom prst="rect">
             <a:avLst/>
@@ -26665,7 +26653,7 @@
         </p:nvSpPr>
         <p:spPr>
           <a:xfrm>
-            <a:off x="915000" y="2804666"/>
+            <a:off x="915000" y="2254666"/>
             <a:ext cx="180000" cy="154000"/>
           </a:xfrm>
           <a:prstGeom prst="rect">
@@ -26711,8 +26699,8 @@
         </p:nvSpPr>
         <p:spPr>
           <a:xfrm>
-            <a:off x="620000" y="2966666"/>
-            <a:ext cx="10952000" cy="578333"/>
+            <a:off x="620000" y="2416666"/>
+            <a:ext cx="10952000" cy="303333"/>
           </a:xfrm>
           <a:prstGeom prst="roundRect">
             <a:avLst>
@@ -26761,7 +26749,7 @@
         </p:nvSpPr>
         <p:spPr>
           <a:xfrm>
-            <a:off x="840000" y="3090833"/>
+            <a:off x="840000" y="2403333"/>
             <a:ext cx="330000" cy="330000"/>
           </a:xfrm>
           <a:prstGeom prst="ellipse">
@@ -26827,8 +26815,8 @@
         </p:nvSpPr>
         <p:spPr>
           <a:xfrm>
-            <a:off x="1370000" y="2966666"/>
-            <a:ext cx="2500000" cy="578333"/>
+            <a:off x="1370000" y="2416666"/>
+            <a:ext cx="2500000" cy="303333"/>
           </a:xfrm>
           <a:prstGeom prst="rect">
             <a:avLst/>
@@ -26873,8 +26861,8 @@
         </p:nvSpPr>
         <p:spPr>
           <a:xfrm>
-            <a:off x="3970000" y="3093900"/>
-            <a:ext cx="8000" cy="323866"/>
+            <a:off x="3970000" y="2483400"/>
+            <a:ext cx="8000" cy="169866"/>
           </a:xfrm>
           <a:prstGeom prst="rect">
             <a:avLst/>
@@ -26919,8 +26907,8 @@
         </p:nvSpPr>
         <p:spPr>
           <a:xfrm>
-            <a:off x="4170000" y="2966666"/>
-            <a:ext cx="7202000" cy="578333"/>
+            <a:off x="4170000" y="2416666"/>
+            <a:ext cx="7202000" cy="303333"/>
           </a:xfrm>
           <a:prstGeom prst="rect">
             <a:avLst/>
@@ -26965,7 +26953,7 @@
         </p:nvSpPr>
         <p:spPr>
           <a:xfrm>
-            <a:off x="915000" y="3553000"/>
+            <a:off x="915000" y="2728000"/>
             <a:ext cx="180000" cy="154000"/>
           </a:xfrm>
           <a:prstGeom prst="rect">
@@ -27011,8 +26999,8 @@
         </p:nvSpPr>
         <p:spPr>
           <a:xfrm>
-            <a:off x="620000" y="3715000"/>
-            <a:ext cx="10952000" cy="578333"/>
+            <a:off x="620000" y="2890000"/>
+            <a:ext cx="10952000" cy="303333"/>
           </a:xfrm>
           <a:prstGeom prst="roundRect">
             <a:avLst>
@@ -27061,7 +27049,7 @@
         </p:nvSpPr>
         <p:spPr>
           <a:xfrm>
-            <a:off x="840000" y="3839166"/>
+            <a:off x="840000" y="2876666"/>
             <a:ext cx="330000" cy="330000"/>
           </a:xfrm>
           <a:prstGeom prst="ellipse">
@@ -27127,8 +27115,8 @@
         </p:nvSpPr>
         <p:spPr>
           <a:xfrm>
-            <a:off x="1370000" y="3715000"/>
-            <a:ext cx="2500000" cy="578333"/>
+            <a:off x="1370000" y="2890000"/>
+            <a:ext cx="2500000" cy="303333"/>
           </a:xfrm>
           <a:prstGeom prst="rect">
             <a:avLst/>
@@ -27173,8 +27161,8 @@
         </p:nvSpPr>
         <p:spPr>
           <a:xfrm>
-            <a:off x="3970000" y="3842233"/>
-            <a:ext cx="8000" cy="323866"/>
+            <a:off x="3970000" y="2956733"/>
+            <a:ext cx="8000" cy="169866"/>
           </a:xfrm>
           <a:prstGeom prst="rect">
             <a:avLst/>
@@ -27219,8 +27207,8 @@
         </p:nvSpPr>
         <p:spPr>
           <a:xfrm>
-            <a:off x="4170000" y="3715000"/>
-            <a:ext cx="7202000" cy="578333"/>
+            <a:off x="4170000" y="2890000"/>
+            <a:ext cx="7202000" cy="303333"/>
           </a:xfrm>
           <a:prstGeom prst="rect">
             <a:avLst/>
@@ -27265,7 +27253,7 @@
         </p:nvSpPr>
         <p:spPr>
           <a:xfrm>
-            <a:off x="915000" y="4301333"/>
+            <a:off x="915000" y="3201333"/>
             <a:ext cx="180000" cy="154000"/>
           </a:xfrm>
           <a:prstGeom prst="rect">
@@ -27311,8 +27299,8 @@
         </p:nvSpPr>
         <p:spPr>
           <a:xfrm>
-            <a:off x="620000" y="4463333"/>
-            <a:ext cx="10952000" cy="578333"/>
+            <a:off x="620000" y="3363333"/>
+            <a:ext cx="10952000" cy="303333"/>
           </a:xfrm>
           <a:prstGeom prst="roundRect">
             <a:avLst>
@@ -27361,7 +27349,7 @@
         </p:nvSpPr>
         <p:spPr>
           <a:xfrm>
-            <a:off x="840000" y="4587500"/>
+            <a:off x="840000" y="3349999"/>
             <a:ext cx="330000" cy="330000"/>
           </a:xfrm>
           <a:prstGeom prst="ellipse">
@@ -27427,8 +27415,8 @@
         </p:nvSpPr>
         <p:spPr>
           <a:xfrm>
-            <a:off x="1370000" y="4463333"/>
-            <a:ext cx="2500000" cy="578333"/>
+            <a:off x="1370000" y="3363333"/>
+            <a:ext cx="2500000" cy="303333"/>
           </a:xfrm>
           <a:prstGeom prst="rect">
             <a:avLst/>
@@ -27473,8 +27461,8 @@
         </p:nvSpPr>
         <p:spPr>
           <a:xfrm>
-            <a:off x="3970000" y="4590566"/>
-            <a:ext cx="8000" cy="323866"/>
+            <a:off x="3970000" y="3430066"/>
+            <a:ext cx="8000" cy="169866"/>
           </a:xfrm>
           <a:prstGeom prst="rect">
             <a:avLst/>
@@ -27519,8 +27507,8 @@
         </p:nvSpPr>
         <p:spPr>
           <a:xfrm>
-            <a:off x="4170000" y="4463333"/>
-            <a:ext cx="7202000" cy="578333"/>
+            <a:off x="4170000" y="3363333"/>
+            <a:ext cx="7202000" cy="303333"/>
           </a:xfrm>
           <a:prstGeom prst="rect">
             <a:avLst/>
@@ -27565,7 +27553,7 @@
         </p:nvSpPr>
         <p:spPr>
           <a:xfrm>
-            <a:off x="915000" y="5049666"/>
+            <a:off x="915000" y="3674666"/>
             <a:ext cx="180000" cy="154000"/>
           </a:xfrm>
           <a:prstGeom prst="rect">
@@ -27611,8 +27599,8 @@
         </p:nvSpPr>
         <p:spPr>
           <a:xfrm>
-            <a:off x="620000" y="5211666"/>
-            <a:ext cx="10952000" cy="578333"/>
+            <a:off x="620000" y="3836666"/>
+            <a:ext cx="10952000" cy="303333"/>
           </a:xfrm>
           <a:prstGeom prst="roundRect">
             <a:avLst>
@@ -27661,7 +27649,7 @@
         </p:nvSpPr>
         <p:spPr>
           <a:xfrm>
-            <a:off x="840000" y="5335833"/>
+            <a:off x="840000" y="3823333"/>
             <a:ext cx="330000" cy="330000"/>
           </a:xfrm>
           <a:prstGeom prst="ellipse">
@@ -27727,8 +27715,8 @@
         </p:nvSpPr>
         <p:spPr>
           <a:xfrm>
-            <a:off x="1370000" y="5211666"/>
-            <a:ext cx="2500000" cy="578333"/>
+            <a:off x="1370000" y="3836666"/>
+            <a:ext cx="2500000" cy="303333"/>
           </a:xfrm>
           <a:prstGeom prst="rect">
             <a:avLst/>
@@ -27773,8 +27761,8 @@
         </p:nvSpPr>
         <p:spPr>
           <a:xfrm>
-            <a:off x="3970000" y="5338900"/>
-            <a:ext cx="8000" cy="323866"/>
+            <a:off x="3970000" y="3903400"/>
+            <a:ext cx="8000" cy="169866"/>
           </a:xfrm>
           <a:prstGeom prst="rect">
             <a:avLst/>
@@ -27819,8 +27807,8 @@
         </p:nvSpPr>
         <p:spPr>
           <a:xfrm>
-            <a:off x="4170000" y="5211666"/>
-            <a:ext cx="7202000" cy="578333"/>
+            <a:off x="4170000" y="3836666"/>
+            <a:ext cx="7202000" cy="303333"/>
           </a:xfrm>
           <a:prstGeom prst="rect">
             <a:avLst/>
@@ -27865,12 +27853,12 @@
         </p:nvSpPr>
         <p:spPr>
           <a:xfrm>
-            <a:off x="620000" y="5910000"/>
-            <a:ext cx="10952000" cy="470000"/>
+            <a:off x="620000" y="4310000"/>
+            <a:ext cx="10952000" cy="2000000"/>
           </a:xfrm>
           <a:prstGeom prst="roundRect">
             <a:avLst>
-              <a:gd name="adj" fmla="val 10000"/>
+              <a:gd name="adj" fmla="val 4500"/>
             </a:avLst>
           </a:prstGeom>
           <a:solidFill>
@@ -27915,8 +27903,8 @@
         </p:nvSpPr>
         <p:spPr>
           <a:xfrm>
-            <a:off x="650000" y="5934000"/>
-            <a:ext cx="40000" cy="422000"/>
+            <a:off x="646000" y="4332000"/>
+            <a:ext cx="40000" cy="1956000"/>
           </a:xfrm>
           <a:prstGeom prst="rect">
             <a:avLst/>
@@ -27961,8 +27949,8 @@
         </p:nvSpPr>
         <p:spPr>
           <a:xfrm>
-            <a:off x="860000" y="5910000"/>
-            <a:ext cx="10482000" cy="470000"/>
+            <a:off x="860000" y="4440000"/>
+            <a:ext cx="10522000" cy="1740000"/>
           </a:xfrm>
           <a:prstGeom prst="rect">
             <a:avLst/>
@@ -27970,31 +27958,100 @@
           <a:noFill/>
         </p:spPr>
         <p:txBody>
-          <a:bodyPr wrap="square" anchor="ctr" lIns="0" rIns="0" tIns="0" bIns="0">
+          <a:bodyPr wrap="square" anchor="t" lIns="0" rIns="0" tIns="0" bIns="0">
             <a:noAutofit/>
           </a:bodyPr>
           <a:lstStyle/>
           <a:p>
             <a:pPr algn="l" marL="0" indent="0">
               <a:lnSpc>
-                <a:spcPct val="116000"/>
-              </a:lnSpc>
-              <a:spcBef>
-                <a:spcPts val="0"/>
-              </a:spcBef>
-              <a:spcAft>
-                <a:spcPts val="0"/>
-              </a:spcAft>
-              <a:buNone/>
-            </a:pPr>
-            <a:r>
-              <a:rPr sz="1100" b="0" i="1">
+                <a:spcPct val="100000"/>
+              </a:lnSpc>
+              <a:spcBef>
+                <a:spcPts val="0"/>
+              </a:spcBef>
+              <a:spcAft>
+                <a:spcPts val="600"/>
+              </a:spcAft>
+              <a:buNone/>
+            </a:pPr>
+            <a:r>
+              <a:rPr sz="900" b="1" i="0" spc="200">
+                <a:solidFill>
+                  <a:srgbClr val="326CE5"/>
+                </a:solidFill>
+                <a:latin typeface="Segoe UI Semibold"/>
+              </a:rPr>
+              <a:t>TEORÍA</a:t>
+            </a:r>
+          </a:p>
+          <a:p>
+            <a:pPr algn="l" marL="0" indent="0">
+              <a:lnSpc>
+                <a:spcPct val="128000"/>
+              </a:lnSpc>
+              <a:spcBef>
+                <a:spcPts val="0"/>
+              </a:spcBef>
+              <a:spcAft>
+                <a:spcPts val="400"/>
+              </a:spcAft>
+              <a:buNone/>
+            </a:pPr>
+            <a:r>
+              <a:rPr sz="1050" b="0" i="0">
                 <a:solidFill>
                   <a:srgbClr val="BDC9DB"/>
                 </a:solidFill>
                 <a:latin typeface="Segoe UI"/>
               </a:rPr>
-              <a:t>El error de siempre: saltar de «observar» a «corregir». Se arreglan tres cosas a la vez, dos estaban bien, y ya nadie sabe qué pasaba.</a:t>
+              <a:t>Lo que separa a quien diagnostica de quien prueba comandos al azar es seguir siempre el mismo método. Observar: con kubectl get, anota el estado EXACTO de cada objeto implicado, sin interpretarlo todavía. Acotar: decide en qué capa está el problema (scheduling, imagen, almacenamiento, configuración, permisos, aplicación, red) y no toques nada aún.</a:t>
+            </a:r>
+          </a:p>
+          <a:p>
+            <a:pPr algn="l" marL="0" indent="0">
+              <a:lnSpc>
+                <a:spcPct val="128000"/>
+              </a:lnSpc>
+              <a:spcBef>
+                <a:spcPts val="0"/>
+              </a:spcBef>
+              <a:spcAft>
+                <a:spcPts val="400"/>
+              </a:spcAft>
+              <a:buNone/>
+            </a:pPr>
+            <a:r>
+              <a:rPr sz="1050" b="0" i="0">
+                <a:solidFill>
+                  <a:srgbClr val="BDC9DB"/>
+                </a:solidFill>
+                <a:latin typeface="Segoe UI"/>
+              </a:rPr>
+              <a:t>Hipótesis: formula una causa CONCRETA («falta el ConfigMap x», «el selector no casa») antes de investigar. Verificar: ejecuta UN comando que confirme o descarte esa hipótesis (describe, events, logs, auth can-i). Corregir: aplica UNA sola cosa. Validar: comprueba que funciona antes de pasar a lo siguiente.</a:t>
+            </a:r>
+          </a:p>
+          <a:p>
+            <a:pPr algn="l" marL="0" indent="0">
+              <a:lnSpc>
+                <a:spcPct val="128000"/>
+              </a:lnSpc>
+              <a:spcBef>
+                <a:spcPts val="0"/>
+              </a:spcBef>
+              <a:spcAft>
+                <a:spcPts val="400"/>
+              </a:spcAft>
+              <a:buNone/>
+            </a:pPr>
+            <a:r>
+              <a:rPr sz="1050" b="0" i="0">
+                <a:solidFill>
+                  <a:srgbClr val="BDC9DB"/>
+                </a:solidFill>
+                <a:latin typeface="Segoe UI"/>
+              </a:rPr>
+              <a:t>El error clásico es saltar de «observar» directo a «corregir»: se cambian tres cosas a la vez, dos estaban bien, y ya nadie sabe qué pasaba. En el examen, con el tiempo justo, el método es lo que evita quemar veinte minutos en una tarea de cinco.</a:t>
             </a:r>
           </a:p>
         </p:txBody>
@@ -28563,7 +28620,7 @@
         </p:nvSpPr>
         <p:spPr>
           <a:xfrm>
-            <a:off x="620000" y="2447142"/>
+            <a:off x="620000" y="2211428"/>
             <a:ext cx="10952000" cy="8000"/>
           </a:xfrm>
           <a:prstGeom prst="rect">
@@ -28610,7 +28667,7 @@
         <p:spPr>
           <a:xfrm>
             <a:off x="780000" y="1890000"/>
-            <a:ext cx="3065600" cy="557142"/>
+            <a:ext cx="3065600" cy="321428"/>
           </a:xfrm>
           <a:prstGeom prst="rect">
             <a:avLst/>
@@ -28656,7 +28713,7 @@
         <p:spPr>
           <a:xfrm>
             <a:off x="4065600" y="1890000"/>
-            <a:ext cx="4160800" cy="557142"/>
+            <a:ext cx="4160800" cy="321428"/>
           </a:xfrm>
           <a:prstGeom prst="rect">
             <a:avLst/>
@@ -28702,7 +28759,7 @@
         <p:spPr>
           <a:xfrm>
             <a:off x="8446400" y="1890000"/>
-            <a:ext cx="3065600" cy="557142"/>
+            <a:ext cx="3065600" cy="321428"/>
           </a:xfrm>
           <a:prstGeom prst="rect">
             <a:avLst/>
@@ -28747,8 +28804,8 @@
         </p:nvSpPr>
         <p:spPr>
           <a:xfrm>
-            <a:off x="620000" y="2447142"/>
-            <a:ext cx="10952000" cy="557142"/>
+            <a:off x="620000" y="2211428"/>
+            <a:ext cx="10952000" cy="321428"/>
           </a:xfrm>
           <a:prstGeom prst="rect">
             <a:avLst/>
@@ -28793,7 +28850,7 @@
         </p:nvSpPr>
         <p:spPr>
           <a:xfrm>
-            <a:off x="620000" y="3004285"/>
+            <a:off x="620000" y="2532857"/>
             <a:ext cx="10952000" cy="8000"/>
           </a:xfrm>
           <a:prstGeom prst="rect">
@@ -28839,8 +28896,8 @@
         </p:nvSpPr>
         <p:spPr>
           <a:xfrm>
-            <a:off x="780000" y="2447142"/>
-            <a:ext cx="3065600" cy="557142"/>
+            <a:off x="780000" y="2211428"/>
+            <a:ext cx="3065600" cy="321428"/>
           </a:xfrm>
           <a:prstGeom prst="rect">
             <a:avLst/>
@@ -28885,8 +28942,8 @@
         </p:nvSpPr>
         <p:spPr>
           <a:xfrm>
-            <a:off x="4065600" y="2447142"/>
-            <a:ext cx="4160800" cy="557142"/>
+            <a:off x="4065600" y="2211428"/>
+            <a:ext cx="4160800" cy="321428"/>
           </a:xfrm>
           <a:prstGeom prst="rect">
             <a:avLst/>
@@ -28931,8 +28988,8 @@
         </p:nvSpPr>
         <p:spPr>
           <a:xfrm>
-            <a:off x="8446400" y="2447142"/>
-            <a:ext cx="3065600" cy="557142"/>
+            <a:off x="8446400" y="2211428"/>
+            <a:ext cx="3065600" cy="321428"/>
           </a:xfrm>
           <a:prstGeom prst="rect">
             <a:avLst/>
@@ -28977,7 +29034,7 @@
         </p:nvSpPr>
         <p:spPr>
           <a:xfrm>
-            <a:off x="620000" y="3561428"/>
+            <a:off x="620000" y="2854285"/>
             <a:ext cx="10952000" cy="8000"/>
           </a:xfrm>
           <a:prstGeom prst="rect">
@@ -29023,8 +29080,8 @@
         </p:nvSpPr>
         <p:spPr>
           <a:xfrm>
-            <a:off x="780000" y="3004285"/>
-            <a:ext cx="3065600" cy="557142"/>
+            <a:off x="780000" y="2532857"/>
+            <a:ext cx="3065600" cy="321428"/>
           </a:xfrm>
           <a:prstGeom prst="rect">
             <a:avLst/>
@@ -29069,8 +29126,8 @@
         </p:nvSpPr>
         <p:spPr>
           <a:xfrm>
-            <a:off x="4065600" y="3004285"/>
-            <a:ext cx="4160800" cy="557142"/>
+            <a:off x="4065600" y="2532857"/>
+            <a:ext cx="4160800" cy="321428"/>
           </a:xfrm>
           <a:prstGeom prst="rect">
             <a:avLst/>
@@ -29115,8 +29172,8 @@
         </p:nvSpPr>
         <p:spPr>
           <a:xfrm>
-            <a:off x="8446400" y="3004285"/>
-            <a:ext cx="3065600" cy="557142"/>
+            <a:off x="8446400" y="2532857"/>
+            <a:ext cx="3065600" cy="321428"/>
           </a:xfrm>
           <a:prstGeom prst="rect">
             <a:avLst/>
@@ -29161,8 +29218,8 @@
         </p:nvSpPr>
         <p:spPr>
           <a:xfrm>
-            <a:off x="620000" y="3561428"/>
-            <a:ext cx="10952000" cy="557142"/>
+            <a:off x="620000" y="2854285"/>
+            <a:ext cx="10952000" cy="321428"/>
           </a:xfrm>
           <a:prstGeom prst="rect">
             <a:avLst/>
@@ -29207,7 +29264,7 @@
         </p:nvSpPr>
         <p:spPr>
           <a:xfrm>
-            <a:off x="620000" y="4118571"/>
+            <a:off x="620000" y="3175714"/>
             <a:ext cx="10952000" cy="8000"/>
           </a:xfrm>
           <a:prstGeom prst="rect">
@@ -29253,8 +29310,8 @@
         </p:nvSpPr>
         <p:spPr>
           <a:xfrm>
-            <a:off x="780000" y="3561428"/>
-            <a:ext cx="3065600" cy="557142"/>
+            <a:off x="780000" y="2854285"/>
+            <a:ext cx="3065600" cy="321428"/>
           </a:xfrm>
           <a:prstGeom prst="rect">
             <a:avLst/>
@@ -29299,8 +29356,8 @@
         </p:nvSpPr>
         <p:spPr>
           <a:xfrm>
-            <a:off x="4065600" y="3561428"/>
-            <a:ext cx="4160800" cy="557142"/>
+            <a:off x="4065600" y="2854285"/>
+            <a:ext cx="4160800" cy="321428"/>
           </a:xfrm>
           <a:prstGeom prst="rect">
             <a:avLst/>
@@ -29345,8 +29402,8 @@
         </p:nvSpPr>
         <p:spPr>
           <a:xfrm>
-            <a:off x="8446400" y="3561428"/>
-            <a:ext cx="3065600" cy="557142"/>
+            <a:off x="8446400" y="2854285"/>
+            <a:ext cx="3065600" cy="321428"/>
           </a:xfrm>
           <a:prstGeom prst="rect">
             <a:avLst/>
@@ -29391,7 +29448,7 @@
         </p:nvSpPr>
         <p:spPr>
           <a:xfrm>
-            <a:off x="620000" y="4675714"/>
+            <a:off x="620000" y="3497142"/>
             <a:ext cx="10952000" cy="8000"/>
           </a:xfrm>
           <a:prstGeom prst="rect">
@@ -29437,8 +29494,8 @@
         </p:nvSpPr>
         <p:spPr>
           <a:xfrm>
-            <a:off x="780000" y="4118571"/>
-            <a:ext cx="3065600" cy="557142"/>
+            <a:off x="780000" y="3175714"/>
+            <a:ext cx="3065600" cy="321428"/>
           </a:xfrm>
           <a:prstGeom prst="rect">
             <a:avLst/>
@@ -29483,8 +29540,8 @@
         </p:nvSpPr>
         <p:spPr>
           <a:xfrm>
-            <a:off x="4065600" y="4118571"/>
-            <a:ext cx="4160800" cy="557142"/>
+            <a:off x="4065600" y="3175714"/>
+            <a:ext cx="4160800" cy="321428"/>
           </a:xfrm>
           <a:prstGeom prst="rect">
             <a:avLst/>
@@ -29529,8 +29586,8 @@
         </p:nvSpPr>
         <p:spPr>
           <a:xfrm>
-            <a:off x="8446400" y="4118571"/>
-            <a:ext cx="3065600" cy="557142"/>
+            <a:off x="8446400" y="3175714"/>
+            <a:ext cx="3065600" cy="321428"/>
           </a:xfrm>
           <a:prstGeom prst="rect">
             <a:avLst/>
@@ -29575,8 +29632,8 @@
         </p:nvSpPr>
         <p:spPr>
           <a:xfrm>
-            <a:off x="620000" y="4675714"/>
-            <a:ext cx="10952000" cy="557142"/>
+            <a:off x="620000" y="3497142"/>
+            <a:ext cx="10952000" cy="321428"/>
           </a:xfrm>
           <a:prstGeom prst="rect">
             <a:avLst/>
@@ -29621,7 +29678,7 @@
         </p:nvSpPr>
         <p:spPr>
           <a:xfrm>
-            <a:off x="620000" y="5232857"/>
+            <a:off x="620000" y="3818571"/>
             <a:ext cx="10952000" cy="8000"/>
           </a:xfrm>
           <a:prstGeom prst="rect">
@@ -29667,8 +29724,8 @@
         </p:nvSpPr>
         <p:spPr>
           <a:xfrm>
-            <a:off x="780000" y="4675714"/>
-            <a:ext cx="3065600" cy="557142"/>
+            <a:off x="780000" y="3497142"/>
+            <a:ext cx="3065600" cy="321428"/>
           </a:xfrm>
           <a:prstGeom prst="rect">
             <a:avLst/>
@@ -29713,8 +29770,8 @@
         </p:nvSpPr>
         <p:spPr>
           <a:xfrm>
-            <a:off x="4065600" y="4675714"/>
-            <a:ext cx="4160800" cy="557142"/>
+            <a:off x="4065600" y="3497142"/>
+            <a:ext cx="4160800" cy="321428"/>
           </a:xfrm>
           <a:prstGeom prst="rect">
             <a:avLst/>
@@ -29759,8 +29816,8 @@
         </p:nvSpPr>
         <p:spPr>
           <a:xfrm>
-            <a:off x="8446400" y="4675714"/>
-            <a:ext cx="3065600" cy="557142"/>
+            <a:off x="8446400" y="3497142"/>
+            <a:ext cx="3065600" cy="321428"/>
           </a:xfrm>
           <a:prstGeom prst="rect">
             <a:avLst/>
@@ -29805,7 +29862,7 @@
         </p:nvSpPr>
         <p:spPr>
           <a:xfrm>
-            <a:off x="620000" y="5790000"/>
+            <a:off x="620000" y="4140000"/>
             <a:ext cx="10952000" cy="8000"/>
           </a:xfrm>
           <a:prstGeom prst="rect">
@@ -29851,8 +29908,8 @@
         </p:nvSpPr>
         <p:spPr>
           <a:xfrm>
-            <a:off x="780000" y="5232857"/>
-            <a:ext cx="3065600" cy="557142"/>
+            <a:off x="780000" y="3818571"/>
+            <a:ext cx="3065600" cy="321428"/>
           </a:xfrm>
           <a:prstGeom prst="rect">
             <a:avLst/>
@@ -29897,8 +29954,8 @@
         </p:nvSpPr>
         <p:spPr>
           <a:xfrm>
-            <a:off x="4065600" y="5232857"/>
-            <a:ext cx="4160800" cy="557142"/>
+            <a:off x="4065600" y="3818571"/>
+            <a:ext cx="4160800" cy="321428"/>
           </a:xfrm>
           <a:prstGeom prst="rect">
             <a:avLst/>
@@ -29943,8 +30000,8 @@
         </p:nvSpPr>
         <p:spPr>
           <a:xfrm>
-            <a:off x="8446400" y="5232857"/>
-            <a:ext cx="3065600" cy="557142"/>
+            <a:off x="8446400" y="3818571"/>
+            <a:ext cx="3065600" cy="321428"/>
           </a:xfrm>
           <a:prstGeom prst="rect">
             <a:avLst/>
@@ -29989,12 +30046,12 @@
         </p:nvSpPr>
         <p:spPr>
           <a:xfrm>
-            <a:off x="620000" y="5910000"/>
-            <a:ext cx="10952000" cy="470000"/>
+            <a:off x="620000" y="4310000"/>
+            <a:ext cx="10952000" cy="2000000"/>
           </a:xfrm>
           <a:prstGeom prst="roundRect">
             <a:avLst>
-              <a:gd name="adj" fmla="val 10000"/>
+              <a:gd name="adj" fmla="val 4500"/>
             </a:avLst>
           </a:prstGeom>
           <a:solidFill>
@@ -30039,8 +30096,8 @@
         </p:nvSpPr>
         <p:spPr>
           <a:xfrm>
-            <a:off x="650000" y="5934000"/>
-            <a:ext cx="40000" cy="422000"/>
+            <a:off x="646000" y="4332000"/>
+            <a:ext cx="40000" cy="1956000"/>
           </a:xfrm>
           <a:prstGeom prst="rect">
             <a:avLst/>
@@ -30085,8 +30142,8 @@
         </p:nvSpPr>
         <p:spPr>
           <a:xfrm>
-            <a:off x="860000" y="5910000"/>
-            <a:ext cx="10482000" cy="470000"/>
+            <a:off x="860000" y="4440000"/>
+            <a:ext cx="10522000" cy="1740000"/>
           </a:xfrm>
           <a:prstGeom prst="rect">
             <a:avLst/>
@@ -30094,31 +30151,100 @@
           <a:noFill/>
         </p:spPr>
         <p:txBody>
-          <a:bodyPr wrap="square" anchor="ctr" lIns="0" rIns="0" tIns="0" bIns="0">
+          <a:bodyPr wrap="square" anchor="t" lIns="0" rIns="0" tIns="0" bIns="0">
             <a:noAutofit/>
           </a:bodyPr>
           <a:lstStyle/>
           <a:p>
             <a:pPr algn="l" marL="0" indent="0">
               <a:lnSpc>
-                <a:spcPct val="116000"/>
-              </a:lnSpc>
-              <a:spcBef>
-                <a:spcPts val="0"/>
-              </a:spcBef>
-              <a:spcAft>
-                <a:spcPts val="0"/>
-              </a:spcAft>
-              <a:buNone/>
-            </a:pPr>
-            <a:r>
-              <a:rPr sz="1100" b="0" i="1">
+                <a:spcPct val="100000"/>
+              </a:lnSpc>
+              <a:spcBef>
+                <a:spcPts val="0"/>
+              </a:spcBef>
+              <a:spcAft>
+                <a:spcPts val="600"/>
+              </a:spcAft>
+              <a:buNone/>
+            </a:pPr>
+            <a:r>
+              <a:rPr sz="900" b="1" i="0" spc="200">
+                <a:solidFill>
+                  <a:srgbClr val="326CE5"/>
+                </a:solidFill>
+                <a:latin typeface="Segoe UI Semibold"/>
+              </a:rPr>
+              <a:t>TEORÍA</a:t>
+            </a:r>
+          </a:p>
+          <a:p>
+            <a:pPr algn="l" marL="0" indent="0">
+              <a:lnSpc>
+                <a:spcPct val="128000"/>
+              </a:lnSpc>
+              <a:spcBef>
+                <a:spcPts val="0"/>
+              </a:spcBef>
+              <a:spcAft>
+                <a:spcPts val="400"/>
+              </a:spcAft>
+              <a:buNone/>
+            </a:pPr>
+            <a:r>
+              <a:rPr sz="1000" b="0" i="0">
                 <a:solidFill>
                   <a:srgbClr val="BDC9DB"/>
                 </a:solidFill>
                 <a:latin typeface="Segoe UI"/>
               </a:rPr>
-              <a:t>Pending e ImagePullBackOff se confunden constantemente. En Pending el Pod no tiene nodo; en ImagePullBackOff ya lo tiene.</a:t>
+              <a:t>Cada estado de Pod corresponde a una fase concreta del arranque y se investiga con un comando distinto. Pending: el scheduler no encontró nodo (recursos, taints, selectores) — se mira en los eventos. ContainerCreating atascado: el nodo ya está asignado pero falla el montaje del volumen o la red del Pod — también en los eventos. ImagePullBackOff: el nodo no puede traer la imagen (nombre mal, registro privado sin credenciales) — eventos.</a:t>
+            </a:r>
+          </a:p>
+          <a:p>
+            <a:pPr algn="l" marL="0" indent="0">
+              <a:lnSpc>
+                <a:spcPct val="128000"/>
+              </a:lnSpc>
+              <a:spcBef>
+                <a:spcPts val="0"/>
+              </a:spcBef>
+              <a:spcAft>
+                <a:spcPts val="400"/>
+              </a:spcAft>
+              <a:buNone/>
+            </a:pPr>
+            <a:r>
+              <a:rPr sz="1000" b="0" i="0">
+                <a:solidFill>
+                  <a:srgbClr val="BDC9DB"/>
+                </a:solidFill>
+                <a:latin typeface="Segoe UI"/>
+              </a:rPr>
+              <a:t>CreateContainerConfigError: falta un ConfigMap, un Secret o una clave que el Pod referencia — describe más get cm,secret. CrashLoopBackOff: el proceso arrancó y salió, la causa está en la instancia anterior — kubectl logs --previous. Running con 0/1 READY: el proceso vive pero la readinessProbe no pasa — describe, sección Conditions. OOMKilled con exit 137: superó limits.memory — describe, Last State.</a:t>
+            </a:r>
+          </a:p>
+          <a:p>
+            <a:pPr algn="l" marL="0" indent="0">
+              <a:lnSpc>
+                <a:spcPct val="128000"/>
+              </a:lnSpc>
+              <a:spcBef>
+                <a:spcPts val="0"/>
+              </a:spcBef>
+              <a:spcAft>
+                <a:spcPts val="400"/>
+              </a:spcAft>
+              <a:buNone/>
+            </a:pPr>
+            <a:r>
+              <a:rPr sz="1000" b="0" i="0">
+                <a:solidFill>
+                  <a:srgbClr val="BDC9DB"/>
+                </a:solidFill>
+                <a:latin typeface="Segoe UI"/>
+              </a:rPr>
+              <a:t>El par que más se confunde es Pending frente a ImagePullBackOff: en Pending el Pod aún no tiene nodo; en ImagePullBackOff ya lo tiene y el problema es la imagen. Leer bien el estado ahorra minutos de mirar en el sitio equivocado.</a:t>
             </a:r>
           </a:p>
         </p:txBody>
